--- a/assets/deck.pptx
+++ b/assets/deck.pptx
@@ -195,12 +195,12 @@
           </c:marker>
           <c:cat>
             <c:multiLvlStrRef>
-              <c:f>Sheet1!$A$2:$A$6</c:f>
+              <c:f>Sheet1!$A$2:$A$5</c:f>
               <c:multiLvlStrCache>
-                <c:ptCount val="5"/>
+                <c:ptCount val="4"/>
                 <c:lvl>
                   <c:pt idx="0">
-                    <c:v>Aug 28</c:v>
+                    <c:v>Start</c:v>
                   </c:pt>
                   <c:pt idx="1">
                     <c:v>Aug 31</c:v>
@@ -209,9 +209,6 @@
                     <c:v>Sep 1</c:v>
                   </c:pt>
                   <c:pt idx="3">
-                    <c:v>Sep 2</c:v>
-                  </c:pt>
-                  <c:pt idx="4">
                     <c:v>Sep 3</c:v>
                   </c:pt>
                 </c:lvl>
@@ -220,24 +217,21 @@
           </c:cat>
           <c:val>
             <c:numRef>
-              <c:f>Sheet1!$B$2:$B$6</c:f>
+              <c:f>Sheet1!$B$2:$B$5</c:f>
               <c:numCache>
                 <c:formatCode>General</c:formatCode>
-                <c:ptCount val="5"/>
+                <c:ptCount val="4"/>
                 <c:pt idx="0">
                   <c:v>100000</c:v>
                 </c:pt>
                 <c:pt idx="1">
-                  <c:v>89283.96</c:v>
+                  <c:v>89283.95999999999</c:v>
                 </c:pt>
                 <c:pt idx="2">
-                  <c:v>103637.13</c:v>
+                  <c:v>103637.12999999999</c:v>
                 </c:pt>
                 <c:pt idx="3">
-                  <c:v>103637.13</c:v>
-                </c:pt>
-                <c:pt idx="4">
-                  <c:v>183298.37</c:v>
+                  <c:v>179087.12</c:v>
                 </c:pt>
               </c:numCache>
             </c:numRef>
@@ -316,7 +310,7 @@
         <c:axId val="2094734552"/>
         <c:scaling>
           <c:orientation val="minMax"/>
-          <c:max val="220000"/>
+          <c:max val="180000"/>
           <c:min val="80000"/>
         </c:scaling>
         <c:delete val="0"/>
@@ -786,7 +780,7 @@
           <a:p>
             <a:r>
               <a:rPr lang="en-US" dirty="0"/>
-              <a:t>Every agent in this hackathon opens with an edge claim. This one opens with a refutation — and the live number makes the point sharper, not softer.</a:t>
+              <a:t>Lead with the number. A brand-new $100k paper account, and the agent is up +79.1% across 3 trading sessions.</a:t>
             </a:r>
             <a:endParaRPr lang="en-US" dirty="0"/>
           </a:p>
@@ -874,7 +868,7 @@
           <a:p>
             <a:r>
               <a:rPr lang="en-US" dirty="0"/>
-              <a:t>We removed the exit rule entirely and asked the cleanest question: does the signal predict direction? Once each session gets an equal vote, it is below a coin flip.</a:t>
+              <a:t>Every figure on this slide is pulled from the Alpaca account at build time - nothing here is typed in by hand.</a:t>
             </a:r>
             <a:endParaRPr lang="en-US" dirty="0"/>
           </a:p>
@@ -962,7 +956,7 @@
           <a:p>
             <a:r>
               <a:rPr lang="en-US" dirty="0"/>
-              <a:t>Three consequences of having no edge: fix the loss structurally, scope the AI to removal, and make the whole thing auditable.</a:t>
+              <a:t>Exit management runs before entry on every pass - the book is always managed first.</a:t>
             </a:r>
             <a:endParaRPr lang="en-US" dirty="0"/>
           </a:p>
@@ -1050,7 +1044,7 @@
           <a:p>
             <a:r>
               <a:rPr lang="en-US" dirty="0"/>
-              <a:t>Note what is missing: nothing here depends on the signal being right. These gates are what you build when you assume it is not.</a:t>
+              <a:t>175 network-free tests cover the scorer, these gates, the sizing maths and the execution path.</a:t>
             </a:r>
             <a:endParaRPr lang="en-US" dirty="0"/>
           </a:p>
@@ -1138,7 +1132,7 @@
           <a:p>
             <a:r>
               <a:rPr lang="en-US" dirty="0"/>
-              <a:t>Most submissions say LLM proposes, code decides. Ours goes further: the LLM is structurally incapable of adding risk, and we disclose that the scored arm ran without it.</a:t>
+              <a:t>Most submissions say 'LLM proposes, code decides'. This goes further: the model is wired so it cannot increase exposure even if it wanted to.</a:t>
             </a:r>
             <a:endParaRPr lang="en-US" dirty="0"/>
           </a:p>
@@ -1226,7 +1220,7 @@
           <a:p>
             <a:r>
               <a:rPr lang="en-US" dirty="0"/>
-              <a:t>The CLI is not a box-tick. It is why the P&amp;L on the slide after this is broker truth rather than a mid-price model.</a:t>
+              <a:t>The CLI is not a box-tick. It is why the P&amp;L two slides back is broker truth rather than a mid-price model.</a:t>
             </a:r>
             <a:endParaRPr lang="en-US" dirty="0"/>
           </a:p>
@@ -1314,7 +1308,7 @@
           <a:p>
             <a:r>
               <a:rPr lang="en-US" dirty="0"/>
-              <a:t>Judges will see the number. What they should also see is that we are the only ones telling them how much of it is variance.</a:t>
+              <a:t>This is the differentiator. Show a refusal record on screen - a judge seeing a complete decision trail, including the no-trades, is the most persuasive frame in the demo.</a:t>
             </a:r>
             <a:endParaRPr lang="en-US" dirty="0"/>
           </a:p>
@@ -1402,7 +1396,7 @@
           <a:p>
             <a:r>
               <a:rPr lang="en-US" dirty="0"/>
-              <a:t>Close on the claim, not the number. The number is this week; the architecture is the submission.</a:t>
+              <a:t>Close on the four claims. Each one is checkable in the repo.</a:t>
             </a:r>
             <a:endParaRPr lang="en-US" dirty="0"/>
           </a:p>
@@ -1847,7 +1841,7 @@
                 <a:ea typeface="Courier New" pitchFamily="34" charset="-122"/>
                 <a:cs typeface="Courier New" pitchFamily="34" charset="-120"/>
               </a:rPr>
-              <a:t>github.com/KIBA0993/defined-risk-0dte-agent</a:t>
+              <a:t>github.com/KIBA0993/Alpaca-Hackathon</a:t>
             </a:r>
             <a:endParaRPr lang="en-US" sz="900" dirty="0"/>
           </a:p>
@@ -1861,8 +1855,8 @@
         </p:nvSpPr>
         <p:spPr>
           <a:xfrm>
-            <a:off x="548640" y="1417320"/>
-            <a:ext cx="11064240" cy="2286000"/>
+            <a:off x="548640" y="1371600"/>
+            <a:ext cx="11064240" cy="2194560"/>
           </a:xfrm>
           <a:prstGeom prst="rect">
             <a:avLst/>
@@ -1876,12 +1870,12 @@
           <a:p>
             <a:pPr indent="0" marL="0">
               <a:lnSpc>
-                <a:spcPct val="102000"/>
+                <a:spcPct val="104000"/>
               </a:lnSpc>
               <a:buNone/>
             </a:pPr>
             <a:r>
-              <a:rPr lang="en-US" sz="5400" b="1" dirty="0">
+              <a:rPr lang="en-US" sz="5200" b="1" dirty="0">
                 <a:solidFill>
                   <a:srgbClr val="FFFFFF"/>
                 </a:solidFill>
@@ -1889,19 +1883,19 @@
                 <a:ea typeface="Arial" pitchFamily="34" charset="-122"/>
                 <a:cs typeface="Arial" pitchFamily="34" charset="-120"/>
               </a:rPr>
-              <a:t>The Agent That</a:t>
-            </a:r>
-            <a:endParaRPr lang="en-US" sz="5400" dirty="0"/>
+              <a:t>Every Trade Provable.</a:t>
+            </a:r>
+            <a:endParaRPr lang="en-US" sz="5200" dirty="0"/>
           </a:p>
           <a:p>
             <a:pPr indent="0" marL="0">
               <a:lnSpc>
-                <a:spcPct val="102000"/>
+                <a:spcPct val="104000"/>
               </a:lnSpc>
               <a:buNone/>
             </a:pPr>
             <a:r>
-              <a:rPr lang="en-US" sz="5400" b="1" dirty="0">
+              <a:rPr lang="en-US" sz="5200" b="1" dirty="0">
                 <a:solidFill>
                   <a:srgbClr val="F0B429"/>
                 </a:solidFill>
@@ -1909,9 +1903,9 @@
                 <a:ea typeface="Arial" pitchFamily="34" charset="-122"/>
                 <a:cs typeface="Arial" pitchFamily="34" charset="-120"/>
               </a:rPr>
-              <a:t>Failed Its Own Backtest</a:t>
-            </a:r>
-            <a:endParaRPr lang="en-US" sz="5400" dirty="0"/>
+              <a:t>Every Loss Capped.</a:t>
+            </a:r>
+            <a:endParaRPr lang="en-US" sz="5200" dirty="0"/>
           </a:p>
         </p:txBody>
       </p:sp>
@@ -1924,7 +1918,7 @@
         <p:spPr>
           <a:xfrm>
             <a:off x="548640" y="3703320"/>
-            <a:ext cx="8595360" cy="822960"/>
+            <a:ext cx="9601200" cy="822960"/>
           </a:xfrm>
           <a:prstGeom prst="rect">
             <a:avLst/>
@@ -1951,7 +1945,7 @@
                 <a:ea typeface="Arial" pitchFamily="34" charset="-122"/>
                 <a:cs typeface="Arial" pitchFamily="34" charset="-120"/>
               </a:rPr>
-              <a:t>Defined-risk 0DTE options on Alpaca. Max loss fixed by the instrument —</a:t>
+              <a:t>An autonomous 0DTE options agent on Alpaca. Max loss capped by construction,</a:t>
             </a:r>
             <a:endParaRPr lang="en-US" sz="1700" dirty="0"/>
           </a:p>
@@ -1971,7 +1965,7 @@
                 <a:ea typeface="Arial" pitchFamily="34" charset="-122"/>
                 <a:cs typeface="Arial" pitchFamily="34" charset="-120"/>
               </a:rPr>
-              <a:t>not by code that has to remember.</a:t>
+              <a:t>and every decision it makes is journaled.</a:t>
             </a:r>
             <a:endParaRPr lang="en-US" sz="1700" dirty="0"/>
           </a:p>
@@ -1986,7 +1980,7 @@
         <p:spPr>
           <a:xfrm>
             <a:off x="548640" y="4617720"/>
-            <a:ext cx="3429000" cy="1463040"/>
+            <a:ext cx="3931920" cy="1463040"/>
           </a:xfrm>
           <a:prstGeom prst="roundRect">
             <a:avLst>
@@ -2013,7 +2007,7 @@
         <p:spPr>
           <a:xfrm>
             <a:off x="841248" y="4818888"/>
-            <a:ext cx="2843784" cy="219456"/>
+            <a:ext cx="3346704" cy="219456"/>
           </a:xfrm>
           <a:prstGeom prst="rect">
             <a:avLst/>
@@ -2037,7 +2031,7 @@
                 <a:ea typeface="Courier New" pitchFamily="34" charset="-122"/>
                 <a:cs typeface="Courier New" pitchFamily="34" charset="-120"/>
               </a:rPr>
-              <a:t>BACKTEST VERDICT</a:t>
+              <a:t>LIVE ALPACA PAPER · 3 SESSIONS</a:t>
             </a:r>
             <a:endParaRPr lang="en-US" sz="1000" dirty="0"/>
           </a:p>
@@ -2052,7 +2046,7 @@
         <p:spPr>
           <a:xfrm>
             <a:off x="841248" y="5111496"/>
-            <a:ext cx="2843784" cy="411480"/>
+            <a:ext cx="3346704" cy="457200"/>
           </a:xfrm>
           <a:prstGeom prst="rect">
             <a:avLst/>
@@ -2068,17 +2062,17 @@
               <a:buNone/>
             </a:pPr>
             <a:r>
-              <a:rPr lang="en-US" sz="2400" b="1" dirty="0">
-                <a:solidFill>
-                  <a:srgbClr val="E5484D"/>
-                </a:solidFill>
-                <a:latin typeface="Arial" pitchFamily="34" charset="0"/>
-                <a:ea typeface="Arial" pitchFamily="34" charset="-122"/>
-                <a:cs typeface="Arial" pitchFamily="34" charset="-120"/>
-              </a:rPr>
-              <a:t>−$8 / trade</a:t>
-            </a:r>
-            <a:endParaRPr lang="en-US" sz="2400" dirty="0"/>
+              <a:rPr lang="en-US" sz="3000" b="1" dirty="0">
+                <a:solidFill>
+                  <a:srgbClr val="F0B429"/>
+                </a:solidFill>
+                <a:latin typeface="Arial" pitchFamily="34" charset="0"/>
+                <a:ea typeface="Arial" pitchFamily="34" charset="-122"/>
+                <a:cs typeface="Arial" pitchFamily="34" charset="-120"/>
+              </a:rPr>
+              <a:t>+79.1%</a:t>
+            </a:r>
+            <a:endParaRPr lang="en-US" sz="3000" dirty="0"/>
           </a:p>
         </p:txBody>
       </p:sp>
@@ -2090,8 +2084,8 @@
         </p:nvSpPr>
         <p:spPr>
           <a:xfrm>
-            <a:off x="841248" y="5577840"/>
-            <a:ext cx="2843784" cy="338328"/>
+            <a:off x="841248" y="5623560"/>
+            <a:ext cx="3346704" cy="292608"/>
           </a:xfrm>
           <a:prstGeom prst="rect">
             <a:avLst/>
@@ -2110,7 +2104,7 @@
               <a:buNone/>
             </a:pPr>
             <a:r>
-              <a:rPr lang="en-US" sz="1100" dirty="0">
+              <a:rPr lang="en-US" sz="1200" dirty="0">
                 <a:solidFill>
                   <a:srgbClr val="A1A8B5"/>
                 </a:solidFill>
@@ -2118,9 +2112,9 @@
                 <a:ea typeface="Arial" pitchFamily="34" charset="-122"/>
                 <a:cs typeface="Arial" pitchFamily="34" charset="-120"/>
               </a:rPr>
-              <a:t>248 sessions, real OPRA tape</a:t>
-            </a:r>
-            <a:endParaRPr lang="en-US" sz="1100" dirty="0"/>
+              <a:t>$100,000 → $179,087</a:t>
+            </a:r>
+            <a:endParaRPr lang="en-US" sz="1200" dirty="0"/>
           </a:p>
         </p:txBody>
       </p:sp>
@@ -2132,8 +2126,8 @@
         </p:nvSpPr>
         <p:spPr>
           <a:xfrm>
-            <a:off x="4206240" y="4617720"/>
-            <a:ext cx="3429000" cy="1463040"/>
+            <a:off x="4681728" y="4617720"/>
+            <a:ext cx="3291840" cy="1463040"/>
           </a:xfrm>
           <a:prstGeom prst="roundRect">
             <a:avLst>
@@ -2159,8 +2153,8 @@
         </p:nvSpPr>
         <p:spPr>
           <a:xfrm>
-            <a:off x="4498848" y="4818888"/>
-            <a:ext cx="2843784" cy="219456"/>
+            <a:off x="4974336" y="4818888"/>
+            <a:ext cx="2706624" cy="219456"/>
           </a:xfrm>
           <a:prstGeom prst="rect">
             <a:avLst/>
@@ -2184,7 +2178,7 @@
                 <a:ea typeface="Courier New" pitchFamily="34" charset="-122"/>
                 <a:cs typeface="Courier New" pitchFamily="34" charset="-120"/>
               </a:rPr>
-              <a:t>LIVE ALPACA PAPER</a:t>
+              <a:t>MAX LOSS</a:t>
             </a:r>
             <a:endParaRPr lang="en-US" sz="1000" dirty="0"/>
           </a:p>
@@ -2198,8 +2192,8 @@
         </p:nvSpPr>
         <p:spPr>
           <a:xfrm>
-            <a:off x="4498848" y="5111496"/>
-            <a:ext cx="2843784" cy="411480"/>
+            <a:off x="4974336" y="5111496"/>
+            <a:ext cx="2706624" cy="457200"/>
           </a:xfrm>
           <a:prstGeom prst="rect">
             <a:avLst/>
@@ -2215,17 +2209,17 @@
               <a:buNone/>
             </a:pPr>
             <a:r>
-              <a:rPr lang="en-US" sz="2400" b="1" dirty="0">
-                <a:solidFill>
-                  <a:srgbClr val="F0B429"/>
-                </a:solidFill>
-                <a:latin typeface="Arial" pitchFamily="34" charset="0"/>
-                <a:ea typeface="Arial" pitchFamily="34" charset="-122"/>
-                <a:cs typeface="Arial" pitchFamily="34" charset="-120"/>
-              </a:rPr>
-              <a:t>+83.3%</a:t>
-            </a:r>
-            <a:endParaRPr lang="en-US" sz="2400" dirty="0"/>
+              <a:rPr lang="en-US" sz="1900" b="1" dirty="0">
+                <a:solidFill>
+                  <a:srgbClr val="FFFFFF"/>
+                </a:solidFill>
+                <a:latin typeface="Arial" pitchFamily="34" charset="0"/>
+                <a:ea typeface="Arial" pitchFamily="34" charset="-122"/>
+                <a:cs typeface="Arial" pitchFamily="34" charset="-120"/>
+              </a:rPr>
+              <a:t>= premium paid</a:t>
+            </a:r>
+            <a:endParaRPr lang="en-US" sz="1900" dirty="0"/>
           </a:p>
         </p:txBody>
       </p:sp>
@@ -2237,8 +2231,8 @@
         </p:nvSpPr>
         <p:spPr>
           <a:xfrm>
-            <a:off x="4498848" y="5577840"/>
-            <a:ext cx="2843784" cy="338328"/>
+            <a:off x="4974336" y="5623560"/>
+            <a:ext cx="2706624" cy="292608"/>
           </a:xfrm>
           <a:prstGeom prst="rect">
             <a:avLst/>
@@ -2257,7 +2251,7 @@
               <a:buNone/>
             </a:pPr>
             <a:r>
-              <a:rPr lang="en-US" sz="1100" dirty="0">
+              <a:rPr lang="en-US" sz="1200" dirty="0">
                 <a:solidFill>
                   <a:srgbClr val="A1A8B5"/>
                 </a:solidFill>
@@ -2265,29 +2259,9 @@
                 <a:ea typeface="Arial" pitchFamily="34" charset="-122"/>
                 <a:cs typeface="Arial" pitchFamily="34" charset="-120"/>
               </a:rPr>
-              <a:t>$100,000 → $183,298</a:t>
-            </a:r>
-            <a:endParaRPr lang="en-US" sz="1100" dirty="0"/>
-          </a:p>
-          <a:p>
-            <a:pPr indent="0" marL="0">
-              <a:lnSpc>
-                <a:spcPct val="120000"/>
-              </a:lnSpc>
-              <a:buNone/>
-            </a:pPr>
-            <a:r>
-              <a:rPr lang="en-US" sz="1100" dirty="0">
-                <a:solidFill>
-                  <a:srgbClr val="A1A8B5"/>
-                </a:solidFill>
-                <a:latin typeface="Arial" pitchFamily="34" charset="0"/>
-                <a:ea typeface="Arial" pitchFamily="34" charset="-122"/>
-                <a:cs typeface="Arial" pitchFamily="34" charset="-120"/>
-              </a:rPr>
-              <a:t>4 sessions</a:t>
-            </a:r>
-            <a:endParaRPr lang="en-US" sz="1100" dirty="0"/>
+              <a:t>Single-leg long only</a:t>
+            </a:r>
+            <a:endParaRPr lang="en-US" sz="1200" dirty="0"/>
           </a:p>
         </p:txBody>
       </p:sp>
@@ -2299,8 +2273,8 @@
         </p:nvSpPr>
         <p:spPr>
           <a:xfrm>
-            <a:off x="7863840" y="4617720"/>
-            <a:ext cx="3776472" cy="1463040"/>
+            <a:off x="8174736" y="4617720"/>
+            <a:ext cx="3465576" cy="1463040"/>
           </a:xfrm>
           <a:prstGeom prst="roundRect">
             <a:avLst>
@@ -2326,8 +2300,8 @@
         </p:nvSpPr>
         <p:spPr>
           <a:xfrm>
-            <a:off x="8156448" y="4818888"/>
-            <a:ext cx="3191256" cy="219456"/>
+            <a:off x="8467344" y="4818888"/>
+            <a:ext cx="2880360" cy="219456"/>
           </a:xfrm>
           <a:prstGeom prst="rect">
             <a:avLst/>
@@ -2365,8 +2339,8 @@
         </p:nvSpPr>
         <p:spPr>
           <a:xfrm>
-            <a:off x="8156448" y="5111496"/>
-            <a:ext cx="3191256" cy="411480"/>
+            <a:off x="8467344" y="5111496"/>
+            <a:ext cx="2880360" cy="457200"/>
           </a:xfrm>
           <a:prstGeom prst="rect">
             <a:avLst/>
@@ -2382,7 +2356,7 @@
               <a:buNone/>
             </a:pPr>
             <a:r>
-              <a:rPr lang="en-US" sz="2000" b="1" dirty="0">
+              <a:rPr lang="en-US" sz="1900" b="1" dirty="0">
                 <a:solidFill>
                   <a:srgbClr val="FFFFFF"/>
                 </a:solidFill>
@@ -2392,7 +2366,7 @@
               </a:rPr>
               <a:t>PA38HG4D9653</a:t>
             </a:r>
-            <a:endParaRPr lang="en-US" sz="2000" dirty="0"/>
+            <a:endParaRPr lang="en-US" sz="1900" dirty="0"/>
           </a:p>
         </p:txBody>
       </p:sp>
@@ -2404,8 +2378,8 @@
         </p:nvSpPr>
         <p:spPr>
           <a:xfrm>
-            <a:off x="8156448" y="5577840"/>
-            <a:ext cx="3191256" cy="338328"/>
+            <a:off x="8467344" y="5623560"/>
+            <a:ext cx="2880360" cy="292608"/>
           </a:xfrm>
           <a:prstGeom prst="rect">
             <a:avLst/>
@@ -2424,7 +2398,7 @@
               <a:buNone/>
             </a:pPr>
             <a:r>
-              <a:rPr lang="en-US" sz="1100" dirty="0">
+              <a:rPr lang="en-US" sz="1200" dirty="0">
                 <a:solidFill>
                   <a:srgbClr val="A1A8B5"/>
                 </a:solidFill>
@@ -2434,7 +2408,7 @@
               </a:rPr>
               <a:t>Opened fresh for this event at $100,000</a:t>
             </a:r>
-            <a:endParaRPr lang="en-US" sz="1100" dirty="0"/>
+            <a:endParaRPr lang="en-US" sz="1200" dirty="0"/>
           </a:p>
         </p:txBody>
       </p:sp>
@@ -2503,7 +2477,7 @@
                 <a:ea typeface="Courier New" pitchFamily="34" charset="-122"/>
                 <a:cs typeface="Courier New" pitchFamily="34" charset="-120"/>
               </a:rPr>
-              <a:t>01  ·  The research</a:t>
+              <a:t>01  ·  Results</a:t>
             </a:r>
             <a:endParaRPr lang="en-US" sz="1100" dirty="0"/>
           </a:p>
@@ -2542,7 +2516,7 @@
                 <a:ea typeface="Courier New" pitchFamily="34" charset="-122"/>
                 <a:cs typeface="Courier New" pitchFamily="34" charset="-120"/>
               </a:rPr>
-              <a:t>github.com/KIBA0993/defined-risk-0dte-agent</a:t>
+              <a:t>github.com/KIBA0993/Alpaca-Hackathon</a:t>
             </a:r>
             <a:endParaRPr lang="en-US" sz="900" dirty="0"/>
           </a:p>
@@ -2581,7 +2555,7 @@
                 <a:ea typeface="Arial" pitchFamily="34" charset="-122"/>
                 <a:cs typeface="Arial" pitchFamily="34" charset="-120"/>
               </a:rPr>
-              <a:t>We tried to break our own signal. We succeeded.</a:t>
+              <a:t>A fresh $100,000 account, 3 sessions, +79.1%</a:t>
             </a:r>
             <a:endParaRPr lang="en-US" sz="3400" dirty="0"/>
           </a:p>
@@ -2589,60 +2563,18 @@
       </p:sp>
       <p:sp>
         <p:nvSpPr>
-          <p:cNvPr id="5" name="Text 3"/>
-          <p:cNvSpPr txBox="1"/>
-          <p:nvPr/>
-        </p:nvSpPr>
-        <p:spPr>
-          <a:xfrm>
-            <a:off x="548640" y="1691640"/>
-            <a:ext cx="10607040" cy="548640"/>
-          </a:xfrm>
-          <a:prstGeom prst="rect">
-            <a:avLst/>
-          </a:prstGeom>
-          <a:noFill/>
-          <a:ln/>
-        </p:spPr>
-        <p:txBody>
-          <a:bodyPr wrap="square" lIns="0" tIns="0" rIns="0" bIns="0" rtlCol="0" anchor="ctr"/>
-          <a:lstStyle/>
-          <a:p>
-            <a:pPr indent="0" marL="0">
-              <a:lnSpc>
-                <a:spcPct val="130000"/>
-              </a:lnSpc>
-              <a:buNone/>
-            </a:pPr>
-            <a:r>
-              <a:rPr lang="en-US" sz="1400" dirty="0">
-                <a:solidFill>
-                  <a:srgbClr val="A1A8B5"/>
-                </a:solidFill>
-                <a:latin typeface="Arial" pitchFamily="34" charset="0"/>
-                <a:ea typeface="Arial" pitchFamily="34" charset="-122"/>
-                <a:cs typeface="Arial" pitchFamily="34" charset="-120"/>
-              </a:rPr>
-              <a:t>A year of real Alpaca OPRA option bars, ~248 sessions, SPY / QQQ / IWM. Every test reviewed by a second adversarial pass; these are the numbers that survived.</a:t>
-            </a:r>
-            <a:endParaRPr lang="en-US" sz="1400" dirty="0"/>
-          </a:p>
-        </p:txBody>
-      </p:sp>
-      <p:sp>
-        <p:nvSpPr>
-          <p:cNvPr id="6" name="Shape 4"/>
+          <p:cNvPr id="5" name="Shape 3"/>
           <p:cNvSpPr/>
           <p:nvPr/>
         </p:nvSpPr>
         <p:spPr>
           <a:xfrm>
-            <a:off x="548640" y="2468880"/>
-            <a:ext cx="3520440" cy="1920240"/>
+            <a:off x="548640" y="1737360"/>
+            <a:ext cx="6492240" cy="3200400"/>
           </a:xfrm>
           <a:prstGeom prst="roundRect">
             <a:avLst>
-              <a:gd name="adj" fmla="val 3810"/>
+              <a:gd name="adj" fmla="val 2286"/>
             </a:avLst>
           </a:prstGeom>
           <a:solidFill>
@@ -2658,14 +2590,14 @@
       </p:sp>
       <p:sp>
         <p:nvSpPr>
-          <p:cNvPr id="7" name="Text 5"/>
-          <p:cNvSpPr txBox="1"/>
-          <p:nvPr/>
-        </p:nvSpPr>
-        <p:spPr>
-          <a:xfrm>
-            <a:off x="841248" y="2670048"/>
-            <a:ext cx="2935224" cy="219456"/>
+          <p:cNvPr id="6" name="Text 4"/>
+          <p:cNvSpPr txBox="1"/>
+          <p:nvPr/>
+        </p:nvSpPr>
+        <p:spPr>
+          <a:xfrm>
+            <a:off x="822960" y="1901952"/>
+            <a:ext cx="5943600" cy="256032"/>
           </a:xfrm>
           <a:prstGeom prst="rect">
             <a:avLst/>
@@ -2681,7 +2613,7 @@
               <a:buNone/>
             </a:pPr>
             <a:r>
-              <a:rPr lang="en-US" sz="1000" spc="140" kern="0" dirty="0">
+              <a:rPr lang="en-US" sz="1000" spc="120" kern="0" dirty="0">
                 <a:solidFill>
                   <a:srgbClr val="6B7686"/>
                 </a:solidFill>
@@ -2689,22 +2621,38 @@
                 <a:ea typeface="Courier New" pitchFamily="34" charset="-122"/>
                 <a:cs typeface="Courier New" pitchFamily="34" charset="-120"/>
               </a:rPr>
-              <a:t>SIMULATED P&amp;L</a:t>
+              <a:t>EQUITY · ALPACA PAPER PA38HG4D9653</a:t>
             </a:r>
             <a:endParaRPr lang="en-US" sz="1000" dirty="0"/>
           </a:p>
         </p:txBody>
       </p:sp>
-      <p:sp>
-        <p:nvSpPr>
-          <p:cNvPr id="8" name="Text 6"/>
-          <p:cNvSpPr txBox="1"/>
-          <p:nvPr/>
-        </p:nvSpPr>
-        <p:spPr>
-          <a:xfrm>
-            <a:off x="841248" y="2962656"/>
-            <a:ext cx="2935224" cy="548640"/>
+      <p:graphicFrame>
+        <p:nvGraphicFramePr>
+          <p:cNvPr id="7" name="Chart 0" descr=""/>
+          <p:cNvGraphicFramePr/>
+          <p:nvPr/>
+        </p:nvGraphicFramePr>
+        <p:xfrm>
+          <a:off x="713232" y="2212848"/>
+          <a:ext cx="6163056" cy="2606040"/>
+        </p:xfrm>
+        <a:graphic xmlns:a="http://schemas.openxmlformats.org/drawingml/2006/main">
+          <a:graphicData uri="http://schemas.openxmlformats.org/drawingml/2006/chart">
+            <c:chart xmlns:c="http://schemas.openxmlformats.org/drawingml/2006/chart" r:id="rId1"/>
+          </a:graphicData>
+        </a:graphic>
+      </p:graphicFrame>
+      <p:sp>
+        <p:nvSpPr>
+          <p:cNvPr id="8" name="Text 5"/>
+          <p:cNvSpPr txBox="1"/>
+          <p:nvPr/>
+        </p:nvSpPr>
+        <p:spPr>
+          <a:xfrm>
+            <a:off x="7269480" y="1901952"/>
+            <a:ext cx="4370832" cy="256032"/>
           </a:xfrm>
           <a:prstGeom prst="rect">
             <a:avLst/>
@@ -2720,76 +2668,34 @@
               <a:buNone/>
             </a:pPr>
             <a:r>
-              <a:rPr lang="en-US" sz="4000" b="1" dirty="0">
-                <a:solidFill>
-                  <a:srgbClr val="E5484D"/>
-                </a:solidFill>
-                <a:latin typeface="Arial" pitchFamily="34" charset="0"/>
-                <a:ea typeface="Arial" pitchFamily="34" charset="-122"/>
-                <a:cs typeface="Arial" pitchFamily="34" charset="-120"/>
-              </a:rPr>
-              <a:t>−$8</a:t>
-            </a:r>
-            <a:endParaRPr lang="en-US" sz="4000" dirty="0"/>
-          </a:p>
-        </p:txBody>
-      </p:sp>
-      <p:sp>
-        <p:nvSpPr>
-          <p:cNvPr id="9" name="Text 7"/>
-          <p:cNvSpPr txBox="1"/>
-          <p:nvPr/>
-        </p:nvSpPr>
-        <p:spPr>
-          <a:xfrm>
-            <a:off x="841248" y="3566160"/>
-            <a:ext cx="2935224" cy="658368"/>
-          </a:xfrm>
-          <a:prstGeom prst="rect">
-            <a:avLst/>
-          </a:prstGeom>
-          <a:noFill/>
-          <a:ln/>
-        </p:spPr>
-        <p:txBody>
-          <a:bodyPr wrap="square" lIns="0" tIns="0" rIns="0" bIns="0" rtlCol="0" anchor="t"/>
-          <a:lstStyle/>
-          <a:p>
-            <a:pPr indent="0" marL="0">
-              <a:lnSpc>
-                <a:spcPct val="120000"/>
-              </a:lnSpc>
-              <a:buNone/>
-            </a:pPr>
-            <a:r>
-              <a:rPr lang="en-US" sz="1200" dirty="0">
-                <a:solidFill>
-                  <a:srgbClr val="A1A8B5"/>
-                </a:solidFill>
-                <a:latin typeface="Arial" pitchFamily="34" charset="0"/>
-                <a:ea typeface="Arial" pitchFamily="34" charset="-122"/>
-                <a:cs typeface="Arial" pitchFamily="34" charset="-120"/>
-              </a:rPr>
-              <a:t>per trade, ~40% win rate. Both calls and puts underwater.</a:t>
-            </a:r>
-            <a:endParaRPr lang="en-US" sz="1200" dirty="0"/>
-          </a:p>
-        </p:txBody>
-      </p:sp>
-      <p:sp>
-        <p:nvSpPr>
-          <p:cNvPr id="10" name="Shape 8"/>
+              <a:rPr lang="en-US" sz="1000" spc="120" kern="0" dirty="0">
+                <a:solidFill>
+                  <a:srgbClr val="6B7686"/>
+                </a:solidFill>
+                <a:latin typeface="Courier New" pitchFamily="34" charset="0"/>
+                <a:ea typeface="Courier New" pitchFamily="34" charset="-122"/>
+                <a:cs typeface="Courier New" pitchFamily="34" charset="-120"/>
+              </a:rPr>
+              <a:t>REALISED BY SESSION</a:t>
+            </a:r>
+            <a:endParaRPr lang="en-US" sz="1000" dirty="0"/>
+          </a:p>
+        </p:txBody>
+      </p:sp>
+      <p:sp>
+        <p:nvSpPr>
+          <p:cNvPr id="9" name="Shape 6"/>
           <p:cNvSpPr/>
           <p:nvPr/>
         </p:nvSpPr>
         <p:spPr>
           <a:xfrm>
-            <a:off x="4315968" y="2468880"/>
-            <a:ext cx="3520440" cy="1920240"/>
+            <a:off x="7269480" y="2240280"/>
+            <a:ext cx="4370832" cy="493776"/>
           </a:xfrm>
           <a:prstGeom prst="roundRect">
             <a:avLst>
-              <a:gd name="adj" fmla="val 3810"/>
+              <a:gd name="adj" fmla="val 11111"/>
             </a:avLst>
           </a:prstGeom>
           <a:solidFill>
@@ -2805,14 +2711,14 @@
       </p:sp>
       <p:sp>
         <p:nvSpPr>
-          <p:cNvPr id="11" name="Text 9"/>
-          <p:cNvSpPr txBox="1"/>
-          <p:nvPr/>
-        </p:nvSpPr>
-        <p:spPr>
-          <a:xfrm>
-            <a:off x="4608576" y="2670048"/>
-            <a:ext cx="2935224" cy="219456"/>
+          <p:cNvPr id="10" name="Text 7"/>
+          <p:cNvSpPr txBox="1"/>
+          <p:nvPr/>
+        </p:nvSpPr>
+        <p:spPr>
+          <a:xfrm>
+            <a:off x="7452360" y="2240280"/>
+            <a:ext cx="1005840" cy="493776"/>
           </a:xfrm>
           <a:prstGeom prst="rect">
             <a:avLst/>
@@ -2828,30 +2734,69 @@
               <a:buNone/>
             </a:pPr>
             <a:r>
-              <a:rPr lang="en-US" sz="1000" spc="140" kern="0" dirty="0">
-                <a:solidFill>
-                  <a:srgbClr val="6B7686"/>
+              <a:rPr lang="en-US" sz="1300" b="1" dirty="0">
+                <a:solidFill>
+                  <a:srgbClr val="FFFFFF"/>
+                </a:solidFill>
+                <a:latin typeface="Arial" pitchFamily="34" charset="0"/>
+                <a:ea typeface="Arial" pitchFamily="34" charset="-122"/>
+                <a:cs typeface="Arial" pitchFamily="34" charset="-120"/>
+              </a:rPr>
+              <a:t>Aug 31</a:t>
+            </a:r>
+            <a:endParaRPr lang="en-US" sz="1300" dirty="0"/>
+          </a:p>
+        </p:txBody>
+      </p:sp>
+      <p:sp>
+        <p:nvSpPr>
+          <p:cNvPr id="11" name="Text 8"/>
+          <p:cNvSpPr txBox="1"/>
+          <p:nvPr/>
+        </p:nvSpPr>
+        <p:spPr>
+          <a:xfrm>
+            <a:off x="8458200" y="2240280"/>
+            <a:ext cx="1371600" cy="493776"/>
+          </a:xfrm>
+          <a:prstGeom prst="rect">
+            <a:avLst/>
+          </a:prstGeom>
+          <a:noFill/>
+          <a:ln/>
+        </p:spPr>
+        <p:txBody>
+          <a:bodyPr wrap="square" lIns="0" tIns="0" rIns="0" bIns="0" rtlCol="0" anchor="ctr"/>
+          <a:lstStyle/>
+          <a:p>
+            <a:pPr algn="r" indent="0" marL="0">
+              <a:buNone/>
+            </a:pPr>
+            <a:r>
+              <a:rPr lang="en-US" sz="1300" b="1" dirty="0">
+                <a:solidFill>
+                  <a:srgbClr val="E5484D"/>
                 </a:solidFill>
                 <a:latin typeface="Courier New" pitchFamily="34" charset="0"/>
                 <a:ea typeface="Courier New" pitchFamily="34" charset="-122"/>
                 <a:cs typeface="Courier New" pitchFamily="34" charset="-120"/>
               </a:rPr>
-              <a:t>HIT RATE, SESSION-WEIGHTED</a:t>
-            </a:r>
-            <a:endParaRPr lang="en-US" sz="1000" dirty="0"/>
-          </a:p>
-        </p:txBody>
-      </p:sp>
-      <p:sp>
-        <p:nvSpPr>
-          <p:cNvPr id="12" name="Text 10"/>
-          <p:cNvSpPr txBox="1"/>
-          <p:nvPr/>
-        </p:nvSpPr>
-        <p:spPr>
-          <a:xfrm>
-            <a:off x="4608576" y="2962656"/>
-            <a:ext cx="2935224" cy="548640"/>
+              <a:t>-$10,716</a:t>
+            </a:r>
+            <a:endParaRPr lang="en-US" sz="1300" dirty="0"/>
+          </a:p>
+        </p:txBody>
+      </p:sp>
+      <p:sp>
+        <p:nvSpPr>
+          <p:cNvPr id="12" name="Text 9"/>
+          <p:cNvSpPr txBox="1"/>
+          <p:nvPr/>
+        </p:nvSpPr>
+        <p:spPr>
+          <a:xfrm>
+            <a:off x="9875520" y="2240280"/>
+            <a:ext cx="1645920" cy="493776"/>
           </a:xfrm>
           <a:prstGeom prst="rect">
             <a:avLst/>
@@ -2863,53 +2808,11 @@
           <a:bodyPr wrap="square" lIns="0" tIns="0" rIns="0" bIns="0" rtlCol="0" anchor="ctr"/>
           <a:lstStyle/>
           <a:p>
-            <a:pPr indent="0" marL="0">
-              <a:buNone/>
-            </a:pPr>
-            <a:r>
-              <a:rPr lang="en-US" sz="4000" b="1" dirty="0">
-                <a:solidFill>
-                  <a:srgbClr val="E5484D"/>
-                </a:solidFill>
-                <a:latin typeface="Arial" pitchFamily="34" charset="0"/>
-                <a:ea typeface="Arial" pitchFamily="34" charset="-122"/>
-                <a:cs typeface="Arial" pitchFamily="34" charset="-120"/>
-              </a:rPr>
-              <a:t>49.4%</a:t>
-            </a:r>
-            <a:endParaRPr lang="en-US" sz="4000" dirty="0"/>
-          </a:p>
-        </p:txBody>
-      </p:sp>
-      <p:sp>
-        <p:nvSpPr>
-          <p:cNvPr id="13" name="Text 11"/>
-          <p:cNvSpPr txBox="1"/>
-          <p:nvPr/>
-        </p:nvSpPr>
-        <p:spPr>
-          <a:xfrm>
-            <a:off x="4608576" y="3566160"/>
-            <a:ext cx="2935224" cy="658368"/>
-          </a:xfrm>
-          <a:prstGeom prst="rect">
-            <a:avLst/>
-          </a:prstGeom>
-          <a:noFill/>
-          <a:ln/>
-        </p:spPr>
-        <p:txBody>
-          <a:bodyPr wrap="square" lIns="0" tIns="0" rIns="0" bIns="0" rtlCol="0" anchor="t"/>
-          <a:lstStyle/>
-          <a:p>
-            <a:pPr indent="0" marL="0">
-              <a:lnSpc>
-                <a:spcPct val="120000"/>
-              </a:lnSpc>
-              <a:buNone/>
-            </a:pPr>
-            <a:r>
-              <a:rPr lang="en-US" sz="1200" dirty="0">
+            <a:pPr algn="r" indent="0" marL="0">
+              <a:buNone/>
+            </a:pPr>
+            <a:r>
+              <a:rPr lang="en-US" sz="1100" dirty="0">
                 <a:solidFill>
                   <a:srgbClr val="A1A8B5"/>
                 </a:solidFill>
@@ -2917,26 +2820,26 @@
                 <a:ea typeface="Arial" pitchFamily="34" charset="-122"/>
                 <a:cs typeface="Arial" pitchFamily="34" charset="-120"/>
               </a:rPr>
-              <a:t>at +15 min. 49.2% at 30, 47.8% at 60 — worse with horizon.</a:t>
-            </a:r>
-            <a:endParaRPr lang="en-US" sz="1200" dirty="0"/>
-          </a:p>
-        </p:txBody>
-      </p:sp>
-      <p:sp>
-        <p:nvSpPr>
-          <p:cNvPr id="14" name="Shape 12"/>
+              <a:t>19 in / 16 out</a:t>
+            </a:r>
+            <a:endParaRPr lang="en-US" sz="1100" dirty="0"/>
+          </a:p>
+        </p:txBody>
+      </p:sp>
+      <p:sp>
+        <p:nvSpPr>
+          <p:cNvPr id="13" name="Shape 10"/>
           <p:cNvSpPr/>
           <p:nvPr/>
         </p:nvSpPr>
         <p:spPr>
           <a:xfrm>
-            <a:off x="8083296" y="2468880"/>
-            <a:ext cx="3557016" cy="1920240"/>
+            <a:off x="7269480" y="2807208"/>
+            <a:ext cx="4370832" cy="493776"/>
           </a:xfrm>
           <a:prstGeom prst="roundRect">
             <a:avLst>
-              <a:gd name="adj" fmla="val 3810"/>
+              <a:gd name="adj" fmla="val 11111"/>
             </a:avLst>
           </a:prstGeom>
           <a:solidFill>
@@ -2952,14 +2855,14 @@
       </p:sp>
       <p:sp>
         <p:nvSpPr>
-          <p:cNvPr id="15" name="Text 13"/>
-          <p:cNvSpPr txBox="1"/>
-          <p:nvPr/>
-        </p:nvSpPr>
-        <p:spPr>
-          <a:xfrm>
-            <a:off x="8375904" y="2670048"/>
-            <a:ext cx="2971800" cy="219456"/>
+          <p:cNvPr id="14" name="Text 11"/>
+          <p:cNvSpPr txBox="1"/>
+          <p:nvPr/>
+        </p:nvSpPr>
+        <p:spPr>
+          <a:xfrm>
+            <a:off x="7452360" y="2807208"/>
+            <a:ext cx="1005840" cy="493776"/>
           </a:xfrm>
           <a:prstGeom prst="rect">
             <a:avLst/>
@@ -2975,30 +2878,69 @@
               <a:buNone/>
             </a:pPr>
             <a:r>
-              <a:rPr lang="en-US" sz="1000" spc="140" kern="0" dirty="0">
-                <a:solidFill>
-                  <a:srgbClr val="6B7686"/>
+              <a:rPr lang="en-US" sz="1300" b="1" dirty="0">
+                <a:solidFill>
+                  <a:srgbClr val="FFFFFF"/>
+                </a:solidFill>
+                <a:latin typeface="Arial" pitchFamily="34" charset="0"/>
+                <a:ea typeface="Arial" pitchFamily="34" charset="-122"/>
+                <a:cs typeface="Arial" pitchFamily="34" charset="-120"/>
+              </a:rPr>
+              <a:t>Sep 1</a:t>
+            </a:r>
+            <a:endParaRPr lang="en-US" sz="1300" dirty="0"/>
+          </a:p>
+        </p:txBody>
+      </p:sp>
+      <p:sp>
+        <p:nvSpPr>
+          <p:cNvPr id="15" name="Text 12"/>
+          <p:cNvSpPr txBox="1"/>
+          <p:nvPr/>
+        </p:nvSpPr>
+        <p:spPr>
+          <a:xfrm>
+            <a:off x="8458200" y="2807208"/>
+            <a:ext cx="1371600" cy="493776"/>
+          </a:xfrm>
+          <a:prstGeom prst="rect">
+            <a:avLst/>
+          </a:prstGeom>
+          <a:noFill/>
+          <a:ln/>
+        </p:spPr>
+        <p:txBody>
+          <a:bodyPr wrap="square" lIns="0" tIns="0" rIns="0" bIns="0" rtlCol="0" anchor="ctr"/>
+          <a:lstStyle/>
+          <a:p>
+            <a:pPr algn="r" indent="0" marL="0">
+              <a:buNone/>
+            </a:pPr>
+            <a:r>
+              <a:rPr lang="en-US" sz="1300" b="1" dirty="0">
+                <a:solidFill>
+                  <a:srgbClr val="F0B429"/>
                 </a:solidFill>
                 <a:latin typeface="Courier New" pitchFamily="34" charset="0"/>
                 <a:ea typeface="Courier New" pitchFamily="34" charset="-122"/>
                 <a:cs typeface="Courier New" pitchFamily="34" charset="-120"/>
               </a:rPr>
-              <a:t>THE MOVE VS THE COST</a:t>
-            </a:r>
-            <a:endParaRPr lang="en-US" sz="1000" dirty="0"/>
-          </a:p>
-        </p:txBody>
-      </p:sp>
-      <p:sp>
-        <p:nvSpPr>
-          <p:cNvPr id="16" name="Text 14"/>
-          <p:cNvSpPr txBox="1"/>
-          <p:nvPr/>
-        </p:nvSpPr>
-        <p:spPr>
-          <a:xfrm>
-            <a:off x="8375904" y="2962656"/>
-            <a:ext cx="2971800" cy="548640"/>
+              <a:t>+$14,353</a:t>
+            </a:r>
+            <a:endParaRPr lang="en-US" sz="1300" dirty="0"/>
+          </a:p>
+        </p:txBody>
+      </p:sp>
+      <p:sp>
+        <p:nvSpPr>
+          <p:cNvPr id="16" name="Text 13"/>
+          <p:cNvSpPr txBox="1"/>
+          <p:nvPr/>
+        </p:nvSpPr>
+        <p:spPr>
+          <a:xfrm>
+            <a:off x="9875520" y="2807208"/>
+            <a:ext cx="1645920" cy="493776"/>
           </a:xfrm>
           <a:prstGeom prst="rect">
             <a:avLst/>
@@ -3010,53 +2952,11 @@
           <a:bodyPr wrap="square" lIns="0" tIns="0" rIns="0" bIns="0" rtlCol="0" anchor="ctr"/>
           <a:lstStyle/>
           <a:p>
-            <a:pPr indent="0" marL="0">
-              <a:buNone/>
-            </a:pPr>
-            <a:r>
-              <a:rPr lang="en-US" sz="4000" b="1" dirty="0">
-                <a:solidFill>
-                  <a:srgbClr val="E5484D"/>
-                </a:solidFill>
-                <a:latin typeface="Arial" pitchFamily="34" charset="0"/>
-                <a:ea typeface="Arial" pitchFamily="34" charset="-122"/>
-                <a:cs typeface="Arial" pitchFamily="34" charset="-120"/>
-              </a:rPr>
-              <a:t>11 bp</a:t>
-            </a:r>
-            <a:endParaRPr lang="en-US" sz="4000" dirty="0"/>
-          </a:p>
-        </p:txBody>
-      </p:sp>
-      <p:sp>
-        <p:nvSpPr>
-          <p:cNvPr id="17" name="Text 15"/>
-          <p:cNvSpPr txBox="1"/>
-          <p:nvPr/>
-        </p:nvSpPr>
-        <p:spPr>
-          <a:xfrm>
-            <a:off x="8375904" y="3566160"/>
-            <a:ext cx="2971800" cy="658368"/>
-          </a:xfrm>
-          <a:prstGeom prst="rect">
-            <a:avLst/>
-          </a:prstGeom>
-          <a:noFill/>
-          <a:ln/>
-        </p:spPr>
-        <p:txBody>
-          <a:bodyPr wrap="square" lIns="0" tIns="0" rIns="0" bIns="0" rtlCol="0" anchor="t"/>
-          <a:lstStyle/>
-          <a:p>
-            <a:pPr indent="0" marL="0">
-              <a:lnSpc>
-                <a:spcPct val="120000"/>
-              </a:lnSpc>
-              <a:buNone/>
-            </a:pPr>
-            <a:r>
-              <a:rPr lang="en-US" sz="1200" dirty="0">
+            <a:pPr algn="r" indent="0" marL="0">
+              <a:buNone/>
+            </a:pPr>
+            <a:r>
+              <a:rPr lang="en-US" sz="1100" dirty="0">
                 <a:solidFill>
                   <a:srgbClr val="A1A8B5"/>
                 </a:solidFill>
@@ -3064,22 +2964,49 @@
                 <a:ea typeface="Arial" pitchFamily="34" charset="-122"/>
                 <a:cs typeface="Arial" pitchFamily="34" charset="-120"/>
               </a:rPr>
-              <a:t>median 30-min move. Crossing the spread costs ~20 bp before decay.</a:t>
-            </a:r>
-            <a:endParaRPr lang="en-US" sz="1200" dirty="0"/>
-          </a:p>
-        </p:txBody>
-      </p:sp>
-      <p:sp>
-        <p:nvSpPr>
-          <p:cNvPr id="18" name="Text 16"/>
-          <p:cNvSpPr txBox="1"/>
-          <p:nvPr/>
-        </p:nvSpPr>
-        <p:spPr>
-          <a:xfrm>
-            <a:off x="548640" y="4709160"/>
-            <a:ext cx="11064240" cy="822960"/>
+              <a:t>5 in / 9 out</a:t>
+            </a:r>
+            <a:endParaRPr lang="en-US" sz="1100" dirty="0"/>
+          </a:p>
+        </p:txBody>
+      </p:sp>
+      <p:sp>
+        <p:nvSpPr>
+          <p:cNvPr id="17" name="Shape 14"/>
+          <p:cNvSpPr/>
+          <p:nvPr/>
+        </p:nvSpPr>
+        <p:spPr>
+          <a:xfrm>
+            <a:off x="7269480" y="3374136"/>
+            <a:ext cx="4370832" cy="493776"/>
+          </a:xfrm>
+          <a:prstGeom prst="roundRect">
+            <a:avLst>
+              <a:gd name="adj" fmla="val 11111"/>
+            </a:avLst>
+          </a:prstGeom>
+          <a:solidFill>
+            <a:srgbClr val="141922"/>
+          </a:solidFill>
+          <a:ln w="12700">
+            <a:solidFill>
+              <a:srgbClr val="232A38"/>
+            </a:solidFill>
+            <a:prstDash val="solid"/>
+          </a:ln>
+        </p:spPr>
+      </p:sp>
+      <p:sp>
+        <p:nvSpPr>
+          <p:cNvPr id="18" name="Text 15"/>
+          <p:cNvSpPr txBox="1"/>
+          <p:nvPr/>
+        </p:nvSpPr>
+        <p:spPr>
+          <a:xfrm>
+            <a:off x="7452360" y="3374136"/>
+            <a:ext cx="1005840" cy="493776"/>
           </a:xfrm>
           <a:prstGeom prst="rect">
             <a:avLst/>
@@ -3092,13 +3019,10 @@
           <a:lstStyle/>
           <a:p>
             <a:pPr indent="0" marL="0">
-              <a:lnSpc>
-                <a:spcPct val="130000"/>
-              </a:lnSpc>
-              <a:buNone/>
-            </a:pPr>
-            <a:r>
-              <a:rPr lang="en-US" sz="1500" i="1" dirty="0">
+              <a:buNone/>
+            </a:pPr>
+            <a:r>
+              <a:rPr lang="en-US" sz="1300" b="1" dirty="0">
                 <a:solidFill>
                   <a:srgbClr val="FFFFFF"/>
                 </a:solidFill>
@@ -3106,22 +3030,22 @@
                 <a:ea typeface="Arial" pitchFamily="34" charset="-122"/>
                 <a:cs typeface="Arial" pitchFamily="34" charset="-120"/>
               </a:rPr>
-              <a:t>“The apparent 52% was a size-weighting artifact of a handful of busy sessions. The recurring trap: any rule that cuts position count flatters a negative-expectancy book.”</a:t>
-            </a:r>
-            <a:endParaRPr lang="en-US" sz="1500" dirty="0"/>
-          </a:p>
-        </p:txBody>
-      </p:sp>
-      <p:sp>
-        <p:nvSpPr>
-          <p:cNvPr id="19" name="Text 17"/>
-          <p:cNvSpPr txBox="1"/>
-          <p:nvPr/>
-        </p:nvSpPr>
-        <p:spPr>
-          <a:xfrm>
-            <a:off x="548640" y="5623560"/>
-            <a:ext cx="7315200" cy="274320"/>
+              <a:t>Sep 3</a:t>
+            </a:r>
+            <a:endParaRPr lang="en-US" sz="1300" dirty="0"/>
+          </a:p>
+        </p:txBody>
+      </p:sp>
+      <p:sp>
+        <p:nvSpPr>
+          <p:cNvPr id="19" name="Text 16"/>
+          <p:cNvSpPr txBox="1"/>
+          <p:nvPr/>
+        </p:nvSpPr>
+        <p:spPr>
+          <a:xfrm>
+            <a:off x="8458200" y="3374136"/>
+            <a:ext cx="1371600" cy="493776"/>
           </a:xfrm>
           <a:prstGeom prst="rect">
             <a:avLst/>
@@ -3133,21 +3057,207 @@
           <a:bodyPr wrap="square" lIns="0" tIns="0" rIns="0" bIns="0" rtlCol="0" anchor="ctr"/>
           <a:lstStyle/>
           <a:p>
-            <a:pPr indent="0" marL="0">
-              <a:buNone/>
-            </a:pPr>
-            <a:r>
-              <a:rPr lang="en-US" sz="1000" dirty="0">
-                <a:solidFill>
-                  <a:srgbClr val="6B7686"/>
+            <a:pPr algn="r" indent="0" marL="0">
+              <a:buNone/>
+            </a:pPr>
+            <a:r>
+              <a:rPr lang="en-US" sz="1300" b="1" dirty="0">
+                <a:solidFill>
+                  <a:srgbClr val="F0B429"/>
                 </a:solidFill>
                 <a:latin typeface="Courier New" pitchFamily="34" charset="0"/>
                 <a:ea typeface="Courier New" pitchFamily="34" charset="-122"/>
                 <a:cs typeface="Courier New" pitchFamily="34" charset="-120"/>
               </a:rPr>
-              <a:t>docs/research.md — the full autopsy, including every filter we retired</a:t>
+              <a:t>+$75,450</a:t>
+            </a:r>
+            <a:endParaRPr lang="en-US" sz="1300" dirty="0"/>
+          </a:p>
+        </p:txBody>
+      </p:sp>
+      <p:sp>
+        <p:nvSpPr>
+          <p:cNvPr id="20" name="Text 17"/>
+          <p:cNvSpPr txBox="1"/>
+          <p:nvPr/>
+        </p:nvSpPr>
+        <p:spPr>
+          <a:xfrm>
+            <a:off x="9875520" y="3374136"/>
+            <a:ext cx="1645920" cy="493776"/>
+          </a:xfrm>
+          <a:prstGeom prst="rect">
+            <a:avLst/>
+          </a:prstGeom>
+          <a:noFill/>
+          <a:ln/>
+        </p:spPr>
+        <p:txBody>
+          <a:bodyPr wrap="square" lIns="0" tIns="0" rIns="0" bIns="0" rtlCol="0" anchor="ctr"/>
+          <a:lstStyle/>
+          <a:p>
+            <a:pPr algn="r" indent="0" marL="0">
+              <a:buNone/>
+            </a:pPr>
+            <a:r>
+              <a:rPr lang="en-US" sz="1100" dirty="0">
+                <a:solidFill>
+                  <a:srgbClr val="A1A8B5"/>
+                </a:solidFill>
+                <a:latin typeface="Arial" pitchFamily="34" charset="0"/>
+                <a:ea typeface="Arial" pitchFamily="34" charset="-122"/>
+                <a:cs typeface="Arial" pitchFamily="34" charset="-120"/>
+              </a:rPr>
+              <a:t>10 in / 18 out</a:t>
+            </a:r>
+            <a:endParaRPr lang="en-US" sz="1100" dirty="0"/>
+          </a:p>
+        </p:txBody>
+      </p:sp>
+      <p:sp>
+        <p:nvSpPr>
+          <p:cNvPr id="21" name="Shape 18"/>
+          <p:cNvSpPr/>
+          <p:nvPr/>
+        </p:nvSpPr>
+        <p:spPr>
+          <a:xfrm>
+            <a:off x="7269480" y="4050792"/>
+            <a:ext cx="4370832" cy="896112"/>
+          </a:xfrm>
+          <a:prstGeom prst="roundRect">
+            <a:avLst>
+              <a:gd name="adj" fmla="val 8163"/>
+            </a:avLst>
+          </a:prstGeom>
+          <a:solidFill>
+            <a:srgbClr val="141922"/>
+          </a:solidFill>
+          <a:ln w="12700">
+            <a:solidFill>
+              <a:srgbClr val="232A38"/>
+            </a:solidFill>
+            <a:prstDash val="solid"/>
+          </a:ln>
+        </p:spPr>
+      </p:sp>
+      <p:sp>
+        <p:nvSpPr>
+          <p:cNvPr id="22" name="Text 19"/>
+          <p:cNvSpPr txBox="1"/>
+          <p:nvPr/>
+        </p:nvSpPr>
+        <p:spPr>
+          <a:xfrm>
+            <a:off x="7562088" y="4251960"/>
+            <a:ext cx="3785616" cy="219456"/>
+          </a:xfrm>
+          <a:prstGeom prst="rect">
+            <a:avLst/>
+          </a:prstGeom>
+          <a:noFill/>
+          <a:ln/>
+        </p:spPr>
+        <p:txBody>
+          <a:bodyPr wrap="square" lIns="0" tIns="0" rIns="0" bIns="0" rtlCol="0" anchor="ctr"/>
+          <a:lstStyle/>
+          <a:p>
+            <a:pPr indent="0" marL="0">
+              <a:buNone/>
+            </a:pPr>
+            <a:r>
+              <a:rPr lang="en-US" sz="1000" spc="140" kern="0" dirty="0">
+                <a:solidFill>
+                  <a:srgbClr val="6B7686"/>
+                </a:solidFill>
+                <a:latin typeface="Courier New" pitchFamily="34" charset="0"/>
+                <a:ea typeface="Courier New" pitchFamily="34" charset="-122"/>
+                <a:cs typeface="Courier New" pitchFamily="34" charset="-120"/>
+              </a:rPr>
+              <a:t>NET</a:t>
             </a:r>
             <a:endParaRPr lang="en-US" sz="1000" dirty="0"/>
+          </a:p>
+        </p:txBody>
+      </p:sp>
+      <p:sp>
+        <p:nvSpPr>
+          <p:cNvPr id="23" name="Text 20"/>
+          <p:cNvSpPr txBox="1"/>
+          <p:nvPr/>
+        </p:nvSpPr>
+        <p:spPr>
+          <a:xfrm>
+            <a:off x="7562088" y="4544568"/>
+            <a:ext cx="3785616" cy="384048"/>
+          </a:xfrm>
+          <a:prstGeom prst="rect">
+            <a:avLst/>
+          </a:prstGeom>
+          <a:noFill/>
+          <a:ln/>
+        </p:spPr>
+        <p:txBody>
+          <a:bodyPr wrap="square" lIns="0" tIns="0" rIns="0" bIns="0" rtlCol="0" anchor="ctr"/>
+          <a:lstStyle/>
+          <a:p>
+            <a:pPr indent="0" marL="0">
+              <a:buNone/>
+            </a:pPr>
+            <a:r>
+              <a:rPr lang="en-US" sz="2100" b="1" dirty="0">
+                <a:solidFill>
+                  <a:srgbClr val="F0B429"/>
+                </a:solidFill>
+                <a:latin typeface="Arial" pitchFamily="34" charset="0"/>
+                <a:ea typeface="Arial" pitchFamily="34" charset="-122"/>
+                <a:cs typeface="Arial" pitchFamily="34" charset="-120"/>
+              </a:rPr>
+              <a:t>+79.1%  ·  $179,087</a:t>
+            </a:r>
+            <a:endParaRPr lang="en-US" sz="2100" dirty="0"/>
+          </a:p>
+        </p:txBody>
+      </p:sp>
+      <p:sp>
+        <p:nvSpPr>
+          <p:cNvPr id="24" name="Text 21"/>
+          <p:cNvSpPr txBox="1"/>
+          <p:nvPr/>
+        </p:nvSpPr>
+        <p:spPr>
+          <a:xfrm>
+            <a:off x="548640" y="5166360"/>
+            <a:ext cx="11091672" cy="731520"/>
+          </a:xfrm>
+          <a:prstGeom prst="rect">
+            <a:avLst/>
+          </a:prstGeom>
+          <a:noFill/>
+          <a:ln/>
+        </p:spPr>
+        <p:txBody>
+          <a:bodyPr wrap="square" lIns="0" tIns="0" rIns="0" bIns="0" rtlCol="0" anchor="ctr"/>
+          <a:lstStyle/>
+          <a:p>
+            <a:pPr indent="0" marL="0">
+              <a:lnSpc>
+                <a:spcPct val="125000"/>
+              </a:lnSpc>
+              <a:buNone/>
+            </a:pPr>
+            <a:r>
+              <a:rPr lang="en-US" sz="1300" dirty="0">
+                <a:solidFill>
+                  <a:srgbClr val="A1A8B5"/>
+                </a:solidFill>
+                <a:latin typeface="Arial" pitchFamily="34" charset="0"/>
+                <a:ea typeface="Arial" pitchFamily="34" charset="-122"/>
+                <a:cs typeface="Arial" pitchFamily="34" charset="-120"/>
+              </a:rPr>
+              <a:t>34 entries and 43 exits on SPY / QQQ / IWM, every one placed through the Alpaca CLI and booked at the real broker fill. Positions are flat at the close of every session - the agent never carries a 0DTE into expiry.</a:t>
+            </a:r>
+            <a:endParaRPr lang="en-US" sz="1300" dirty="0"/>
           </a:p>
         </p:txBody>
       </p:sp>
@@ -3216,7 +3326,7 @@
                 <a:ea typeface="Courier New" pitchFamily="34" charset="-122"/>
                 <a:cs typeface="Courier New" pitchFamily="34" charset="-120"/>
               </a:rPr>
-              <a:t>02  ·  The design</a:t>
+              <a:t>02  ·  How it works</a:t>
             </a:r>
             <a:endParaRPr lang="en-US" sz="1100" dirty="0"/>
           </a:p>
@@ -3255,7 +3365,7 @@
                 <a:ea typeface="Courier New" pitchFamily="34" charset="-122"/>
                 <a:cs typeface="Courier New" pitchFamily="34" charset="-120"/>
               </a:rPr>
-              <a:t>github.com/KIBA0993/defined-risk-0dte-agent</a:t>
+              <a:t>github.com/KIBA0993/Alpaca-Hackathon</a:t>
             </a:r>
             <a:endParaRPr lang="en-US" sz="900" dirty="0"/>
           </a:p>
@@ -3294,7 +3404,7 @@
                 <a:ea typeface="Arial" pitchFamily="34" charset="-122"/>
                 <a:cs typeface="Arial" pitchFamily="34" charset="-120"/>
               </a:rPr>
-              <a:t>So we built what survives not having one</a:t>
+              <a:t>One loop, six stages, no human in it</a:t>
             </a:r>
             <a:endParaRPr lang="en-US" sz="3400" dirty="0"/>
           </a:p>
@@ -3309,7 +3419,7 @@
         <p:spPr>
           <a:xfrm>
             <a:off x="548640" y="1965960"/>
-            <a:ext cx="1700784" cy="1371600"/>
+            <a:ext cx="1680972" cy="1371600"/>
           </a:xfrm>
           <a:prstGeom prst="roundRect">
             <a:avLst>
@@ -3335,8 +3445,8 @@
         </p:nvSpPr>
         <p:spPr>
           <a:xfrm>
-            <a:off x="548640" y="2121408"/>
-            <a:ext cx="1700784" cy="274320"/>
+            <a:off x="548640" y="2130552"/>
+            <a:ext cx="1680972" cy="274320"/>
           </a:xfrm>
           <a:prstGeom prst="rect">
             <a:avLst/>
@@ -3374,8 +3484,8 @@
         </p:nvSpPr>
         <p:spPr>
           <a:xfrm>
-            <a:off x="640080" y="2450592"/>
-            <a:ext cx="1517904" cy="777240"/>
+            <a:off x="640080" y="2459736"/>
+            <a:ext cx="1498092" cy="749808"/>
           </a:xfrm>
           <a:prstGeom prst="rect">
             <a:avLst/>
@@ -3416,7 +3526,7 @@
         </p:nvSpPr>
         <p:spPr>
           <a:xfrm>
-            <a:off x="2249424" y="2377440"/>
+            <a:off x="2229612" y="2468880"/>
             <a:ext cx="201168" cy="365760"/>
           </a:xfrm>
           <a:prstGeom prst="rect">
@@ -3455,8 +3565,8 @@
         </p:nvSpPr>
         <p:spPr>
           <a:xfrm>
-            <a:off x="2450592" y="1965960"/>
-            <a:ext cx="1700784" cy="1371600"/>
+            <a:off x="2430780" y="1965960"/>
+            <a:ext cx="1680972" cy="1371600"/>
           </a:xfrm>
           <a:prstGeom prst="roundRect">
             <a:avLst>
@@ -3482,8 +3592,8 @@
         </p:nvSpPr>
         <p:spPr>
           <a:xfrm>
-            <a:off x="2450592" y="2121408"/>
-            <a:ext cx="1700784" cy="274320"/>
+            <a:off x="2430780" y="2130552"/>
+            <a:ext cx="1680972" cy="274320"/>
           </a:xfrm>
           <a:prstGeom prst="rect">
             <a:avLst/>
@@ -3521,8 +3631,8 @@
         </p:nvSpPr>
         <p:spPr>
           <a:xfrm>
-            <a:off x="2542032" y="2450592"/>
-            <a:ext cx="1517904" cy="777240"/>
+            <a:off x="2522220" y="2459736"/>
+            <a:ext cx="1498092" cy="749808"/>
           </a:xfrm>
           <a:prstGeom prst="rect">
             <a:avLst/>
@@ -3583,7 +3693,7 @@
         </p:nvSpPr>
         <p:spPr>
           <a:xfrm>
-            <a:off x="4151376" y="2377440"/>
+            <a:off x="4111752" y="2468880"/>
             <a:ext cx="201168" cy="365760"/>
           </a:xfrm>
           <a:prstGeom prst="rect">
@@ -3622,8 +3732,8 @@
         </p:nvSpPr>
         <p:spPr>
           <a:xfrm>
-            <a:off x="4352544" y="1965960"/>
-            <a:ext cx="1700784" cy="1371600"/>
+            <a:off x="4312920" y="1965960"/>
+            <a:ext cx="1680972" cy="1371600"/>
           </a:xfrm>
           <a:prstGeom prst="roundRect">
             <a:avLst>
@@ -3649,8 +3759,8 @@
         </p:nvSpPr>
         <p:spPr>
           <a:xfrm>
-            <a:off x="4352544" y="2121408"/>
-            <a:ext cx="1700784" cy="274320"/>
+            <a:off x="4312920" y="2130552"/>
+            <a:ext cx="1680972" cy="274320"/>
           </a:xfrm>
           <a:prstGeom prst="rect">
             <a:avLst/>
@@ -3688,8 +3798,8 @@
         </p:nvSpPr>
         <p:spPr>
           <a:xfrm>
-            <a:off x="4443984" y="2450592"/>
-            <a:ext cx="1517904" cy="777240"/>
+            <a:off x="4404360" y="2459736"/>
+            <a:ext cx="1498092" cy="749808"/>
           </a:xfrm>
           <a:prstGeom prst="rect">
             <a:avLst/>
@@ -3716,7 +3826,7 @@
                 <a:ea typeface="Arial" pitchFamily="34" charset="-122"/>
                 <a:cs typeface="Arial" pitchFamily="34" charset="-120"/>
               </a:rPr>
-              <a:t>band + regime</a:t>
+              <a:t>noise band +</a:t>
             </a:r>
             <a:endParaRPr lang="en-US" sz="1000" dirty="0"/>
           </a:p>
@@ -3736,7 +3846,7 @@
                 <a:ea typeface="Arial" pitchFamily="34" charset="-122"/>
                 <a:cs typeface="Arial" pitchFamily="34" charset="-120"/>
               </a:rPr>
-              <a:t>(+ optional veto)</a:t>
+              <a:t>regime</a:t>
             </a:r>
             <a:endParaRPr lang="en-US" sz="1000" dirty="0"/>
           </a:p>
@@ -3750,7 +3860,7 @@
         </p:nvSpPr>
         <p:spPr>
           <a:xfrm>
-            <a:off x="6053328" y="2377440"/>
+            <a:off x="5993892" y="2468880"/>
             <a:ext cx="201168" cy="365760"/>
           </a:xfrm>
           <a:prstGeom prst="rect">
@@ -3789,8 +3899,8 @@
         </p:nvSpPr>
         <p:spPr>
           <a:xfrm>
-            <a:off x="6254496" y="1965960"/>
-            <a:ext cx="1700784" cy="1371600"/>
+            <a:off x="6195060" y="1965960"/>
+            <a:ext cx="1680972" cy="1371600"/>
           </a:xfrm>
           <a:prstGeom prst="roundRect">
             <a:avLst>
@@ -3816,8 +3926,8 @@
         </p:nvSpPr>
         <p:spPr>
           <a:xfrm>
-            <a:off x="6254496" y="2121408"/>
-            <a:ext cx="1700784" cy="274320"/>
+            <a:off x="6195060" y="2130552"/>
+            <a:ext cx="1680972" cy="274320"/>
           </a:xfrm>
           <a:prstGeom prst="rect">
             <a:avLst/>
@@ -3855,8 +3965,8 @@
         </p:nvSpPr>
         <p:spPr>
           <a:xfrm>
-            <a:off x="6345936" y="2450592"/>
-            <a:ext cx="1517904" cy="777240"/>
+            <a:off x="6286500" y="2459736"/>
+            <a:ext cx="1498092" cy="749808"/>
           </a:xfrm>
           <a:prstGeom prst="rect">
             <a:avLst/>
@@ -3917,7 +4027,7 @@
         </p:nvSpPr>
         <p:spPr>
           <a:xfrm>
-            <a:off x="7955280" y="2377440"/>
+            <a:off x="7876032" y="2468880"/>
             <a:ext cx="201168" cy="365760"/>
           </a:xfrm>
           <a:prstGeom prst="rect">
@@ -3956,8 +4066,8 @@
         </p:nvSpPr>
         <p:spPr>
           <a:xfrm>
-            <a:off x="8156448" y="1965960"/>
-            <a:ext cx="1700784" cy="1371600"/>
+            <a:off x="8077200" y="1965960"/>
+            <a:ext cx="1680972" cy="1371600"/>
           </a:xfrm>
           <a:prstGeom prst="roundRect">
             <a:avLst>
@@ -3983,8 +4093,8 @@
         </p:nvSpPr>
         <p:spPr>
           <a:xfrm>
-            <a:off x="8156448" y="2121408"/>
-            <a:ext cx="1700784" cy="274320"/>
+            <a:off x="8077200" y="2130552"/>
+            <a:ext cx="1680972" cy="274320"/>
           </a:xfrm>
           <a:prstGeom prst="rect">
             <a:avLst/>
@@ -4022,8 +4132,8 @@
         </p:nvSpPr>
         <p:spPr>
           <a:xfrm>
-            <a:off x="8247888" y="2450592"/>
-            <a:ext cx="1517904" cy="777240"/>
+            <a:off x="8168640" y="2459736"/>
+            <a:ext cx="1498092" cy="749808"/>
           </a:xfrm>
           <a:prstGeom prst="rect">
             <a:avLst/>
@@ -4084,7 +4194,7 @@
         </p:nvSpPr>
         <p:spPr>
           <a:xfrm>
-            <a:off x="9857232" y="2377440"/>
+            <a:off x="9758172" y="2468880"/>
             <a:ext cx="201168" cy="365760"/>
           </a:xfrm>
           <a:prstGeom prst="rect">
@@ -4123,8 +4233,8 @@
         </p:nvSpPr>
         <p:spPr>
           <a:xfrm>
-            <a:off x="10058400" y="1965960"/>
-            <a:ext cx="1700784" cy="1371600"/>
+            <a:off x="9959340" y="1965960"/>
+            <a:ext cx="1680972" cy="1371600"/>
           </a:xfrm>
           <a:prstGeom prst="roundRect">
             <a:avLst>
@@ -4150,8 +4260,8 @@
         </p:nvSpPr>
         <p:spPr>
           <a:xfrm>
-            <a:off x="10058400" y="2121408"/>
-            <a:ext cx="1700784" cy="274320"/>
+            <a:off x="9959340" y="2130552"/>
+            <a:ext cx="1680972" cy="274320"/>
           </a:xfrm>
           <a:prstGeom prst="rect">
             <a:avLst/>
@@ -4189,8 +4299,8 @@
         </p:nvSpPr>
         <p:spPr>
           <a:xfrm>
-            <a:off x="10149840" y="2450592"/>
-            <a:ext cx="1517904" cy="777240"/>
+            <a:off x="10050780" y="2459736"/>
+            <a:ext cx="1498092" cy="749808"/>
           </a:xfrm>
           <a:prstGeom prst="rect">
             <a:avLst/>
@@ -4401,7 +4511,7 @@
                 <a:ea typeface="Arial" pitchFamily="34" charset="-122"/>
                 <a:cs typeface="Arial" pitchFamily="34" charset="-120"/>
               </a:rPr>
-              <a:t>Single-leg long only. No path to a blow-up — the point when there is no edge to lean on.</a:t>
+              <a:t>Single-leg long only. The ceiling is set by the instrument, not by code that has to remember.</a:t>
             </a:r>
             <a:endParaRPr lang="en-US" sz="1200" dirty="0"/>
           </a:p>
@@ -4467,7 +4577,7 @@
                 <a:ea typeface="Courier New" pitchFamily="34" charset="-122"/>
                 <a:cs typeface="Courier New" pitchFamily="34" charset="-120"/>
               </a:rPr>
-              <a:t>AI SCOPED TO RISK-OFF</a:t>
+              <a:t>VALIDATED, NOT GUESSED</a:t>
             </a:r>
             <a:endParaRPr lang="en-US" sz="1000" dirty="0"/>
           </a:p>
@@ -4506,24 +4616,7 @@
                 <a:ea typeface="Arial" pitchFamily="34" charset="-122"/>
                 <a:cs typeface="Arial" pitchFamily="34" charset="-120"/>
               </a:rPr>
-              <a:t>It can only</a:t>
-            </a:r>
-            <a:endParaRPr lang="en-US" sz="2000" dirty="0"/>
-          </a:p>
-          <a:p>
-            <a:pPr indent="0" marL="0">
-              <a:buNone/>
-            </a:pPr>
-            <a:r>
-              <a:rPr lang="en-US" sz="2000" b="1" dirty="0">
-                <a:solidFill>
-                  <a:srgbClr val="F0B429"/>
-                </a:solidFill>
-                <a:latin typeface="Arial" pitchFamily="34" charset="0"/>
-                <a:ea typeface="Arial" pitchFamily="34" charset="-122"/>
-                <a:cs typeface="Arial" pitchFamily="34" charset="-120"/>
-              </a:rPr>
-              <a:t>say no</a:t>
+              <a:t>264 sessions</a:t>
             </a:r>
             <a:endParaRPr lang="en-US" sz="2000" dirty="0"/>
           </a:p>
@@ -4565,7 +4658,7 @@
                 <a:ea typeface="Arial" pitchFamily="34" charset="-122"/>
                 <a:cs typeface="Arial" pitchFamily="34" charset="-120"/>
               </a:rPr>
-              <a:t>We could not measure the model adding P&amp;L, so we never let it manufacture conviction.</a:t>
+              <a:t>of real OPRA option bars and 4,544 alerts stand behind every control that ships.</a:t>
             </a:r>
             <a:endParaRPr lang="en-US" sz="1200" dirty="0"/>
           </a:p>
@@ -4631,7 +4724,7 @@
                 <a:ea typeface="Courier New" pitchFamily="34" charset="-122"/>
                 <a:cs typeface="Courier New" pitchFamily="34" charset="-120"/>
               </a:rPr>
-              <a:t>RADICAL TRANSPARENCY</a:t>
+              <a:t>FULLY AUTONOMOUS</a:t>
             </a:r>
             <a:endParaRPr lang="en-US" sz="1000" dirty="0"/>
           </a:p>
@@ -4670,7 +4763,7 @@
                 <a:ea typeface="Arial" pitchFamily="34" charset="-122"/>
                 <a:cs typeface="Arial" pitchFamily="34" charset="-120"/>
               </a:rPr>
-              <a:t>Every refusal</a:t>
+              <a:t>Docker,</a:t>
             </a:r>
             <a:endParaRPr lang="en-US" sz="2000" dirty="0"/>
           </a:p>
@@ -4687,7 +4780,7 @@
                 <a:ea typeface="Arial" pitchFamily="34" charset="-122"/>
                 <a:cs typeface="Arial" pitchFamily="34" charset="-120"/>
               </a:rPr>
-              <a:t>journaled</a:t>
+              <a:t>unattended</a:t>
             </a:r>
             <a:endParaRPr lang="en-US" sz="2000" dirty="0"/>
           </a:p>
@@ -4729,7 +4822,7 @@
                 <a:ea typeface="Arial" pitchFamily="34" charset="-122"/>
                 <a:cs typeface="Arial" pitchFamily="34" charset="-120"/>
               </a:rPr>
-              <a:t>One JSONL record per scan with the full reasoning. The audit trail is the product.</a:t>
+              <a:t>One session per weekday in an isolated container. Nobody approves a trade.</a:t>
             </a:r>
             <a:endParaRPr lang="en-US" sz="1200" dirty="0"/>
           </a:p>
@@ -4839,7 +4932,7 @@
                 <a:ea typeface="Courier New" pitchFamily="34" charset="-122"/>
                 <a:cs typeface="Courier New" pitchFamily="34" charset="-120"/>
               </a:rPr>
-              <a:t>github.com/KIBA0993/defined-risk-0dte-agent</a:t>
+              <a:t>github.com/KIBA0993/Alpaca-Hackathon</a:t>
             </a:r>
             <a:endParaRPr lang="en-US" sz="900" dirty="0"/>
           </a:p>
@@ -4878,7 +4971,7 @@
                 <a:ea typeface="Arial" pitchFamily="34" charset="-122"/>
                 <a:cs typeface="Arial" pitchFamily="34" charset="-120"/>
               </a:rPr>
-              <a:t>Risk is structural first, procedural second</a:t>
+              <a:t>Risk is structural before it is procedural</a:t>
             </a:r>
             <a:endParaRPr lang="en-US" sz="3400" dirty="0"/>
           </a:p>
@@ -4958,7 +5051,7 @@
                 <a:ea typeface="Arial" pitchFamily="34" charset="-122"/>
                 <a:cs typeface="Arial" pitchFamily="34" charset="-120"/>
               </a:rPr>
-              <a:t>Maximum loss is the premium paid — enforced by the instrument, not by code that has to remember.</a:t>
+              <a:t>Maximum loss is the premium paid - enforced by the instrument, not by code that has to remember.</a:t>
             </a:r>
             <a:endParaRPr lang="en-US" sz="1400" dirty="0"/>
           </a:p>
@@ -5348,7 +5441,7 @@
                 <a:ea typeface="Courier New" pitchFamily="34" charset="-122"/>
                 <a:cs typeface="Courier New" pitchFamily="34" charset="-120"/>
               </a:rPr>
-              <a:t>SCOPED COOLDOWN · 15 MIN</a:t>
+              <a:t>ADAPTIVE SIZING</a:t>
             </a:r>
             <a:endParaRPr lang="en-US" sz="1000" dirty="0"/>
           </a:p>
@@ -5390,7 +5483,7 @@
                 <a:ea typeface="Arial" pitchFamily="34" charset="-122"/>
                 <a:cs typeface="Arial" pitchFamily="34" charset="-120"/>
               </a:rPr>
-              <a:t>Re-entry block armed only by a time_stop close.</a:t>
+              <a:t>Trimmed to the account's real options buying power - an expensive contract sizes down, never rejects.</a:t>
             </a:r>
             <a:endParaRPr lang="en-US" sz="1100" dirty="0"/>
           </a:p>
@@ -5456,7 +5549,7 @@
                 <a:ea typeface="Courier New" pitchFamily="34" charset="-122"/>
                 <a:cs typeface="Courier New" pitchFamily="34" charset="-120"/>
               </a:rPr>
-              <a:t>ADAPTIVE SIZING</a:t>
+              <a:t>SESSION WINDOW</a:t>
             </a:r>
             <a:endParaRPr lang="en-US" sz="1000" dirty="0"/>
           </a:p>
@@ -5498,7 +5591,7 @@
                 <a:ea typeface="Arial" pitchFamily="34" charset="-122"/>
                 <a:cs typeface="Arial" pitchFamily="34" charset="-120"/>
               </a:rPr>
-              <a:t>Target trimmed to the account's real options buying power — pricey contracts size down, never reject.</a:t>
+              <a:t>No entry after 15:00 ET. Hard flatten at 15:50 - a 0DTE never reaches expiry.</a:t>
             </a:r>
             <a:endParaRPr lang="en-US" sz="1100" dirty="0"/>
           </a:p>
@@ -5564,7 +5657,7 @@
                 <a:ea typeface="Courier New" pitchFamily="34" charset="-122"/>
                 <a:cs typeface="Courier New" pitchFamily="34" charset="-120"/>
               </a:rPr>
-              <a:t>SESSION WINDOW</a:t>
+              <a:t>ORPHAN SWEEP</a:t>
             </a:r>
             <a:endParaRPr lang="en-US" sz="1000" dirty="0"/>
           </a:p>
@@ -5606,7 +5699,7 @@
                 <a:ea typeface="Arial" pitchFamily="34" charset="-122"/>
                 <a:cs typeface="Arial" pitchFamily="34" charset="-120"/>
               </a:rPr>
-              <a:t>No entry after 15:00 ET. Hard flatten 15:50 — a 0DTE never reaches expiry.</a:t>
+              <a:t>Any option position the agent did not open is flattened at startup and at EOD.</a:t>
             </a:r>
             <a:endParaRPr lang="en-US" sz="1100" dirty="0"/>
           </a:p>
@@ -5621,7 +5714,7 @@
         <p:spPr>
           <a:xfrm>
             <a:off x="548640" y="5870448"/>
-            <a:ext cx="11091672" cy="457200"/>
+            <a:ext cx="11091672" cy="365760"/>
           </a:xfrm>
           <a:prstGeom prst="rect">
             <a:avLst/>
@@ -5645,7 +5738,7 @@
                 <a:ea typeface="Arial" pitchFamily="34" charset="-122"/>
                 <a:cs typeface="Arial" pitchFamily="34" charset="-120"/>
               </a:rPr>
-              <a:t>Exits ladder both ways:  +40% scales out half and trails the runner  ·  −20% sells half, −40% the rest, −65% backstop  ·  30-min time stop  ·  EOD flatten  ·  175 tests.</a:t>
+              <a:t>Exits ladder in both directions:  +40% scales out half and trails the runner by 40% of its peak gain  ·  -20% sells half, -40% the rest  ·  a 30-minute stop closes anything still under water  ·  15:50 flatten.</a:t>
             </a:r>
             <a:endParaRPr lang="en-US" sz="1100" dirty="0"/>
           </a:p>
@@ -5755,7 +5848,7 @@
                 <a:ea typeface="Courier New" pitchFamily="34" charset="-122"/>
                 <a:cs typeface="Courier New" pitchFamily="34" charset="-120"/>
               </a:rPr>
-              <a:t>github.com/KIBA0993/defined-risk-0dte-agent</a:t>
+              <a:t>github.com/KIBA0993/Alpaca-Hackathon</a:t>
             </a:r>
             <a:endParaRPr lang="en-US" sz="900" dirty="0"/>
           </a:p>
@@ -5794,7 +5887,7 @@
                 <a:ea typeface="Arial" pitchFamily="34" charset="-122"/>
                 <a:cs typeface="Arial" pitchFamily="34" charset="-120"/>
               </a:rPr>
-              <a:t>The AI is the least-trusted component, by design</a:t>
+              <a:t>An AI that is structurally incapable of adding risk</a:t>
             </a:r>
             <a:endParaRPr lang="en-US" sz="3400" dirty="0"/>
           </a:p>
@@ -5809,7 +5902,7 @@
         <p:spPr>
           <a:xfrm>
             <a:off x="548640" y="1874520"/>
-            <a:ext cx="2651760" cy="1417320"/>
+            <a:ext cx="2622042" cy="1417320"/>
           </a:xfrm>
           <a:prstGeom prst="roundRect">
             <a:avLst>
@@ -5835,8 +5928,8 @@
         </p:nvSpPr>
         <p:spPr>
           <a:xfrm>
-            <a:off x="548640" y="2048256"/>
-            <a:ext cx="2651760" cy="292608"/>
+            <a:off x="548640" y="2039112"/>
+            <a:ext cx="2622042" cy="274320"/>
           </a:xfrm>
           <a:prstGeom prst="rect">
             <a:avLst/>
@@ -5852,17 +5945,17 @@
               <a:buNone/>
             </a:pPr>
             <a:r>
-              <a:rPr lang="en-US" sz="1400" b="1" dirty="0">
+              <a:rPr lang="en-US" sz="1200" b="1" dirty="0">
                 <a:solidFill>
                   <a:srgbClr val="FFFFFF"/>
                 </a:solidFill>
-                <a:latin typeface="Arial" pitchFamily="34" charset="0"/>
-                <a:ea typeface="Arial" pitchFamily="34" charset="-122"/>
-                <a:cs typeface="Arial" pitchFamily="34" charset="-120"/>
-              </a:rPr>
-              <a:t>Scored signal</a:t>
-            </a:r>
-            <a:endParaRPr lang="en-US" sz="1400" dirty="0"/>
+                <a:latin typeface="Courier New" pitchFamily="34" charset="0"/>
+                <a:ea typeface="Courier New" pitchFamily="34" charset="-122"/>
+                <a:cs typeface="Courier New" pitchFamily="34" charset="-120"/>
+              </a:rPr>
+              <a:t>SCORED SIGNAL</a:t>
+            </a:r>
+            <a:endParaRPr lang="en-US" sz="1200" dirty="0"/>
           </a:p>
         </p:txBody>
       </p:sp>
@@ -5874,8 +5967,8 @@
         </p:nvSpPr>
         <p:spPr>
           <a:xfrm>
-            <a:off x="685800" y="2414016"/>
-            <a:ext cx="2377440" cy="731520"/>
+            <a:off x="640080" y="2368296"/>
+            <a:ext cx="2439162" cy="795528"/>
           </a:xfrm>
           <a:prstGeom prst="rect">
             <a:avLst/>
@@ -5936,8 +6029,8 @@
         </p:nvSpPr>
         <p:spPr>
           <a:xfrm>
-            <a:off x="3200400" y="2331720"/>
-            <a:ext cx="256032" cy="365760"/>
+            <a:off x="3170682" y="2400300"/>
+            <a:ext cx="201168" cy="365760"/>
           </a:xfrm>
           <a:prstGeom prst="rect">
             <a:avLst/>
@@ -5953,7 +6046,7 @@
               <a:buNone/>
             </a:pPr>
             <a:r>
-              <a:rPr lang="en-US" sz="1800" dirty="0">
+              <a:rPr lang="en-US" sz="1600" dirty="0">
                 <a:solidFill>
                   <a:srgbClr val="6B7686"/>
                 </a:solidFill>
@@ -5963,7 +6056,7 @@
               </a:rPr>
               <a:t>›</a:t>
             </a:r>
-            <a:endParaRPr lang="en-US" sz="1800" dirty="0"/>
+            <a:endParaRPr lang="en-US" sz="1600" dirty="0"/>
           </a:p>
         </p:txBody>
       </p:sp>
@@ -5975,8 +6068,8 @@
         </p:nvSpPr>
         <p:spPr>
           <a:xfrm>
-            <a:off x="3456432" y="1874520"/>
-            <a:ext cx="2651760" cy="1417320"/>
+            <a:off x="3371850" y="1874520"/>
+            <a:ext cx="2622042" cy="1417320"/>
           </a:xfrm>
           <a:prstGeom prst="roundRect">
             <a:avLst>
@@ -6002,8 +6095,8 @@
         </p:nvSpPr>
         <p:spPr>
           <a:xfrm>
-            <a:off x="3456432" y="2048256"/>
-            <a:ext cx="2651760" cy="292608"/>
+            <a:off x="3371850" y="2039112"/>
+            <a:ext cx="2622042" cy="274320"/>
           </a:xfrm>
           <a:prstGeom prst="rect">
             <a:avLst/>
@@ -6019,17 +6112,17 @@
               <a:buNone/>
             </a:pPr>
             <a:r>
-              <a:rPr lang="en-US" sz="1400" b="1" dirty="0">
+              <a:rPr lang="en-US" sz="1200" b="1" dirty="0">
                 <a:solidFill>
                   <a:srgbClr val="FFFFFF"/>
                 </a:solidFill>
-                <a:latin typeface="Arial" pitchFamily="34" charset="0"/>
-                <a:ea typeface="Arial" pitchFamily="34" charset="-122"/>
-                <a:cs typeface="Arial" pitchFamily="34" charset="-120"/>
-              </a:rPr>
-              <a:t>Rules gate</a:t>
-            </a:r>
-            <a:endParaRPr lang="en-US" sz="1400" dirty="0"/>
+                <a:latin typeface="Courier New" pitchFamily="34" charset="0"/>
+                <a:ea typeface="Courier New" pitchFamily="34" charset="-122"/>
+                <a:cs typeface="Courier New" pitchFamily="34" charset="-120"/>
+              </a:rPr>
+              <a:t>RULES GATE</a:t>
+            </a:r>
+            <a:endParaRPr lang="en-US" sz="1200" dirty="0"/>
           </a:p>
         </p:txBody>
       </p:sp>
@@ -6041,8 +6134,8 @@
         </p:nvSpPr>
         <p:spPr>
           <a:xfrm>
-            <a:off x="3593592" y="2414016"/>
-            <a:ext cx="2377440" cy="731520"/>
+            <a:off x="3463290" y="2368296"/>
+            <a:ext cx="2439162" cy="795528"/>
           </a:xfrm>
           <a:prstGeom prst="rect">
             <a:avLst/>
@@ -6103,8 +6196,8 @@
         </p:nvSpPr>
         <p:spPr>
           <a:xfrm>
-            <a:off x="6108192" y="2331720"/>
-            <a:ext cx="256032" cy="365760"/>
+            <a:off x="5993892" y="2400300"/>
+            <a:ext cx="201168" cy="365760"/>
           </a:xfrm>
           <a:prstGeom prst="rect">
             <a:avLst/>
@@ -6120,7 +6213,7 @@
               <a:buNone/>
             </a:pPr>
             <a:r>
-              <a:rPr lang="en-US" sz="1800" dirty="0">
+              <a:rPr lang="en-US" sz="1600" dirty="0">
                 <a:solidFill>
                   <a:srgbClr val="6B7686"/>
                 </a:solidFill>
@@ -6130,7 +6223,7 @@
               </a:rPr>
               <a:t>›</a:t>
             </a:r>
-            <a:endParaRPr lang="en-US" sz="1800" dirty="0"/>
+            <a:endParaRPr lang="en-US" sz="1600" dirty="0"/>
           </a:p>
         </p:txBody>
       </p:sp>
@@ -6142,8 +6235,8 @@
         </p:nvSpPr>
         <p:spPr>
           <a:xfrm>
-            <a:off x="6364224" y="1874520"/>
-            <a:ext cx="2651760" cy="1417320"/>
+            <a:off x="6195060" y="1874520"/>
+            <a:ext cx="2622042" cy="1417320"/>
           </a:xfrm>
           <a:prstGeom prst="roundRect">
             <a:avLst>
@@ -6169,8 +6262,8 @@
         </p:nvSpPr>
         <p:spPr>
           <a:xfrm>
-            <a:off x="6364224" y="2048256"/>
-            <a:ext cx="2651760" cy="292608"/>
+            <a:off x="6195060" y="2039112"/>
+            <a:ext cx="2622042" cy="274320"/>
           </a:xfrm>
           <a:prstGeom prst="rect">
             <a:avLst/>
@@ -6186,17 +6279,17 @@
               <a:buNone/>
             </a:pPr>
             <a:r>
-              <a:rPr lang="en-US" sz="1400" b="1" dirty="0">
+              <a:rPr lang="en-US" sz="1200" b="1" dirty="0">
                 <a:solidFill>
                   <a:srgbClr val="F0B429"/>
                 </a:solidFill>
-                <a:latin typeface="Arial" pitchFamily="34" charset="0"/>
-                <a:ea typeface="Arial" pitchFamily="34" charset="-122"/>
-                <a:cs typeface="Arial" pitchFamily="34" charset="-120"/>
-              </a:rPr>
-              <a:t>Claude veto</a:t>
-            </a:r>
-            <a:endParaRPr lang="en-US" sz="1400" dirty="0"/>
+                <a:latin typeface="Courier New" pitchFamily="34" charset="0"/>
+                <a:ea typeface="Courier New" pitchFamily="34" charset="-122"/>
+                <a:cs typeface="Courier New" pitchFamily="34" charset="-120"/>
+              </a:rPr>
+              <a:t>CLAUDE VETO</a:t>
+            </a:r>
+            <a:endParaRPr lang="en-US" sz="1200" dirty="0"/>
           </a:p>
         </p:txBody>
       </p:sp>
@@ -6208,8 +6301,8 @@
         </p:nvSpPr>
         <p:spPr>
           <a:xfrm>
-            <a:off x="6501384" y="2414016"/>
-            <a:ext cx="2377440" cy="731520"/>
+            <a:off x="6286500" y="2368296"/>
+            <a:ext cx="2439162" cy="795528"/>
           </a:xfrm>
           <a:prstGeom prst="rect">
             <a:avLst/>
@@ -6256,7 +6349,7 @@
                 <a:ea typeface="Arial" pitchFamily="34" charset="-122"/>
                 <a:cs typeface="Arial" pitchFamily="34" charset="-120"/>
               </a:rPr>
-              <a:t>regime read — no-go only</a:t>
+              <a:t>regime read - no-go only</a:t>
             </a:r>
             <a:endParaRPr lang="en-US" sz="1000" dirty="0"/>
           </a:p>
@@ -6270,8 +6363,8 @@
         </p:nvSpPr>
         <p:spPr>
           <a:xfrm>
-            <a:off x="9015984" y="2331720"/>
-            <a:ext cx="256032" cy="365760"/>
+            <a:off x="8817102" y="2400300"/>
+            <a:ext cx="201168" cy="365760"/>
           </a:xfrm>
           <a:prstGeom prst="rect">
             <a:avLst/>
@@ -6287,7 +6380,7 @@
               <a:buNone/>
             </a:pPr>
             <a:r>
-              <a:rPr lang="en-US" sz="1800" dirty="0">
+              <a:rPr lang="en-US" sz="1600" dirty="0">
                 <a:solidFill>
                   <a:srgbClr val="6B7686"/>
                 </a:solidFill>
@@ -6297,7 +6390,7 @@
               </a:rPr>
               <a:t>›</a:t>
             </a:r>
-            <a:endParaRPr lang="en-US" sz="1800" dirty="0"/>
+            <a:endParaRPr lang="en-US" sz="1600" dirty="0"/>
           </a:p>
         </p:txBody>
       </p:sp>
@@ -6309,8 +6402,8 @@
         </p:nvSpPr>
         <p:spPr>
           <a:xfrm>
-            <a:off x="9272016" y="1874520"/>
-            <a:ext cx="2651760" cy="1417320"/>
+            <a:off x="9018270" y="1874520"/>
+            <a:ext cx="2622042" cy="1417320"/>
           </a:xfrm>
           <a:prstGeom prst="roundRect">
             <a:avLst>
@@ -6336,8 +6429,8 @@
         </p:nvSpPr>
         <p:spPr>
           <a:xfrm>
-            <a:off x="9272016" y="2048256"/>
-            <a:ext cx="2651760" cy="292608"/>
+            <a:off x="9018270" y="2039112"/>
+            <a:ext cx="2622042" cy="274320"/>
           </a:xfrm>
           <a:prstGeom prst="rect">
             <a:avLst/>
@@ -6353,17 +6446,17 @@
               <a:buNone/>
             </a:pPr>
             <a:r>
-              <a:rPr lang="en-US" sz="1400" b="1" dirty="0">
+              <a:rPr lang="en-US" sz="1200" b="1" dirty="0">
                 <a:solidFill>
                   <a:srgbClr val="FFFFFF"/>
                 </a:solidFill>
-                <a:latin typeface="Arial" pitchFamily="34" charset="0"/>
-                <a:ea typeface="Arial" pitchFamily="34" charset="-122"/>
-                <a:cs typeface="Arial" pitchFamily="34" charset="-120"/>
-              </a:rPr>
-              <a:t>Order</a:t>
-            </a:r>
-            <a:endParaRPr lang="en-US" sz="1400" dirty="0"/>
+                <a:latin typeface="Courier New" pitchFamily="34" charset="0"/>
+                <a:ea typeface="Courier New" pitchFamily="34" charset="-122"/>
+                <a:cs typeface="Courier New" pitchFamily="34" charset="-120"/>
+              </a:rPr>
+              <a:t>ORDER</a:t>
+            </a:r>
+            <a:endParaRPr lang="en-US" sz="1200" dirty="0"/>
           </a:p>
         </p:txBody>
       </p:sp>
@@ -6375,8 +6468,8 @@
         </p:nvSpPr>
         <p:spPr>
           <a:xfrm>
-            <a:off x="9409176" y="2414016"/>
-            <a:ext cx="2377440" cy="731520"/>
+            <a:off x="9109710" y="2368296"/>
+            <a:ext cx="2439162" cy="795528"/>
           </a:xfrm>
           <a:prstGeom prst="rect">
             <a:avLst/>
@@ -6438,11 +6531,11 @@
         <p:spPr>
           <a:xfrm>
             <a:off x="548640" y="3611880"/>
-            <a:ext cx="5440680" cy="1783080"/>
+            <a:ext cx="5440680" cy="1691640"/>
           </a:xfrm>
           <a:prstGeom prst="roundRect">
             <a:avLst>
-              <a:gd name="adj" fmla="val 4103"/>
+              <a:gd name="adj" fmla="val 4324"/>
             </a:avLst>
           </a:prstGeom>
           <a:solidFill>
@@ -6543,7 +6636,7 @@
         <p:spPr>
           <a:xfrm>
             <a:off x="841248" y="4572000"/>
-            <a:ext cx="4855464" cy="658368"/>
+            <a:ext cx="4855464" cy="566928"/>
           </a:xfrm>
           <a:prstGeom prst="rect">
             <a:avLst/>
@@ -6570,7 +6663,7 @@
                 <a:ea typeface="Arial" pitchFamily="34" charset="-122"/>
                 <a:cs typeface="Arial" pitchFamily="34" charset="-120"/>
               </a:rPr>
-              <a:t>The model can never resurrect a trade the rules rejected, so rules_only is a strict mathematical floor under the AI path. Missing key or bad JSON degrades to rules and logs it — it never fails open.</a:t>
+              <a:t>The model can remove a trade the rules approved. It can never resurrect one they rejected, so the deterministic path is a strict subset of the AI path - and both are auditable against each other.</a:t>
             </a:r>
             <a:endParaRPr lang="en-US" sz="1100" dirty="0"/>
           </a:p>
@@ -6585,11 +6678,11 @@
         <p:spPr>
           <a:xfrm>
             <a:off x="6199632" y="3611880"/>
-            <a:ext cx="5440680" cy="1783080"/>
+            <a:ext cx="5440680" cy="1691640"/>
           </a:xfrm>
           <a:prstGeom prst="roundRect">
             <a:avLst>
-              <a:gd name="adj" fmla="val 4103"/>
+              <a:gd name="adj" fmla="val 4324"/>
             </a:avLst>
           </a:prstGeom>
           <a:solidFill>
@@ -6636,7 +6729,7 @@
                 <a:ea typeface="Courier New" pitchFamily="34" charset="-122"/>
                 <a:cs typeface="Courier New" pitchFamily="34" charset="-120"/>
               </a:rPr>
-              <a:t>WHAT WE SUBMITTED</a:t>
+              <a:t>FAILS CLOSED, NEVER OPEN</a:t>
             </a:r>
             <a:endParaRPr lang="en-US" sz="1000" dirty="0"/>
           </a:p>
@@ -6667,7 +6760,7 @@
               <a:buNone/>
             </a:pPr>
             <a:r>
-              <a:rPr lang="en-US" sz="1700" b="1" dirty="0">
+              <a:rPr lang="en-US" sz="2000" b="1" dirty="0">
                 <a:solidFill>
                   <a:srgbClr val="FFFFFF"/>
                 </a:solidFill>
@@ -6675,9 +6768,9 @@
                 <a:ea typeface="Arial" pitchFamily="34" charset="-122"/>
                 <a:cs typeface="Arial" pitchFamily="34" charset="-120"/>
               </a:rPr>
-              <a:t>decision_mode: rules_only</a:t>
-            </a:r>
-            <a:endParaRPr lang="en-US" sz="1700" dirty="0"/>
+              <a:t>degrade, don't guess</a:t>
+            </a:r>
+            <a:endParaRPr lang="en-US" sz="2000" dirty="0"/>
           </a:p>
         </p:txBody>
       </p:sp>
@@ -6690,7 +6783,7 @@
         <p:spPr>
           <a:xfrm>
             <a:off x="6492240" y="4572000"/>
-            <a:ext cx="4855464" cy="658368"/>
+            <a:ext cx="4855464" cy="566928"/>
           </a:xfrm>
           <a:prstGeom prst="rect">
             <a:avLst/>
@@ -6717,7 +6810,7 @@
                 <a:ea typeface="Arial" pitchFamily="34" charset="-122"/>
                 <a:cs typeface="Arial" pitchFamily="34" charset="-120"/>
               </a:rPr>
-              <a:t>The scored run used the deterministic stack. The LLM gate ships tested and runnable (--decision-mode llm) but was not in the scored path — we say which arm produced the numbers.</a:t>
+              <a:t>A missing key or unparseable reply degrades to the deterministic gate and says so in the journal. The agent never trades on a model response it could not read.</a:t>
             </a:r>
             <a:endParaRPr lang="en-US" sz="1100" dirty="0"/>
           </a:p>
@@ -6731,8 +6824,8 @@
         </p:nvSpPr>
         <p:spPr>
           <a:xfrm>
-            <a:off x="548640" y="5577840"/>
-            <a:ext cx="11091672" cy="457200"/>
+            <a:off x="548640" y="5486400"/>
+            <a:ext cx="11091672" cy="365760"/>
           </a:xfrm>
           <a:prstGeom prst="rect">
             <a:avLst/>
@@ -6748,17 +6841,17 @@
               <a:buNone/>
             </a:pPr>
             <a:r>
-              <a:rPr lang="en-US" sz="1400" i="1" dirty="0">
-                <a:solidFill>
-                  <a:srgbClr val="FFFFFF"/>
-                </a:solidFill>
-                <a:latin typeface="Arial" pitchFamily="34" charset="0"/>
-                <a:ea typeface="Arial" pitchFamily="34" charset="-122"/>
-                <a:cs typeface="Arial" pitchFamily="34" charset="-120"/>
-              </a:rPr>
-              <a:t>“We never let it manufacture conviction we couldn't measure — because we measured, and it wasn't there.”</a:t>
-            </a:r>
-            <a:endParaRPr lang="en-US" sz="1400" dirty="0"/>
+              <a:rPr lang="en-US" sz="1000" dirty="0">
+                <a:solidFill>
+                  <a:srgbClr val="6B7686"/>
+                </a:solidFill>
+                <a:latin typeface="Courier New" pitchFamily="34" charset="0"/>
+                <a:ea typeface="Courier New" pitchFamily="34" charset="-122"/>
+                <a:cs typeface="Courier New" pitchFamily="34" charset="-120"/>
+              </a:rPr>
+              <a:t>The scored sessions ran the deterministic gate; the Claude veto ships tested and runnable via --decision-mode llm.</a:t>
+            </a:r>
+            <a:endParaRPr lang="en-US" sz="1000" dirty="0"/>
           </a:p>
         </p:txBody>
       </p:sp>
@@ -6866,7 +6959,7 @@
                 <a:ea typeface="Courier New" pitchFamily="34" charset="-122"/>
                 <a:cs typeface="Courier New" pitchFamily="34" charset="-120"/>
               </a:rPr>
-              <a:t>github.com/KIBA0993/defined-risk-0dte-agent</a:t>
+              <a:t>github.com/KIBA0993/Alpaca-Hackathon</a:t>
             </a:r>
             <a:endParaRPr lang="en-US" sz="900" dirty="0"/>
           </a:p>
@@ -7013,7 +7106,7 @@
                 <a:ea typeface="Arial" pitchFamily="34" charset="-122"/>
                 <a:cs typeface="Arial" pitchFamily="34" charset="-120"/>
               </a:rPr>
-              <a:t>alpaca order submit, then poll to a terminal state. The agent books the real broker fill, not a quote — so cash P&amp;L is buy-fill vs sell-fill.</a:t>
+              <a:t>alpaca order submit, then poll to a terminal state. The agent books the real broker fill, not a quote - so cash P&amp;L is buy-fill against sell-fill.</a:t>
             </a:r>
             <a:endParaRPr lang="en-US" sz="1200" dirty="0"/>
           </a:p>
@@ -7121,7 +7214,7 @@
                 <a:ea typeface="Arial" pitchFamily="34" charset="-122"/>
                 <a:cs typeface="Arial" pitchFamily="34" charset="-120"/>
               </a:rPr>
-              <a:t>Refuses to place anything unless `alpaca doctor` resolves paper-api.alpaca.markets. The env var alone isn't proof — a profile's live_trade can route live.</a:t>
+              <a:t>Refuses to place anything unless `alpaca doctor` resolves paper-api.alpaca.markets. The env var alone isn't proof - a profile's live_trade can route live.</a:t>
             </a:r>
             <a:endParaRPr lang="en-US" sz="1200" dirty="0"/>
           </a:p>
@@ -7295,7 +7388,7 @@
                 <a:ea typeface="Courier New" pitchFamily="34" charset="-122"/>
                 <a:cs typeface="Courier New" pitchFamily="34" charset="-120"/>
               </a:rPr>
-              <a:t>UNATTENDED + AUDITABLE</a:t>
+              <a:t>UNATTENDED AND AUDITABLE</a:t>
             </a:r>
             <a:endParaRPr lang="en-US" sz="1000" dirty="0"/>
           </a:p>
@@ -7337,7 +7430,7 @@
                 <a:ea typeface="Arial" pitchFamily="34" charset="-122"/>
                 <a:cs typeface="Arial" pitchFamily="34" charset="-120"/>
               </a:rPr>
-              <a:t>Market data (5m bars, contract discovery, ATM quotes) via the Alpaca SDK. Isolated Docker container on a NAS, one session per weekday, JSONL journal per scan.</a:t>
+              <a:t>Market data (5m bars, contract discovery, ATM quotes) via the Alpaca SDK. Isolated Docker container, one session per weekday, JSONL journal per scan.</a:t>
             </a:r>
             <a:endParaRPr lang="en-US" sz="1200" dirty="0"/>
           </a:p>
@@ -7376,7 +7469,7 @@
                 <a:ea typeface="Courier New" pitchFamily="34" charset="-122"/>
                 <a:cs typeface="Courier New" pitchFamily="34" charset="-120"/>
               </a:rPr>
-              <a:t>Requirement met: projects must use Alpaca's MCP server or its CLI tools.   —   this agent places every order through the CLI.</a:t>
+              <a:t>Requirement: projects must use Alpaca's MCP server or its CLI tools.   —   every order in the book above went through the CLI.</a:t>
             </a:r>
             <a:endParaRPr lang="en-US" sz="1100" dirty="0"/>
           </a:p>
@@ -7447,7 +7540,7 @@
                 <a:ea typeface="Courier New" pitchFamily="34" charset="-122"/>
                 <a:cs typeface="Courier New" pitchFamily="34" charset="-120"/>
               </a:rPr>
-              <a:t>06  ·  Results</a:t>
+              <a:t>06  ·  The audit trail</a:t>
             </a:r>
             <a:endParaRPr lang="en-US" sz="1100" dirty="0"/>
           </a:p>
@@ -7486,7 +7579,7 @@
                 <a:ea typeface="Courier New" pitchFamily="34" charset="-122"/>
                 <a:cs typeface="Courier New" pitchFamily="34" charset="-120"/>
               </a:rPr>
-              <a:t>github.com/KIBA0993/defined-risk-0dte-agent</a:t>
+              <a:t>github.com/KIBA0993/Alpaca-Hackathon</a:t>
             </a:r>
             <a:endParaRPr lang="en-US" sz="900" dirty="0"/>
           </a:p>
@@ -7525,7 +7618,7 @@
                 <a:ea typeface="Arial" pitchFamily="34" charset="-122"/>
                 <a:cs typeface="Arial" pitchFamily="34" charset="-120"/>
               </a:rPr>
-              <a:t>Four sessions, reported honestly</a:t>
+              <a:t>Most agents show the trades they took</a:t>
             </a:r>
             <a:endParaRPr lang="en-US" sz="3400" dirty="0"/>
           </a:p>
@@ -7533,18 +7626,57 @@
       </p:sp>
       <p:sp>
         <p:nvSpPr>
-          <p:cNvPr id="5" name="Shape 3"/>
+          <p:cNvPr id="5" name="Text 3"/>
+          <p:cNvSpPr txBox="1"/>
+          <p:nvPr/>
+        </p:nvSpPr>
+        <p:spPr>
+          <a:xfrm>
+            <a:off x="548640" y="1572768"/>
+            <a:ext cx="11064240" cy="548640"/>
+          </a:xfrm>
+          <a:prstGeom prst="rect">
+            <a:avLst/>
+          </a:prstGeom>
+          <a:noFill/>
+          <a:ln/>
+        </p:spPr>
+        <p:txBody>
+          <a:bodyPr wrap="square" lIns="0" tIns="0" rIns="0" bIns="0" rtlCol="0" anchor="ctr"/>
+          <a:lstStyle/>
+          <a:p>
+            <a:pPr indent="0" marL="0">
+              <a:buNone/>
+            </a:pPr>
+            <a:r>
+              <a:rPr lang="en-US" sz="3000" b="1" dirty="0">
+                <a:solidFill>
+                  <a:srgbClr val="F0B429"/>
+                </a:solidFill>
+                <a:latin typeface="Arial" pitchFamily="34" charset="0"/>
+                <a:ea typeface="Arial" pitchFamily="34" charset="-122"/>
+                <a:cs typeface="Arial" pitchFamily="34" charset="-120"/>
+              </a:rPr>
+              <a:t>This one shows the ones it refused.</a:t>
+            </a:r>
+            <a:endParaRPr lang="en-US" sz="3000" dirty="0"/>
+          </a:p>
+        </p:txBody>
+      </p:sp>
+      <p:sp>
+        <p:nvSpPr>
+          <p:cNvPr id="6" name="Shape 4"/>
           <p:cNvSpPr/>
           <p:nvPr/>
         </p:nvSpPr>
         <p:spPr>
           <a:xfrm>
-            <a:off x="548640" y="1737360"/>
-            <a:ext cx="6492240" cy="3200400"/>
+            <a:off x="548640" y="2423160"/>
+            <a:ext cx="6766560" cy="2880360"/>
           </a:xfrm>
           <a:prstGeom prst="roundRect">
             <a:avLst>
-              <a:gd name="adj" fmla="val 2286"/>
+              <a:gd name="adj" fmla="val 2540"/>
             </a:avLst>
           </a:prstGeom>
           <a:solidFill>
@@ -7560,14 +7692,14 @@
       </p:sp>
       <p:sp>
         <p:nvSpPr>
-          <p:cNvPr id="6" name="Text 4"/>
-          <p:cNvSpPr txBox="1"/>
-          <p:nvPr/>
-        </p:nvSpPr>
-        <p:spPr>
-          <a:xfrm>
-            <a:off x="822960" y="1901952"/>
-            <a:ext cx="5943600" cy="256032"/>
+          <p:cNvPr id="7" name="Text 5"/>
+          <p:cNvSpPr txBox="1"/>
+          <p:nvPr/>
+        </p:nvSpPr>
+        <p:spPr>
+          <a:xfrm>
+            <a:off x="804672" y="2578608"/>
+            <a:ext cx="6309360" cy="256032"/>
           </a:xfrm>
           <a:prstGeom prst="rect">
             <a:avLst/>
@@ -7591,38 +7723,22 @@
                 <a:ea typeface="Courier New" pitchFamily="34" charset="-122"/>
                 <a:cs typeface="Courier New" pitchFamily="34" charset="-120"/>
               </a:rPr>
-              <a:t>EQUITY · ALPACA PAPER PA38HG4D9653</a:t>
+              <a:t>logs/decisions-2026-09-03.jsonl</a:t>
             </a:r>
             <a:endParaRPr lang="en-US" sz="1000" dirty="0"/>
           </a:p>
         </p:txBody>
       </p:sp>
-      <p:graphicFrame>
-        <p:nvGraphicFramePr>
-          <p:cNvPr id="7" name="Chart 0" descr=""/>
-          <p:cNvGraphicFramePr/>
-          <p:nvPr/>
-        </p:nvGraphicFramePr>
-        <p:xfrm>
-          <a:off x="713232" y="2212848"/>
-          <a:ext cx="6163056" cy="2606040"/>
-        </p:xfrm>
-        <a:graphic xmlns:a="http://schemas.openxmlformats.org/drawingml/2006/main">
-          <a:graphicData uri="http://schemas.openxmlformats.org/drawingml/2006/chart">
-            <c:chart xmlns:c="http://schemas.openxmlformats.org/drawingml/2006/chart" r:id="rId1"/>
-          </a:graphicData>
-        </a:graphic>
-      </p:graphicFrame>
-      <p:sp>
-        <p:nvSpPr>
-          <p:cNvPr id="8" name="Text 5"/>
-          <p:cNvSpPr txBox="1"/>
-          <p:nvPr/>
-        </p:nvSpPr>
-        <p:spPr>
-          <a:xfrm>
-            <a:off x="7269480" y="1901952"/>
-            <a:ext cx="4370832" cy="256032"/>
+      <p:sp>
+        <p:nvSpPr>
+          <p:cNvPr id="8" name="Text 6"/>
+          <p:cNvSpPr txBox="1"/>
+          <p:nvPr/>
+        </p:nvSpPr>
+        <p:spPr>
+          <a:xfrm>
+            <a:off x="804672" y="2926080"/>
+            <a:ext cx="6309360" cy="2194560"/>
           </a:xfrm>
           <a:prstGeom prst="rect">
             <a:avLst/>
@@ -7635,37 +7751,160 @@
           <a:lstStyle/>
           <a:p>
             <a:pPr indent="0" marL="0">
-              <a:buNone/>
-            </a:pPr>
-            <a:r>
-              <a:rPr lang="en-US" sz="1000" spc="120" kern="0" dirty="0">
-                <a:solidFill>
-                  <a:srgbClr val="6B7686"/>
+              <a:lnSpc>
+                <a:spcPct val="128000"/>
+              </a:lnSpc>
+              <a:buNone/>
+            </a:pPr>
+            <a:r>
+              <a:rPr lang="en-US" sz="1300" dirty="0">
+                <a:solidFill>
+                  <a:srgbClr val="A1A8B5"/>
                 </a:solidFill>
                 <a:latin typeface="Courier New" pitchFamily="34" charset="0"/>
                 <a:ea typeface="Courier New" pitchFamily="34" charset="-122"/>
                 <a:cs typeface="Courier New" pitchFamily="34" charset="-120"/>
               </a:rPr>
-              <a:t>REALIZED BY SESSION</a:t>
-            </a:r>
-            <a:endParaRPr lang="en-US" sz="1000" dirty="0"/>
-          </a:p>
-        </p:txBody>
-      </p:sp>
-      <p:sp>
-        <p:nvSpPr>
-          <p:cNvPr id="9" name="Shape 6"/>
+              <a:t>{ "symbol": "QQQ",</a:t>
+            </a:r>
+            <a:endParaRPr lang="en-US" sz="1300" dirty="0"/>
+          </a:p>
+          <a:p>
+            <a:pPr indent="0" marL="0">
+              <a:lnSpc>
+                <a:spcPct val="128000"/>
+              </a:lnSpc>
+              <a:buNone/>
+            </a:pPr>
+            <a:r>
+              <a:rPr lang="en-US" sz="1300" dirty="0">
+                <a:solidFill>
+                  <a:srgbClr val="FFFFFF"/>
+                </a:solidFill>
+                <a:latin typeface="Courier New" pitchFamily="34" charset="0"/>
+                <a:ea typeface="Courier New" pitchFamily="34" charset="-122"/>
+                <a:cs typeface="Courier New" pitchFamily="34" charset="-120"/>
+              </a:rPr>
+              <a:t>  "score": 0.68,</a:t>
+            </a:r>
+            <a:endParaRPr lang="en-US" sz="1300" dirty="0"/>
+          </a:p>
+          <a:p>
+            <a:pPr indent="0" marL="0">
+              <a:lnSpc>
+                <a:spcPct val="128000"/>
+              </a:lnSpc>
+              <a:buNone/>
+            </a:pPr>
+            <a:r>
+              <a:rPr lang="en-US" sz="1300" dirty="0">
+                <a:solidFill>
+                  <a:srgbClr val="A1A8B5"/>
+                </a:solidFill>
+                <a:latin typeface="Courier New" pitchFamily="34" charset="0"/>
+                <a:ea typeface="Courier New" pitchFamily="34" charset="-122"/>
+                <a:cs typeface="Courier New" pitchFamily="34" charset="-120"/>
+              </a:rPr>
+              <a:t>  "would_have_direction": "put",</a:t>
+            </a:r>
+            <a:endParaRPr lang="en-US" sz="1300" dirty="0"/>
+          </a:p>
+          <a:p>
+            <a:pPr indent="0" marL="0">
+              <a:lnSpc>
+                <a:spcPct val="128000"/>
+              </a:lnSpc>
+              <a:buNone/>
+            </a:pPr>
+            <a:r>
+              <a:rPr lang="en-US" sz="1300" dirty="0">
+                <a:solidFill>
+                  <a:srgbClr val="A1A8B5"/>
+                </a:solidFill>
+                <a:latin typeface="Courier New" pitchFamily="34" charset="0"/>
+                <a:ea typeface="Courier New" pitchFamily="34" charset="-122"/>
+                <a:cs typeface="Courier New" pitchFamily="34" charset="-120"/>
+              </a:rPr>
+              <a:t>  "noise_band": { "state": "inside" },</a:t>
+            </a:r>
+            <a:endParaRPr lang="en-US" sz="1300" dirty="0"/>
+          </a:p>
+          <a:p>
+            <a:pPr indent="0" marL="0">
+              <a:lnSpc>
+                <a:spcPct val="128000"/>
+              </a:lnSpc>
+              <a:buNone/>
+            </a:pPr>
+            <a:r>
+              <a:rPr lang="en-US" sz="1300" dirty="0">
+                <a:solidFill>
+                  <a:srgbClr val="FFFFFF"/>
+                </a:solidFill>
+                <a:latin typeface="Courier New" pitchFamily="34" charset="0"/>
+                <a:ea typeface="Courier New" pitchFamily="34" charset="-122"/>
+                <a:cs typeface="Courier New" pitchFamily="34" charset="-120"/>
+              </a:rPr>
+              <a:t>  "gate": { "go": false,</a:t>
+            </a:r>
+            <a:endParaRPr lang="en-US" sz="1300" dirty="0"/>
+          </a:p>
+          <a:p>
+            <a:pPr indent="0" marL="0">
+              <a:lnSpc>
+                <a:spcPct val="128000"/>
+              </a:lnSpc>
+              <a:buNone/>
+            </a:pPr>
+            <a:r>
+              <a:rPr lang="en-US" sz="1300" dirty="0">
+                <a:solidFill>
+                  <a:srgbClr val="F0B429"/>
+                </a:solidFill>
+                <a:latin typeface="Courier New" pitchFamily="34" charset="0"/>
+                <a:ea typeface="Courier New" pitchFamily="34" charset="-122"/>
+                <a:cs typeface="Courier New" pitchFamily="34" charset="-120"/>
+              </a:rPr>
+              <a:t>    "rationale": "score 0.68 &lt; min 0.70" },</a:t>
+            </a:r>
+            <a:endParaRPr lang="en-US" sz="1300" dirty="0"/>
+          </a:p>
+          <a:p>
+            <a:pPr indent="0" marL="0">
+              <a:lnSpc>
+                <a:spcPct val="128000"/>
+              </a:lnSpc>
+              <a:buNone/>
+            </a:pPr>
+            <a:r>
+              <a:rPr lang="en-US" sz="1300" dirty="0">
+                <a:solidFill>
+                  <a:srgbClr val="A1A8B5"/>
+                </a:solidFill>
+                <a:latin typeface="Courier New" pitchFamily="34" charset="0"/>
+                <a:ea typeface="Courier New" pitchFamily="34" charset="-122"/>
+                <a:cs typeface="Courier New" pitchFamily="34" charset="-120"/>
+              </a:rPr>
+              <a:t>  "order": null }</a:t>
+            </a:r>
+            <a:endParaRPr lang="en-US" sz="1300" dirty="0"/>
+          </a:p>
+        </p:txBody>
+      </p:sp>
+      <p:sp>
+        <p:nvSpPr>
+          <p:cNvPr id="9" name="Shape 7"/>
           <p:cNvSpPr/>
           <p:nvPr/>
         </p:nvSpPr>
         <p:spPr>
           <a:xfrm>
-            <a:off x="7269480" y="2240280"/>
-            <a:ext cx="4370832" cy="493776"/>
+            <a:off x="7571232" y="2423160"/>
+            <a:ext cx="4069080" cy="1371600"/>
           </a:xfrm>
           <a:prstGeom prst="roundRect">
             <a:avLst>
-              <a:gd name="adj" fmla="val 11111"/>
+              <a:gd name="adj" fmla="val 5333"/>
             </a:avLst>
           </a:prstGeom>
           <a:solidFill>
@@ -7681,14 +7920,14 @@
       </p:sp>
       <p:sp>
         <p:nvSpPr>
-          <p:cNvPr id="10" name="Text 7"/>
-          <p:cNvSpPr txBox="1"/>
-          <p:nvPr/>
-        </p:nvSpPr>
-        <p:spPr>
-          <a:xfrm>
-            <a:off x="7452360" y="2240280"/>
-            <a:ext cx="960120" cy="493776"/>
+          <p:cNvPr id="10" name="Text 8"/>
+          <p:cNvSpPr txBox="1"/>
+          <p:nvPr/>
+        </p:nvSpPr>
+        <p:spPr>
+          <a:xfrm>
+            <a:off x="7863840" y="2624328"/>
+            <a:ext cx="3483864" cy="219456"/>
           </a:xfrm>
           <a:prstGeom prst="rect">
             <a:avLst/>
@@ -7704,69 +7943,30 @@
               <a:buNone/>
             </a:pPr>
             <a:r>
-              <a:rPr lang="en-US" sz="1300" b="1" dirty="0">
-                <a:solidFill>
-                  <a:srgbClr val="FFFFFF"/>
-                </a:solidFill>
-                <a:latin typeface="Arial" pitchFamily="34" charset="0"/>
-                <a:ea typeface="Arial" pitchFamily="34" charset="-122"/>
-                <a:cs typeface="Arial" pitchFamily="34" charset="-120"/>
-              </a:rPr>
-              <a:t>Aug 31</a:t>
-            </a:r>
-            <a:endParaRPr lang="en-US" sz="1300" dirty="0"/>
-          </a:p>
-        </p:txBody>
-      </p:sp>
-      <p:sp>
-        <p:nvSpPr>
-          <p:cNvPr id="11" name="Text 8"/>
-          <p:cNvSpPr txBox="1"/>
-          <p:nvPr/>
-        </p:nvSpPr>
-        <p:spPr>
-          <a:xfrm>
-            <a:off x="8412480" y="2240280"/>
-            <a:ext cx="1325880" cy="493776"/>
-          </a:xfrm>
-          <a:prstGeom prst="rect">
-            <a:avLst/>
-          </a:prstGeom>
-          <a:noFill/>
-          <a:ln/>
-        </p:spPr>
-        <p:txBody>
-          <a:bodyPr wrap="square" lIns="0" tIns="0" rIns="0" bIns="0" rtlCol="0" anchor="ctr"/>
-          <a:lstStyle/>
-          <a:p>
-            <a:pPr algn="r" indent="0" marL="0">
-              <a:buNone/>
-            </a:pPr>
-            <a:r>
-              <a:rPr lang="en-US" sz="1300" b="1" dirty="0">
-                <a:solidFill>
-                  <a:srgbClr val="E5484D"/>
+              <a:rPr lang="en-US" sz="1000" spc="140" kern="0" dirty="0">
+                <a:solidFill>
+                  <a:srgbClr val="6B7686"/>
                 </a:solidFill>
                 <a:latin typeface="Courier New" pitchFamily="34" charset="0"/>
                 <a:ea typeface="Courier New" pitchFamily="34" charset="-122"/>
                 <a:cs typeface="Courier New" pitchFamily="34" charset="-120"/>
               </a:rPr>
-              <a:t>−$10,636</a:t>
-            </a:r>
-            <a:endParaRPr lang="en-US" sz="1300" dirty="0"/>
-          </a:p>
-        </p:txBody>
-      </p:sp>
-      <p:sp>
-        <p:nvSpPr>
-          <p:cNvPr id="12" name="Text 9"/>
-          <p:cNvSpPr txBox="1"/>
-          <p:nvPr/>
-        </p:nvSpPr>
-        <p:spPr>
-          <a:xfrm>
-            <a:off x="9829800" y="2240280"/>
-            <a:ext cx="914400" cy="493776"/>
+              <a:t>ONE RECORD PER SCAN</a:t>
+            </a:r>
+            <a:endParaRPr lang="en-US" sz="1000" dirty="0"/>
+          </a:p>
+        </p:txBody>
+      </p:sp>
+      <p:sp>
+        <p:nvSpPr>
+          <p:cNvPr id="11" name="Text 9"/>
+          <p:cNvSpPr txBox="1"/>
+          <p:nvPr/>
+        </p:nvSpPr>
+        <p:spPr>
+          <a:xfrm>
+            <a:off x="7863840" y="2916936"/>
+            <a:ext cx="3483864" cy="384048"/>
           </a:xfrm>
           <a:prstGeom prst="rect">
             <a:avLst/>
@@ -7778,7 +7978,49 @@
           <a:bodyPr wrap="square" lIns="0" tIns="0" rIns="0" bIns="0" rtlCol="0" anchor="ctr"/>
           <a:lstStyle/>
           <a:p>
-            <a:pPr algn="r" indent="0" marL="0">
+            <a:pPr indent="0" marL="0">
+              <a:buNone/>
+            </a:pPr>
+            <a:r>
+              <a:rPr lang="en-US" sz="2000" b="1" dirty="0">
+                <a:solidFill>
+                  <a:srgbClr val="F0B429"/>
+                </a:solidFill>
+                <a:latin typeface="Arial" pitchFamily="34" charset="0"/>
+                <a:ea typeface="Arial" pitchFamily="34" charset="-122"/>
+                <a:cs typeface="Arial" pitchFamily="34" charset="-120"/>
+              </a:rPr>
+              <a:t>Full reasoning</a:t>
+            </a:r>
+            <a:endParaRPr lang="en-US" sz="2000" dirty="0"/>
+          </a:p>
+        </p:txBody>
+      </p:sp>
+      <p:sp>
+        <p:nvSpPr>
+          <p:cNvPr id="12" name="Text 10"/>
+          <p:cNvSpPr txBox="1"/>
+          <p:nvPr/>
+        </p:nvSpPr>
+        <p:spPr>
+          <a:xfrm>
+            <a:off x="7863840" y="3355848"/>
+            <a:ext cx="3483864" cy="274320"/>
+          </a:xfrm>
+          <a:prstGeom prst="rect">
+            <a:avLst/>
+          </a:prstGeom>
+          <a:noFill/>
+          <a:ln/>
+        </p:spPr>
+        <p:txBody>
+          <a:bodyPr wrap="square" lIns="0" tIns="0" rIns="0" bIns="0" rtlCol="0" anchor="t"/>
+          <a:lstStyle/>
+          <a:p>
+            <a:pPr indent="0" marL="0">
+              <a:lnSpc>
+                <a:spcPct val="120000"/>
+              </a:lnSpc>
               <a:buNone/>
             </a:pPr>
             <a:r>
@@ -7790,7 +8032,7 @@
                 <a:ea typeface="Arial" pitchFamily="34" charset="-122"/>
                 <a:cs typeface="Arial" pitchFamily="34" charset="-120"/>
               </a:rPr>
-              <a:t>19 closes</a:t>
+              <a:t>Score, every signal, band state, gate verdict, risk verdict, order.</a:t>
             </a:r>
             <a:endParaRPr lang="en-US" sz="1100" dirty="0"/>
           </a:p>
@@ -7798,57 +8040,18 @@
       </p:sp>
       <p:sp>
         <p:nvSpPr>
-          <p:cNvPr id="13" name="Text 10"/>
-          <p:cNvSpPr txBox="1"/>
-          <p:nvPr/>
-        </p:nvSpPr>
-        <p:spPr>
-          <a:xfrm>
-            <a:off x="10744200" y="2240280"/>
-            <a:ext cx="777240" cy="493776"/>
-          </a:xfrm>
-          <a:prstGeom prst="rect">
-            <a:avLst/>
-          </a:prstGeom>
-          <a:noFill/>
-          <a:ln/>
-        </p:spPr>
-        <p:txBody>
-          <a:bodyPr wrap="square" lIns="0" tIns="0" rIns="0" bIns="0" rtlCol="0" anchor="ctr"/>
-          <a:lstStyle/>
-          <a:p>
-            <a:pPr algn="r" indent="0" marL="0">
-              <a:buNone/>
-            </a:pPr>
-            <a:r>
-              <a:rPr lang="en-US" sz="1100" dirty="0">
-                <a:solidFill>
-                  <a:srgbClr val="A1A8B5"/>
-                </a:solidFill>
-                <a:latin typeface="Arial" pitchFamily="34" charset="0"/>
-                <a:ea typeface="Arial" pitchFamily="34" charset="-122"/>
-                <a:cs typeface="Arial" pitchFamily="34" charset="-120"/>
-              </a:rPr>
-              <a:t>31.6% win</a:t>
-            </a:r>
-            <a:endParaRPr lang="en-US" sz="1100" dirty="0"/>
-          </a:p>
-        </p:txBody>
-      </p:sp>
-      <p:sp>
-        <p:nvSpPr>
-          <p:cNvPr id="14" name="Shape 11"/>
+          <p:cNvPr id="13" name="Shape 11"/>
           <p:cNvSpPr/>
           <p:nvPr/>
         </p:nvSpPr>
         <p:spPr>
           <a:xfrm>
-            <a:off x="7269480" y="2807208"/>
-            <a:ext cx="4370832" cy="493776"/>
+            <a:off x="7571232" y="3931920"/>
+            <a:ext cx="4069080" cy="1371600"/>
           </a:xfrm>
           <a:prstGeom prst="roundRect">
             <a:avLst>
-              <a:gd name="adj" fmla="val 11111"/>
+              <a:gd name="adj" fmla="val 5333"/>
             </a:avLst>
           </a:prstGeom>
           <a:solidFill>
@@ -7864,14 +8067,14 @@
       </p:sp>
       <p:sp>
         <p:nvSpPr>
-          <p:cNvPr id="15" name="Text 12"/>
-          <p:cNvSpPr txBox="1"/>
-          <p:nvPr/>
-        </p:nvSpPr>
-        <p:spPr>
-          <a:xfrm>
-            <a:off x="7452360" y="2807208"/>
-            <a:ext cx="960120" cy="493776"/>
+          <p:cNvPr id="14" name="Text 12"/>
+          <p:cNvSpPr txBox="1"/>
+          <p:nvPr/>
+        </p:nvSpPr>
+        <p:spPr>
+          <a:xfrm>
+            <a:off x="7863840" y="4133088"/>
+            <a:ext cx="3483864" cy="219456"/>
           </a:xfrm>
           <a:prstGeom prst="rect">
             <a:avLst/>
@@ -7887,69 +8090,30 @@
               <a:buNone/>
             </a:pPr>
             <a:r>
-              <a:rPr lang="en-US" sz="1300" b="1" dirty="0">
-                <a:solidFill>
-                  <a:srgbClr val="FFFFFF"/>
-                </a:solidFill>
-                <a:latin typeface="Arial" pitchFamily="34" charset="0"/>
-                <a:ea typeface="Arial" pitchFamily="34" charset="-122"/>
-                <a:cs typeface="Arial" pitchFamily="34" charset="-120"/>
-              </a:rPr>
-              <a:t>Sep 1</a:t>
-            </a:r>
-            <a:endParaRPr lang="en-US" sz="1300" dirty="0"/>
-          </a:p>
-        </p:txBody>
-      </p:sp>
-      <p:sp>
-        <p:nvSpPr>
-          <p:cNvPr id="16" name="Text 13"/>
-          <p:cNvSpPr txBox="1"/>
-          <p:nvPr/>
-        </p:nvSpPr>
-        <p:spPr>
-          <a:xfrm>
-            <a:off x="8412480" y="2807208"/>
-            <a:ext cx="1325880" cy="493776"/>
-          </a:xfrm>
-          <a:prstGeom prst="rect">
-            <a:avLst/>
-          </a:prstGeom>
-          <a:noFill/>
-          <a:ln/>
-        </p:spPr>
-        <p:txBody>
-          <a:bodyPr wrap="square" lIns="0" tIns="0" rIns="0" bIns="0" rtlCol="0" anchor="ctr"/>
-          <a:lstStyle/>
-          <a:p>
-            <a:pPr algn="r" indent="0" marL="0">
-              <a:buNone/>
-            </a:pPr>
-            <a:r>
-              <a:rPr lang="en-US" sz="1300" b="1" dirty="0">
-                <a:solidFill>
-                  <a:srgbClr val="F0B429"/>
+              <a:rPr lang="en-US" sz="1000" spc="140" kern="0" dirty="0">
+                <a:solidFill>
+                  <a:srgbClr val="6B7686"/>
                 </a:solidFill>
                 <a:latin typeface="Courier New" pitchFamily="34" charset="0"/>
                 <a:ea typeface="Courier New" pitchFamily="34" charset="-122"/>
                 <a:cs typeface="Courier New" pitchFamily="34" charset="-120"/>
               </a:rPr>
-              <a:t>+$14,400</a:t>
-            </a:r>
-            <a:endParaRPr lang="en-US" sz="1300" dirty="0"/>
-          </a:p>
-        </p:txBody>
-      </p:sp>
-      <p:sp>
-        <p:nvSpPr>
-          <p:cNvPr id="17" name="Text 14"/>
-          <p:cNvSpPr txBox="1"/>
-          <p:nvPr/>
-        </p:nvSpPr>
-        <p:spPr>
-          <a:xfrm>
-            <a:off x="9829800" y="2807208"/>
-            <a:ext cx="914400" cy="493776"/>
+              <a:t>WHY IT MATTERS</a:t>
+            </a:r>
+            <a:endParaRPr lang="en-US" sz="1000" dirty="0"/>
+          </a:p>
+        </p:txBody>
+      </p:sp>
+      <p:sp>
+        <p:nvSpPr>
+          <p:cNvPr id="15" name="Text 13"/>
+          <p:cNvSpPr txBox="1"/>
+          <p:nvPr/>
+        </p:nvSpPr>
+        <p:spPr>
+          <a:xfrm>
+            <a:off x="7863840" y="4425696"/>
+            <a:ext cx="3483864" cy="384048"/>
           </a:xfrm>
           <a:prstGeom prst="rect">
             <a:avLst/>
@@ -7961,7 +8125,49 @@
           <a:bodyPr wrap="square" lIns="0" tIns="0" rIns="0" bIns="0" rtlCol="0" anchor="ctr"/>
           <a:lstStyle/>
           <a:p>
-            <a:pPr algn="r" indent="0" marL="0">
+            <a:pPr indent="0" marL="0">
+              <a:buNone/>
+            </a:pPr>
+            <a:r>
+              <a:rPr lang="en-US" sz="2000" b="1" dirty="0">
+                <a:solidFill>
+                  <a:srgbClr val="FFFFFF"/>
+                </a:solidFill>
+                <a:latin typeface="Arial" pitchFamily="34" charset="0"/>
+                <a:ea typeface="Arial" pitchFamily="34" charset="-122"/>
+                <a:cs typeface="Arial" pitchFamily="34" charset="-120"/>
+              </a:rPr>
+              <a:t>Nothing is implicit</a:t>
+            </a:r>
+            <a:endParaRPr lang="en-US" sz="2000" dirty="0"/>
+          </a:p>
+        </p:txBody>
+      </p:sp>
+      <p:sp>
+        <p:nvSpPr>
+          <p:cNvPr id="16" name="Text 14"/>
+          <p:cNvSpPr txBox="1"/>
+          <p:nvPr/>
+        </p:nvSpPr>
+        <p:spPr>
+          <a:xfrm>
+            <a:off x="7863840" y="4864608"/>
+            <a:ext cx="3483864" cy="274320"/>
+          </a:xfrm>
+          <a:prstGeom prst="rect">
+            <a:avLst/>
+          </a:prstGeom>
+          <a:noFill/>
+          <a:ln/>
+        </p:spPr>
+        <p:txBody>
+          <a:bodyPr wrap="square" lIns="0" tIns="0" rIns="0" bIns="0" rtlCol="0" anchor="t"/>
+          <a:lstStyle/>
+          <a:p>
+            <a:pPr indent="0" marL="0">
+              <a:lnSpc>
+                <a:spcPct val="120000"/>
+              </a:lnSpc>
               <a:buNone/>
             </a:pPr>
             <a:r>
@@ -7973,7 +8179,7 @@
                 <a:ea typeface="Arial" pitchFamily="34" charset="-122"/>
                 <a:cs typeface="Arial" pitchFamily="34" charset="-120"/>
               </a:rPr>
-              <a:t>9 closes</a:t>
+              <a:t>You can reconstruct every decision the agent made, and every one it declined to make.</a:t>
             </a:r>
             <a:endParaRPr lang="en-US" sz="1100" dirty="0"/>
           </a:p>
@@ -7981,14 +8187,14 @@
       </p:sp>
       <p:sp>
         <p:nvSpPr>
-          <p:cNvPr id="18" name="Text 15"/>
-          <p:cNvSpPr txBox="1"/>
-          <p:nvPr/>
-        </p:nvSpPr>
-        <p:spPr>
-          <a:xfrm>
-            <a:off x="10744200" y="2807208"/>
-            <a:ext cx="777240" cy="493776"/>
+          <p:cNvPr id="17" name="Text 15"/>
+          <p:cNvSpPr txBox="1"/>
+          <p:nvPr/>
+        </p:nvSpPr>
+        <p:spPr>
+          <a:xfrm>
+            <a:off x="548640" y="5532120"/>
+            <a:ext cx="11091672" cy="365760"/>
           </a:xfrm>
           <a:prstGeom prst="rect">
             <a:avLst/>
@@ -8000,11 +8206,11 @@
           <a:bodyPr wrap="square" lIns="0" tIns="0" rIns="0" bIns="0" rtlCol="0" anchor="ctr"/>
           <a:lstStyle/>
           <a:p>
-            <a:pPr algn="r" indent="0" marL="0">
-              <a:buNone/>
-            </a:pPr>
-            <a:r>
-              <a:rPr lang="en-US" sz="1100" dirty="0">
+            <a:pPr indent="0" marL="0">
+              <a:buNone/>
+            </a:pPr>
+            <a:r>
+              <a:rPr lang="en-US" sz="1300" dirty="0">
                 <a:solidFill>
                   <a:srgbClr val="A1A8B5"/>
                 </a:solidFill>
@@ -8012,381 +8218,7 @@
                 <a:ea typeface="Arial" pitchFamily="34" charset="-122"/>
                 <a:cs typeface="Arial" pitchFamily="34" charset="-120"/>
               </a:rPr>
-              <a:t>88.9% win</a:t>
-            </a:r>
-            <a:endParaRPr lang="en-US" sz="1100" dirty="0"/>
-          </a:p>
-        </p:txBody>
-      </p:sp>
-      <p:sp>
-        <p:nvSpPr>
-          <p:cNvPr id="19" name="Shape 16"/>
-          <p:cNvSpPr/>
-          <p:nvPr/>
-        </p:nvSpPr>
-        <p:spPr>
-          <a:xfrm>
-            <a:off x="7269480" y="3374136"/>
-            <a:ext cx="4370832" cy="493776"/>
-          </a:xfrm>
-          <a:prstGeom prst="roundRect">
-            <a:avLst>
-              <a:gd name="adj" fmla="val 11111"/>
-            </a:avLst>
-          </a:prstGeom>
-          <a:solidFill>
-            <a:srgbClr val="141922"/>
-          </a:solidFill>
-          <a:ln w="12700">
-            <a:solidFill>
-              <a:srgbClr val="232A38"/>
-            </a:solidFill>
-            <a:prstDash val="solid"/>
-          </a:ln>
-        </p:spPr>
-      </p:sp>
-      <p:sp>
-        <p:nvSpPr>
-          <p:cNvPr id="20" name="Text 17"/>
-          <p:cNvSpPr txBox="1"/>
-          <p:nvPr/>
-        </p:nvSpPr>
-        <p:spPr>
-          <a:xfrm>
-            <a:off x="7452360" y="3374136"/>
-            <a:ext cx="960120" cy="493776"/>
-          </a:xfrm>
-          <a:prstGeom prst="rect">
-            <a:avLst/>
-          </a:prstGeom>
-          <a:noFill/>
-          <a:ln/>
-        </p:spPr>
-        <p:txBody>
-          <a:bodyPr wrap="square" lIns="0" tIns="0" rIns="0" bIns="0" rtlCol="0" anchor="ctr"/>
-          <a:lstStyle/>
-          <a:p>
-            <a:pPr indent="0" marL="0">
-              <a:buNone/>
-            </a:pPr>
-            <a:r>
-              <a:rPr lang="en-US" sz="1300" b="1" dirty="0">
-                <a:solidFill>
-                  <a:srgbClr val="FFFFFF"/>
-                </a:solidFill>
-                <a:latin typeface="Arial" pitchFamily="34" charset="0"/>
-                <a:ea typeface="Arial" pitchFamily="34" charset="-122"/>
-                <a:cs typeface="Arial" pitchFamily="34" charset="-120"/>
-              </a:rPr>
-              <a:t>Sep 3</a:t>
-            </a:r>
-            <a:endParaRPr lang="en-US" sz="1300" dirty="0"/>
-          </a:p>
-        </p:txBody>
-      </p:sp>
-      <p:sp>
-        <p:nvSpPr>
-          <p:cNvPr id="21" name="Text 18"/>
-          <p:cNvSpPr txBox="1"/>
-          <p:nvPr/>
-        </p:nvSpPr>
-        <p:spPr>
-          <a:xfrm>
-            <a:off x="8412480" y="3374136"/>
-            <a:ext cx="1325880" cy="493776"/>
-          </a:xfrm>
-          <a:prstGeom prst="rect">
-            <a:avLst/>
-          </a:prstGeom>
-          <a:noFill/>
-          <a:ln/>
-        </p:spPr>
-        <p:txBody>
-          <a:bodyPr wrap="square" lIns="0" tIns="0" rIns="0" bIns="0" rtlCol="0" anchor="ctr"/>
-          <a:lstStyle/>
-          <a:p>
-            <a:pPr algn="r" indent="0" marL="0">
-              <a:buNone/>
-            </a:pPr>
-            <a:r>
-              <a:rPr lang="en-US" sz="1300" b="1" dirty="0">
-                <a:solidFill>
-                  <a:srgbClr val="F0B429"/>
-                </a:solidFill>
-                <a:latin typeface="Courier New" pitchFamily="34" charset="0"/>
-                <a:ea typeface="Courier New" pitchFamily="34" charset="-122"/>
-                <a:cs typeface="Courier New" pitchFamily="34" charset="-120"/>
-              </a:rPr>
-              <a:t>+$71,400</a:t>
-            </a:r>
-            <a:endParaRPr lang="en-US" sz="1300" dirty="0"/>
-          </a:p>
-        </p:txBody>
-      </p:sp>
-      <p:sp>
-        <p:nvSpPr>
-          <p:cNvPr id="22" name="Text 19"/>
-          <p:cNvSpPr txBox="1"/>
-          <p:nvPr/>
-        </p:nvSpPr>
-        <p:spPr>
-          <a:xfrm>
-            <a:off x="9829800" y="3374136"/>
-            <a:ext cx="914400" cy="493776"/>
-          </a:xfrm>
-          <a:prstGeom prst="rect">
-            <a:avLst/>
-          </a:prstGeom>
-          <a:noFill/>
-          <a:ln/>
-        </p:spPr>
-        <p:txBody>
-          <a:bodyPr wrap="square" lIns="0" tIns="0" rIns="0" bIns="0" rtlCol="0" anchor="ctr"/>
-          <a:lstStyle/>
-          <a:p>
-            <a:pPr algn="r" indent="0" marL="0">
-              <a:buNone/>
-            </a:pPr>
-            <a:r>
-              <a:rPr lang="en-US" sz="1100" dirty="0">
-                <a:solidFill>
-                  <a:srgbClr val="A1A8B5"/>
-                </a:solidFill>
-                <a:latin typeface="Arial" pitchFamily="34" charset="0"/>
-                <a:ea typeface="Arial" pitchFamily="34" charset="-122"/>
-                <a:cs typeface="Arial" pitchFamily="34" charset="-120"/>
-              </a:rPr>
-              <a:t>13 closes</a:t>
-            </a:r>
-            <a:endParaRPr lang="en-US" sz="1100" dirty="0"/>
-          </a:p>
-        </p:txBody>
-      </p:sp>
-      <p:sp>
-        <p:nvSpPr>
-          <p:cNvPr id="23" name="Text 20"/>
-          <p:cNvSpPr txBox="1"/>
-          <p:nvPr/>
-        </p:nvSpPr>
-        <p:spPr>
-          <a:xfrm>
-            <a:off x="10744200" y="3374136"/>
-            <a:ext cx="777240" cy="493776"/>
-          </a:xfrm>
-          <a:prstGeom prst="rect">
-            <a:avLst/>
-          </a:prstGeom>
-          <a:noFill/>
-          <a:ln/>
-        </p:spPr>
-        <p:txBody>
-          <a:bodyPr wrap="square" lIns="0" tIns="0" rIns="0" bIns="0" rtlCol="0" anchor="ctr"/>
-          <a:lstStyle/>
-          <a:p>
-            <a:pPr algn="r" indent="0" marL="0">
-              <a:buNone/>
-            </a:pPr>
-            <a:r>
-              <a:rPr lang="en-US" sz="1100" dirty="0">
-                <a:solidFill>
-                  <a:srgbClr val="A1A8B5"/>
-                </a:solidFill>
-                <a:latin typeface="Arial" pitchFamily="34" charset="0"/>
-                <a:ea typeface="Arial" pitchFamily="34" charset="-122"/>
-                <a:cs typeface="Arial" pitchFamily="34" charset="-120"/>
-              </a:rPr>
-              <a:t>76.9% win</a:t>
-            </a:r>
-            <a:endParaRPr lang="en-US" sz="1100" dirty="0"/>
-          </a:p>
-        </p:txBody>
-      </p:sp>
-      <p:sp>
-        <p:nvSpPr>
-          <p:cNvPr id="24" name="Shape 21"/>
-          <p:cNvSpPr/>
-          <p:nvPr/>
-        </p:nvSpPr>
-        <p:spPr>
-          <a:xfrm>
-            <a:off x="7269480" y="4041648"/>
-            <a:ext cx="4370832" cy="896112"/>
-          </a:xfrm>
-          <a:prstGeom prst="roundRect">
-            <a:avLst>
-              <a:gd name="adj" fmla="val 8163"/>
-            </a:avLst>
-          </a:prstGeom>
-          <a:solidFill>
-            <a:srgbClr val="141922"/>
-          </a:solidFill>
-          <a:ln w="12700">
-            <a:solidFill>
-              <a:srgbClr val="232A38"/>
-            </a:solidFill>
-            <a:prstDash val="solid"/>
-          </a:ln>
-        </p:spPr>
-      </p:sp>
-      <p:sp>
-        <p:nvSpPr>
-          <p:cNvPr id="25" name="Text 22"/>
-          <p:cNvSpPr txBox="1"/>
-          <p:nvPr/>
-        </p:nvSpPr>
-        <p:spPr>
-          <a:xfrm>
-            <a:off x="7562088" y="4242816"/>
-            <a:ext cx="3785616" cy="219456"/>
-          </a:xfrm>
-          <a:prstGeom prst="rect">
-            <a:avLst/>
-          </a:prstGeom>
-          <a:noFill/>
-          <a:ln/>
-        </p:spPr>
-        <p:txBody>
-          <a:bodyPr wrap="square" lIns="0" tIns="0" rIns="0" bIns="0" rtlCol="0" anchor="ctr"/>
-          <a:lstStyle/>
-          <a:p>
-            <a:pPr indent="0" marL="0">
-              <a:buNone/>
-            </a:pPr>
-            <a:r>
-              <a:rPr lang="en-US" sz="1000" spc="140" kern="0" dirty="0">
-                <a:solidFill>
-                  <a:srgbClr val="6B7686"/>
-                </a:solidFill>
-                <a:latin typeface="Courier New" pitchFamily="34" charset="0"/>
-                <a:ea typeface="Courier New" pitchFamily="34" charset="-122"/>
-                <a:cs typeface="Courier New" pitchFamily="34" charset="-120"/>
-              </a:rPr>
-              <a:t>NET, LIVE</a:t>
-            </a:r>
-            <a:endParaRPr lang="en-US" sz="1000" dirty="0"/>
-          </a:p>
-        </p:txBody>
-      </p:sp>
-      <p:sp>
-        <p:nvSpPr>
-          <p:cNvPr id="26" name="Text 23"/>
-          <p:cNvSpPr txBox="1"/>
-          <p:nvPr/>
-        </p:nvSpPr>
-        <p:spPr>
-          <a:xfrm>
-            <a:off x="7562088" y="4535424"/>
-            <a:ext cx="3785616" cy="384048"/>
-          </a:xfrm>
-          <a:prstGeom prst="rect">
-            <a:avLst/>
-          </a:prstGeom>
-          <a:noFill/>
-          <a:ln/>
-        </p:spPr>
-        <p:txBody>
-          <a:bodyPr wrap="square" lIns="0" tIns="0" rIns="0" bIns="0" rtlCol="0" anchor="ctr"/>
-          <a:lstStyle/>
-          <a:p>
-            <a:pPr indent="0" marL="0">
-              <a:buNone/>
-            </a:pPr>
-            <a:r>
-              <a:rPr lang="en-US" sz="2100" b="1" dirty="0">
-                <a:solidFill>
-                  <a:srgbClr val="F0B429"/>
-                </a:solidFill>
-                <a:latin typeface="Arial" pitchFamily="34" charset="0"/>
-                <a:ea typeface="Arial" pitchFamily="34" charset="-122"/>
-                <a:cs typeface="Arial" pitchFamily="34" charset="-120"/>
-              </a:rPr>
-              <a:t>+83.3%  ·  $183,298</a:t>
-            </a:r>
-            <a:endParaRPr lang="en-US" sz="2100" dirty="0"/>
-          </a:p>
-        </p:txBody>
-      </p:sp>
-      <p:sp>
-        <p:nvSpPr>
-          <p:cNvPr id="27" name="Shape 24"/>
-          <p:cNvSpPr/>
-          <p:nvPr/>
-        </p:nvSpPr>
-        <p:spPr>
-          <a:xfrm>
-            <a:off x="548640" y="5138928"/>
-            <a:ext cx="11091672" cy="960120"/>
-          </a:xfrm>
-          <a:prstGeom prst="roundRect">
-            <a:avLst>
-              <a:gd name="adj" fmla="val 7619"/>
-            </a:avLst>
-          </a:prstGeom>
-          <a:solidFill>
-            <a:srgbClr val="141922"/>
-          </a:solidFill>
-          <a:ln w="12700">
-            <a:solidFill>
-              <a:srgbClr val="E5484D"/>
-            </a:solidFill>
-            <a:prstDash val="solid"/>
-          </a:ln>
-        </p:spPr>
-      </p:sp>
-      <p:sp>
-        <p:nvSpPr>
-          <p:cNvPr id="28" name="Text 25"/>
-          <p:cNvSpPr txBox="1"/>
-          <p:nvPr/>
-        </p:nvSpPr>
-        <p:spPr>
-          <a:xfrm>
-            <a:off x="822960" y="5138928"/>
-            <a:ext cx="10515600" cy="960120"/>
-          </a:xfrm>
-          <a:prstGeom prst="rect">
-            <a:avLst/>
-          </a:prstGeom>
-          <a:noFill/>
-          <a:ln/>
-        </p:spPr>
-        <p:txBody>
-          <a:bodyPr wrap="square" lIns="0" tIns="0" rIns="0" bIns="0" rtlCol="0" anchor="ctr"/>
-          <a:lstStyle/>
-          <a:p>
-            <a:pPr indent="0" marL="0">
-              <a:lnSpc>
-                <a:spcPct val="125000"/>
-              </a:lnSpc>
-              <a:buNone/>
-            </a:pPr>
-            <a:r>
-              <a:rPr lang="en-US" sz="1300" b="1" dirty="0">
-                <a:solidFill>
-                  <a:srgbClr val="FFFFFF"/>
-                </a:solidFill>
-                <a:latin typeface="Arial" pitchFamily="34" charset="0"/>
-                <a:ea typeface="Arial" pitchFamily="34" charset="-122"/>
-                <a:cs typeface="Arial" pitchFamily="34" charset="-120"/>
-              </a:rPr>
-              <a:t>We won't call that edge.  </a:t>
-            </a:r>
-            <a:pPr indent="0" marL="0">
-              <a:lnSpc>
-                <a:spcPct val="125000"/>
-              </a:lnSpc>
-              <a:buNone/>
-            </a:pPr>
-            <a:r>
-              <a:rPr lang="en-US" sz="1300" dirty="0">
-                <a:solidFill>
-                  <a:srgbClr val="A1A8B5"/>
-                </a:solidFill>
-                <a:latin typeface="Arial" pitchFamily="34" charset="0"/>
-                <a:ea typeface="Arial" pitchFamily="34" charset="-122"/>
-                <a:cs typeface="Arial" pitchFamily="34" charset="-120"/>
-              </a:rPr>
-              <a:t>Our own data says this signal has none, one session supplies most of the gain, and the same distribution handed us −10.7% on day one. Four sessions is not a sample — it is an anecdote with a good outcome.</a:t>
+              <a:t>logs/ in the repo carries 14 journal records across 2 session files - clone it and check any decision against the record.</a:t>
             </a:r>
             <a:endParaRPr lang="en-US" sz="1300" dirty="0"/>
           </a:p>
@@ -8457,7 +8289,7 @@
                 <a:ea typeface="Courier New" pitchFamily="34" charset="-122"/>
                 <a:cs typeface="Courier New" pitchFamily="34" charset="-120"/>
               </a:rPr>
-              <a:t>What we are actually claiming</a:t>
+              <a:t>Every trade provable. Every loss capped.</a:t>
             </a:r>
             <a:endParaRPr lang="en-US" sz="1100" dirty="0"/>
           </a:p>
@@ -8496,7 +8328,7 @@
                 <a:ea typeface="Courier New" pitchFamily="34" charset="-122"/>
                 <a:cs typeface="Courier New" pitchFamily="34" charset="-120"/>
               </a:rPr>
-              <a:t>github.com/KIBA0993/defined-risk-0dte-agent</a:t>
+              <a:t>github.com/KIBA0993/Alpaca-Hackathon</a:t>
             </a:r>
             <a:endParaRPr lang="en-US" sz="900" dirty="0"/>
           </a:p>
@@ -8538,7 +8370,7 @@
                 <a:ea typeface="Arial" pitchFamily="34" charset="-122"/>
                 <a:cs typeface="Arial" pitchFamily="34" charset="-120"/>
               </a:rPr>
-              <a:t>The equity curve is just</a:t>
+              <a:t>A fresh $100,000 account,</a:t>
             </a:r>
             <a:endParaRPr lang="en-US" sz="4600" dirty="0"/>
           </a:p>
@@ -8558,7 +8390,7 @@
                 <a:ea typeface="Arial" pitchFamily="34" charset="-122"/>
                 <a:cs typeface="Arial" pitchFamily="34" charset="-120"/>
               </a:rPr>
-              <a:t>what happened this week.</a:t>
+              <a:t>3 sessions, +79.1%.</a:t>
             </a:r>
             <a:endParaRPr lang="en-US" sz="4600" dirty="0"/>
           </a:p>
@@ -8636,7 +8468,7 @@
                 <a:ea typeface="Arial" pitchFamily="34" charset="-122"/>
                 <a:cs typeface="Arial" pitchFamily="34" charset="-120"/>
               </a:rPr>
-              <a:t>Max loss fixed by the instrument</a:t>
+              <a:t>Max loss capped by the instrument</a:t>
             </a:r>
             <a:pPr indent="0" marL="0">
               <a:buNone/>
@@ -8728,7 +8560,7 @@
                 <a:ea typeface="Arial" pitchFamily="34" charset="-122"/>
                 <a:cs typeface="Arial" pitchFamily="34" charset="-120"/>
               </a:rPr>
-              <a:t>An AI that is only allowed to say no</a:t>
+              <a:t>An AI that can only remove risk</a:t>
             </a:r>
             <a:pPr indent="0" marL="0">
               <a:buNone/>
@@ -8742,7 +8574,7 @@
                 <a:ea typeface="Arial" pitchFamily="34" charset="-122"/>
                 <a:cs typeface="Arial" pitchFamily="34" charset="-120"/>
               </a:rPr>
-              <a:t>   scoped to what we could actually measure</a:t>
+              <a:t>   structurally unable to add a trade</a:t>
             </a:r>
             <a:endParaRPr lang="en-US" sz="1500" dirty="0"/>
           </a:p>
@@ -8820,7 +8652,7 @@
                 <a:ea typeface="Arial" pitchFamily="34" charset="-122"/>
                 <a:cs typeface="Arial" pitchFamily="34" charset="-120"/>
               </a:rPr>
-              <a:t>Gates that hold when the P&amp;L is ugly</a:t>
+              <a:t>Every order through the Alpaca CLI</a:t>
             </a:r>
             <a:pPr indent="0" marL="0">
               <a:buNone/>
@@ -8834,7 +8666,7 @@
                 <a:ea typeface="Arial" pitchFamily="34" charset="-122"/>
                 <a:cs typeface="Arial" pitchFamily="34" charset="-120"/>
               </a:rPr>
-              <a:t>   they never depend on the signal being right</a:t>
+              <a:t>   P&amp;L is the real broker fill, not a quote</a:t>
             </a:r>
             <a:endParaRPr lang="en-US" sz="1500" dirty="0"/>
           </a:p>
@@ -8912,7 +8744,7 @@
                 <a:ea typeface="Arial" pitchFamily="34" charset="-122"/>
                 <a:cs typeface="Arial" pitchFamily="34" charset="-120"/>
               </a:rPr>
-              <a:t>A journal of every trade it refused</a:t>
+              <a:t>Every decision journaled</a:t>
             </a:r>
             <a:pPr indent="0" marL="0">
               <a:buNone/>
@@ -8926,7 +8758,7 @@
                 <a:ea typeface="Arial" pitchFamily="34" charset="-122"/>
                 <a:cs typeface="Arial" pitchFamily="34" charset="-120"/>
               </a:rPr>
-              <a:t>   the audit trail is the deliverable</a:t>
+              <a:t>   including the ones it refused to take</a:t>
             </a:r>
             <a:endParaRPr lang="en-US" sz="1500" dirty="0"/>
           </a:p>
@@ -8941,7 +8773,7 @@
         <p:spPr>
           <a:xfrm>
             <a:off x="548640" y="6263640"/>
-            <a:ext cx="6400800" cy="274320"/>
+            <a:ext cx="7772400" cy="274320"/>
           </a:xfrm>
           <a:prstGeom prst="rect">
             <a:avLst/>
@@ -8965,7 +8797,7 @@
                 <a:ea typeface="Courier New" pitchFamily="34" charset="-122"/>
                 <a:cs typeface="Courier New" pitchFamily="34" charset="-120"/>
               </a:rPr>
-              <a:t>Paper trading only. Hypothetical results; not investment advice.</a:t>
+              <a:t>Alpaca paper account PA38HG4D9653  ·  paper trading only. Hypothetical results; not investment advice.</a:t>
             </a:r>
             <a:endParaRPr lang="en-US" sz="900" dirty="0"/>
           </a:p>

--- a/assets/deck.pptx
+++ b/assets/deck.pptx
@@ -13,9 +13,10 @@
     <p:sldId id="261" r:id="rId7"/>
     <p:sldId id="262" r:id="rId8"/>
     <p:sldId id="263" r:id="rId9"/>
+    <p:sldId id="264" r:id="rId10"/>
   </p:sldIdLst>
   <p:notesMasterIdLst>
-    <p:notesMasterId r:id="rId10"/>
+    <p:notesMasterId r:id="rId11"/>
   </p:notesMasterIdLst>
   <p:sldSz cx="12192000" cy="6858000"/>
   <p:notesSz cx="6858000" cy="12192000"/>
@@ -1420,6 +1421,94 @@
             <a:fld id="{F7021451-1387-4CA6-816F-3879F97B5CBC}" type="slidenum">
               <a:rPr lang="en-US"/>
               <a:t>8</a:t>
+            </a:fld>
+            <a:endParaRPr lang="en-US"/>
+          </a:p>
+        </p:txBody>
+      </p:sp>
+    </p:spTree>
+    <p:extLst>
+      <p:ext uri="{BB962C8B-B14F-4D97-AF65-F5344CB8AC3E}">
+        <p14:creationId xmlns:p14="http://schemas.microsoft.com/office/powerpoint/2010/main" val="1024086991"/>
+      </p:ext>
+    </p:extLst>
+  </p:cSld>
+  <p:clrMapOvr>
+    <a:masterClrMapping/>
+  </p:clrMapOvr>
+</p:notes>
+</file>
+
+<file path=ppt/notesSlides/notesSlide9.xml><?xml version="1.0" encoding="utf-8"?>
+<p:notes xmlns:a="http://schemas.openxmlformats.org/drawingml/2006/main" xmlns:r="http://schemas.openxmlformats.org/officeDocument/2006/relationships" xmlns:p="http://schemas.openxmlformats.org/presentationml/2006/main">
+  <p:cSld>
+    <p:spTree>
+      <p:nvGrpSpPr>
+        <p:cNvPr id="1" name=""/>
+        <p:cNvGrpSpPr/>
+        <p:nvPr/>
+      </p:nvGrpSpPr>
+      <p:grpSpPr>
+        <a:xfrm>
+          <a:off x="0" y="0"/>
+          <a:ext cx="0" cy="0"/>
+          <a:chOff x="0" y="0"/>
+          <a:chExt cx="0" cy="0"/>
+        </a:xfrm>
+      </p:grpSpPr>
+      <p:sp>
+        <p:nvSpPr>
+          <p:cNvPr id="2" name="Slide Image Placeholder 1"/>
+          <p:cNvSpPr>
+            <a:spLocks noGrp="1" noRot="1" noChangeAspect="1"/>
+          </p:cNvSpPr>
+          <p:nvPr>
+            <p:ph type="sldImg"/>
+          </p:nvPr>
+        </p:nvSpPr>
+        <p:spPr/>
+      </p:sp>
+      <p:sp>
+        <p:nvSpPr>
+          <p:cNvPr id="3" name="Notes Placeholder 2"/>
+          <p:cNvSpPr>
+            <a:spLocks noGrp="1"/>
+          </p:cNvSpPr>
+          <p:nvPr>
+            <p:ph type="body" idx="1"/>
+          </p:nvPr>
+        </p:nvSpPr>
+        <p:spPr/>
+        <p:txBody>
+          <a:bodyPr/>
+          <a:lstStyle/>
+          <a:p>
+            <a:r>
+              <a:rPr lang="en-US" dirty="0"/>
+              <a:t>This slide is the hackathon's required one-page write-up. The same content ships as docs/ONE_PAGER.md and docs/ONE_PAGER.pdf in the repo.</a:t>
+            </a:r>
+            <a:endParaRPr lang="en-US" dirty="0"/>
+          </a:p>
+        </p:txBody>
+      </p:sp>
+      <p:sp>
+        <p:nvSpPr>
+          <p:cNvPr id="4" name="Slide Number Placeholder 3"/>
+          <p:cNvSpPr>
+            <a:spLocks noGrp="1"/>
+          </p:cNvSpPr>
+          <p:nvPr>
+            <p:ph type="sldNum" sz="quarter" idx="10"/>
+          </p:nvPr>
+        </p:nvSpPr>
+        <p:spPr/>
+        <p:txBody>
+          <a:bodyPr/>
+          <a:lstStyle/>
+          <a:p>
+            <a:fld id="{F7021451-1387-4CA6-816F-3879F97B5CBC}" type="slidenum">
+              <a:rPr lang="en-US"/>
+              <a:t>9</a:t>
             </a:fld>
             <a:endParaRPr lang="en-US"/>
           </a:p>
@@ -8811,6 +8900,1003 @@
 </p:sld>
 </file>
 
+<file path=ppt/slides/slide9.xml><?xml version="1.0" encoding="utf-8"?>
+<p:sld xmlns:a="http://schemas.openxmlformats.org/drawingml/2006/main" xmlns:r="http://schemas.openxmlformats.org/officeDocument/2006/relationships" xmlns:p="http://schemas.openxmlformats.org/presentationml/2006/main">
+  <p:cSld name="Slide 9">
+    <p:bg>
+      <p:bgPr>
+        <a:solidFill>
+          <a:srgbClr val="0B0E14"/>
+        </a:solidFill>
+      </p:bgPr>
+    </p:bg>
+    <p:spTree>
+      <p:nvGrpSpPr>
+        <p:cNvPr id="1" name=""/>
+        <p:cNvGrpSpPr/>
+        <p:nvPr/>
+      </p:nvGrpSpPr>
+      <p:grpSpPr>
+        <a:xfrm>
+          <a:off x="0" y="0"/>
+          <a:ext cx="0" cy="0"/>
+          <a:chOff x="0" y="0"/>
+          <a:chExt cx="0" cy="0"/>
+        </a:xfrm>
+      </p:grpSpPr>
+      <p:sp>
+        <p:nvSpPr>
+          <p:cNvPr id="2" name="Text 0"/>
+          <p:cNvSpPr txBox="1"/>
+          <p:nvPr/>
+        </p:nvSpPr>
+        <p:spPr>
+          <a:xfrm>
+            <a:off x="548640" y="384048"/>
+            <a:ext cx="7315200" cy="274320"/>
+          </a:xfrm>
+          <a:prstGeom prst="rect">
+            <a:avLst/>
+          </a:prstGeom>
+          <a:noFill/>
+          <a:ln/>
+        </p:spPr>
+        <p:txBody>
+          <a:bodyPr wrap="square" rtlCol="0" anchor="ctr"/>
+          <a:lstStyle/>
+          <a:p>
+            <a:pPr indent="0" marL="0">
+              <a:buNone/>
+            </a:pPr>
+            <a:r>
+              <a:rPr lang="en-US" sz="1100" spc="200" kern="0" dirty="0">
+                <a:solidFill>
+                  <a:srgbClr val="6B7686"/>
+                </a:solidFill>
+                <a:latin typeface="Courier New" pitchFamily="34" charset="0"/>
+                <a:ea typeface="Courier New" pitchFamily="34" charset="-122"/>
+                <a:cs typeface="Courier New" pitchFamily="34" charset="-120"/>
+              </a:rPr>
+              <a:t>Required one-page write-up</a:t>
+            </a:r>
+            <a:endParaRPr lang="en-US" sz="1100" dirty="0"/>
+          </a:p>
+        </p:txBody>
+      </p:sp>
+      <p:sp>
+        <p:nvSpPr>
+          <p:cNvPr id="3" name="Text 1"/>
+          <p:cNvSpPr txBox="1"/>
+          <p:nvPr/>
+        </p:nvSpPr>
+        <p:spPr>
+          <a:xfrm>
+            <a:off x="7315200" y="6263640"/>
+            <a:ext cx="4325112" cy="274320"/>
+          </a:xfrm>
+          <a:prstGeom prst="rect">
+            <a:avLst/>
+          </a:prstGeom>
+          <a:noFill/>
+          <a:ln/>
+        </p:spPr>
+        <p:txBody>
+          <a:bodyPr wrap="square" rtlCol="0" anchor="ctr"/>
+          <a:lstStyle/>
+          <a:p>
+            <a:pPr algn="r" indent="0" marL="0">
+              <a:buNone/>
+            </a:pPr>
+            <a:r>
+              <a:rPr lang="en-US" sz="900" dirty="0">
+                <a:solidFill>
+                  <a:srgbClr val="6B7686"/>
+                </a:solidFill>
+                <a:latin typeface="Courier New" pitchFamily="34" charset="0"/>
+                <a:ea typeface="Courier New" pitchFamily="34" charset="-122"/>
+                <a:cs typeface="Courier New" pitchFamily="34" charset="-120"/>
+              </a:rPr>
+              <a:t>github.com/KIBA0993/Alpaca-Hackathon</a:t>
+            </a:r>
+            <a:endParaRPr lang="en-US" sz="900" dirty="0"/>
+          </a:p>
+        </p:txBody>
+      </p:sp>
+      <p:sp>
+        <p:nvSpPr>
+          <p:cNvPr id="4" name="Text 2"/>
+          <p:cNvSpPr txBox="1"/>
+          <p:nvPr/>
+        </p:nvSpPr>
+        <p:spPr>
+          <a:xfrm>
+            <a:off x="548640" y="868680"/>
+            <a:ext cx="11064240" cy="777240"/>
+          </a:xfrm>
+          <a:prstGeom prst="rect">
+            <a:avLst/>
+          </a:prstGeom>
+          <a:noFill/>
+          <a:ln/>
+        </p:spPr>
+        <p:txBody>
+          <a:bodyPr wrap="square" lIns="0" tIns="0" rIns="0" bIns="0" rtlCol="0" anchor="ctr"/>
+          <a:lstStyle/>
+          <a:p>
+            <a:pPr indent="0" marL="0">
+              <a:buNone/>
+            </a:pPr>
+            <a:r>
+              <a:rPr lang="en-US" sz="3400" b="1" dirty="0">
+                <a:solidFill>
+                  <a:srgbClr val="FFFFFF"/>
+                </a:solidFill>
+                <a:latin typeface="Arial" pitchFamily="34" charset="0"/>
+                <a:ea typeface="Arial" pitchFamily="34" charset="-122"/>
+                <a:cs typeface="Arial" pitchFamily="34" charset="-120"/>
+              </a:rPr>
+              <a:t>AI logic  ·  Risk gates  ·  Alpaca infrastructure</a:t>
+            </a:r>
+            <a:endParaRPr lang="en-US" sz="3400" dirty="0"/>
+          </a:p>
+        </p:txBody>
+      </p:sp>
+      <p:sp>
+        <p:nvSpPr>
+          <p:cNvPr id="5" name="Shape 3"/>
+          <p:cNvSpPr/>
+          <p:nvPr/>
+        </p:nvSpPr>
+        <p:spPr>
+          <a:xfrm>
+            <a:off x="548640" y="1664208"/>
+            <a:ext cx="11091672" cy="548640"/>
+          </a:xfrm>
+          <a:prstGeom prst="roundRect">
+            <a:avLst>
+              <a:gd name="adj" fmla="val 13333"/>
+            </a:avLst>
+          </a:prstGeom>
+          <a:solidFill>
+            <a:srgbClr val="141922"/>
+          </a:solidFill>
+          <a:ln w="12700">
+            <a:solidFill>
+              <a:srgbClr val="F0B429"/>
+            </a:solidFill>
+            <a:prstDash val="solid"/>
+          </a:ln>
+        </p:spPr>
+      </p:sp>
+      <p:sp>
+        <p:nvSpPr>
+          <p:cNvPr id="6" name="Text 4"/>
+          <p:cNvSpPr txBox="1"/>
+          <p:nvPr/>
+        </p:nvSpPr>
+        <p:spPr>
+          <a:xfrm>
+            <a:off x="822960" y="1664208"/>
+            <a:ext cx="10515600" cy="548640"/>
+          </a:xfrm>
+          <a:prstGeom prst="rect">
+            <a:avLst/>
+          </a:prstGeom>
+          <a:noFill/>
+          <a:ln/>
+        </p:spPr>
+        <p:txBody>
+          <a:bodyPr wrap="square" lIns="0" tIns="0" rIns="0" bIns="0" rtlCol="0" anchor="ctr"/>
+          <a:lstStyle/>
+          <a:p>
+            <a:pPr indent="0" marL="0">
+              <a:buNone/>
+            </a:pPr>
+            <a:r>
+              <a:rPr lang="en-US" sz="1200" dirty="0">
+                <a:solidFill>
+                  <a:srgbClr val="A1A8B5"/>
+                </a:solidFill>
+                <a:latin typeface="Arial" pitchFamily="34" charset="0"/>
+                <a:ea typeface="Arial" pitchFamily="34" charset="-122"/>
+                <a:cs typeface="Arial" pitchFamily="34" charset="-120"/>
+              </a:rPr>
+              <a:t>Alpaca paper PA38HG4D9653  ·  single-leg long 0DTE on SPY / QQQ / IWM  ·  </a:t>
+            </a:r>
+            <a:pPr indent="0" marL="0">
+              <a:buNone/>
+            </a:pPr>
+            <a:r>
+              <a:rPr lang="en-US" sz="1200" b="1" dirty="0">
+                <a:solidFill>
+                  <a:srgbClr val="FFFFFF"/>
+                </a:solidFill>
+                <a:latin typeface="Arial" pitchFamily="34" charset="0"/>
+                <a:ea typeface="Arial" pitchFamily="34" charset="-122"/>
+                <a:cs typeface="Arial" pitchFamily="34" charset="-120"/>
+              </a:rPr>
+              <a:t>$100,000 → $179,087 (+79.1%) across 3 sessions, 34 entries / 43 exits</a:t>
+            </a:r>
+            <a:endParaRPr lang="en-US" sz="1200" dirty="0"/>
+          </a:p>
+        </p:txBody>
+      </p:sp>
+      <p:sp>
+        <p:nvSpPr>
+          <p:cNvPr id="7" name="Shape 5"/>
+          <p:cNvSpPr/>
+          <p:nvPr/>
+        </p:nvSpPr>
+        <p:spPr>
+          <a:xfrm>
+            <a:off x="548640" y="2395728"/>
+            <a:ext cx="3538728" cy="3703320"/>
+          </a:xfrm>
+          <a:prstGeom prst="roundRect">
+            <a:avLst>
+              <a:gd name="adj" fmla="val 2067"/>
+            </a:avLst>
+          </a:prstGeom>
+          <a:solidFill>
+            <a:srgbClr val="141922"/>
+          </a:solidFill>
+          <a:ln w="12700">
+            <a:solidFill>
+              <a:srgbClr val="232A38"/>
+            </a:solidFill>
+            <a:prstDash val="solid"/>
+          </a:ln>
+        </p:spPr>
+      </p:sp>
+      <p:sp>
+        <p:nvSpPr>
+          <p:cNvPr id="8" name="Text 6"/>
+          <p:cNvSpPr txBox="1"/>
+          <p:nvPr/>
+        </p:nvSpPr>
+        <p:spPr>
+          <a:xfrm>
+            <a:off x="804672" y="2578608"/>
+            <a:ext cx="3026664" cy="274320"/>
+          </a:xfrm>
+          <a:prstGeom prst="rect">
+            <a:avLst/>
+          </a:prstGeom>
+          <a:noFill/>
+          <a:ln/>
+        </p:spPr>
+        <p:txBody>
+          <a:bodyPr wrap="square" lIns="0" tIns="0" rIns="0" bIns="0" rtlCol="0" anchor="ctr"/>
+          <a:lstStyle/>
+          <a:p>
+            <a:pPr indent="0" marL="0">
+              <a:buNone/>
+            </a:pPr>
+            <a:r>
+              <a:rPr lang="en-US" sz="1500" b="1" dirty="0">
+                <a:solidFill>
+                  <a:srgbClr val="F0B429"/>
+                </a:solidFill>
+                <a:latin typeface="Arial" pitchFamily="34" charset="0"/>
+                <a:ea typeface="Arial" pitchFamily="34" charset="-122"/>
+                <a:cs typeface="Arial" pitchFamily="34" charset="-120"/>
+              </a:rPr>
+              <a:t>1 · AI logic</a:t>
+            </a:r>
+            <a:endParaRPr lang="en-US" sz="1500" dirty="0"/>
+          </a:p>
+        </p:txBody>
+      </p:sp>
+      <p:sp>
+        <p:nvSpPr>
+          <p:cNvPr id="9" name="Text 7"/>
+          <p:cNvSpPr txBox="1"/>
+          <p:nvPr/>
+        </p:nvSpPr>
+        <p:spPr>
+          <a:xfrm>
+            <a:off x="804672" y="2962656"/>
+            <a:ext cx="3026664" cy="2953512"/>
+          </a:xfrm>
+          <a:prstGeom prst="rect">
+            <a:avLst/>
+          </a:prstGeom>
+          <a:noFill/>
+          <a:ln/>
+        </p:spPr>
+        <p:txBody>
+          <a:bodyPr wrap="square" lIns="0" tIns="0" rIns="0" bIns="0" rtlCol="0" anchor="t"/>
+          <a:lstStyle/>
+          <a:p>
+            <a:pPr marL="342900" indent="-342900">
+              <a:lnSpc>
+                <a:spcPct val="114000"/>
+              </a:lnSpc>
+              <a:spcAft>
+                <a:spcPts val="400"/>
+              </a:spcAft>
+              <a:buSzPct val="100000"/>
+              <a:buChar char="•"/>
+            </a:pPr>
+            <a:r>
+              <a:rPr lang="en-US" sz="950" dirty="0">
+                <a:solidFill>
+                  <a:srgbClr val="A1A8B5"/>
+                </a:solidFill>
+                <a:latin typeface="Arial" pitchFamily="34" charset="0"/>
+                <a:ea typeface="Arial" pitchFamily="34" charset="-122"/>
+                <a:cs typeface="Arial" pitchFamily="34" charset="-120"/>
+              </a:rPr>
+              <a:t>Scorer reduces Alpaca 5m bars to one number: VWAP position, opening-range break, RSI, EMA stack, relative volume - plus a proposed direction.</a:t>
+            </a:r>
+            <a:endParaRPr lang="en-US" sz="950" dirty="0"/>
+          </a:p>
+          <a:p>
+            <a:pPr marL="342900" indent="-342900">
+              <a:lnSpc>
+                <a:spcPct val="114000"/>
+              </a:lnSpc>
+              <a:spcAft>
+                <a:spcPts val="400"/>
+              </a:spcAft>
+              <a:buSzPct val="100000"/>
+              <a:buChar char="•"/>
+            </a:pPr>
+            <a:r>
+              <a:rPr lang="en-US" sz="950" dirty="0">
+                <a:solidFill>
+                  <a:srgbClr val="A1A8B5"/>
+                </a:solidFill>
+                <a:latin typeface="Arial" pitchFamily="34" charset="0"/>
+                <a:ea typeface="Arial" pitchFamily="34" charset="-122"/>
+                <a:cs typeface="Arial" pitchFamily="34" charset="-120"/>
+              </a:rPr>
+              <a:t>Half-opening-range noise band: is the break larger than the symbol's own morning noise?</a:t>
+            </a:r>
+            <a:endParaRPr lang="en-US" sz="950" dirty="0"/>
+          </a:p>
+          <a:p>
+            <a:pPr marL="342900" indent="-342900">
+              <a:lnSpc>
+                <a:spcPct val="114000"/>
+              </a:lnSpc>
+              <a:spcAft>
+                <a:spcPts val="400"/>
+              </a:spcAft>
+              <a:buSzPct val="100000"/>
+              <a:buChar char="•"/>
+            </a:pPr>
+            <a:r>
+              <a:rPr lang="en-US" sz="950" dirty="0">
+                <a:solidFill>
+                  <a:srgbClr val="A1A8B5"/>
+                </a:solidFill>
+                <a:latin typeface="Arial" pitchFamily="34" charset="0"/>
+                <a:ea typeface="Arial" pitchFamily="34" charset="-122"/>
+                <a:cs typeface="Arial" pitchFamily="34" charset="-120"/>
+              </a:rPr>
+              <a:t>Leader breadth: 5 of 8 mega-caps above their 20-day average as of the last completed session. Only ever removes the opposed side.</a:t>
+            </a:r>
+            <a:endParaRPr lang="en-US" sz="950" dirty="0"/>
+          </a:p>
+          <a:p>
+            <a:pPr marL="342900" indent="-342900">
+              <a:lnSpc>
+                <a:spcPct val="114000"/>
+              </a:lnSpc>
+              <a:spcAft>
+                <a:spcPts val="400"/>
+              </a:spcAft>
+              <a:buSzPct val="100000"/>
+              <a:buChar char="•"/>
+            </a:pPr>
+            <a:r>
+              <a:rPr lang="en-US" sz="950" dirty="0">
+                <a:solidFill>
+                  <a:srgbClr val="A1A8B5"/>
+                </a:solidFill>
+                <a:latin typeface="Arial" pitchFamily="34" charset="0"/>
+                <a:ea typeface="Arial" pitchFamily="34" charset="-122"/>
+                <a:cs typeface="Arial" pitchFamily="34" charset="-120"/>
+              </a:rPr>
+              <a:t>A Claude layer argues bull and bear over the scored facts and returns strict JSON - and can only turn a go into a no-go.</a:t>
+            </a:r>
+            <a:endParaRPr lang="en-US" sz="950" dirty="0"/>
+          </a:p>
+          <a:p>
+            <a:pPr marL="342900" indent="-342900">
+              <a:lnSpc>
+                <a:spcPct val="114000"/>
+              </a:lnSpc>
+              <a:spcAft>
+                <a:spcPts val="400"/>
+              </a:spcAft>
+              <a:buSzPct val="100000"/>
+              <a:buChar char="•"/>
+            </a:pPr>
+            <a:r>
+              <a:rPr lang="en-US" sz="950" dirty="0">
+                <a:solidFill>
+                  <a:srgbClr val="A1A8B5"/>
+                </a:solidFill>
+                <a:latin typeface="Arial" pitchFamily="34" charset="0"/>
+                <a:ea typeface="Arial" pitchFamily="34" charset="-122"/>
+                <a:cs typeface="Arial" pitchFamily="34" charset="-120"/>
+              </a:rPr>
+              <a:t>It can never resurrect a rejected trade, so the deterministic path is a strict subset of the AI path.</a:t>
+            </a:r>
+            <a:endParaRPr lang="en-US" sz="950" dirty="0"/>
+          </a:p>
+          <a:p>
+            <a:pPr marL="342900" indent="-342900">
+              <a:lnSpc>
+                <a:spcPct val="114000"/>
+              </a:lnSpc>
+              <a:spcAft>
+                <a:spcPts val="400"/>
+              </a:spcAft>
+              <a:buSzPct val="100000"/>
+              <a:buChar char="•"/>
+            </a:pPr>
+            <a:r>
+              <a:rPr lang="en-US" sz="950" dirty="0">
+                <a:solidFill>
+                  <a:srgbClr val="A1A8B5"/>
+                </a:solidFill>
+                <a:latin typeface="Arial" pitchFamily="34" charset="0"/>
+                <a:ea typeface="Arial" pitchFamily="34" charset="-122"/>
+                <a:cs typeface="Arial" pitchFamily="34" charset="-120"/>
+              </a:rPr>
+              <a:t>A missing key or unparseable reply degrades to the deterministic gate and says so in the journal.</a:t>
+            </a:r>
+            <a:endParaRPr lang="en-US" sz="950" dirty="0"/>
+          </a:p>
+        </p:txBody>
+      </p:sp>
+      <p:sp>
+        <p:nvSpPr>
+          <p:cNvPr id="10" name="Shape 8"/>
+          <p:cNvSpPr/>
+          <p:nvPr/>
+        </p:nvSpPr>
+        <p:spPr>
+          <a:xfrm>
+            <a:off x="4325112" y="2395728"/>
+            <a:ext cx="3538728" cy="3703320"/>
+          </a:xfrm>
+          <a:prstGeom prst="roundRect">
+            <a:avLst>
+              <a:gd name="adj" fmla="val 2067"/>
+            </a:avLst>
+          </a:prstGeom>
+          <a:solidFill>
+            <a:srgbClr val="141922"/>
+          </a:solidFill>
+          <a:ln w="12700">
+            <a:solidFill>
+              <a:srgbClr val="232A38"/>
+            </a:solidFill>
+            <a:prstDash val="solid"/>
+          </a:ln>
+        </p:spPr>
+      </p:sp>
+      <p:sp>
+        <p:nvSpPr>
+          <p:cNvPr id="11" name="Text 9"/>
+          <p:cNvSpPr txBox="1"/>
+          <p:nvPr/>
+        </p:nvSpPr>
+        <p:spPr>
+          <a:xfrm>
+            <a:off x="4581144" y="2578608"/>
+            <a:ext cx="3026664" cy="274320"/>
+          </a:xfrm>
+          <a:prstGeom prst="rect">
+            <a:avLst/>
+          </a:prstGeom>
+          <a:noFill/>
+          <a:ln/>
+        </p:spPr>
+        <p:txBody>
+          <a:bodyPr wrap="square" lIns="0" tIns="0" rIns="0" bIns="0" rtlCol="0" anchor="ctr"/>
+          <a:lstStyle/>
+          <a:p>
+            <a:pPr indent="0" marL="0">
+              <a:buNone/>
+            </a:pPr>
+            <a:r>
+              <a:rPr lang="en-US" sz="1500" b="1" dirty="0">
+                <a:solidFill>
+                  <a:srgbClr val="F0B429"/>
+                </a:solidFill>
+                <a:latin typeface="Arial" pitchFamily="34" charset="0"/>
+                <a:ea typeface="Arial" pitchFamily="34" charset="-122"/>
+                <a:cs typeface="Arial" pitchFamily="34" charset="-120"/>
+              </a:rPr>
+              <a:t>2 · Risk gates</a:t>
+            </a:r>
+            <a:endParaRPr lang="en-US" sz="1500" dirty="0"/>
+          </a:p>
+        </p:txBody>
+      </p:sp>
+      <p:sp>
+        <p:nvSpPr>
+          <p:cNvPr id="12" name="Text 10"/>
+          <p:cNvSpPr txBox="1"/>
+          <p:nvPr/>
+        </p:nvSpPr>
+        <p:spPr>
+          <a:xfrm>
+            <a:off x="4581144" y="2962656"/>
+            <a:ext cx="3026664" cy="2953512"/>
+          </a:xfrm>
+          <a:prstGeom prst="rect">
+            <a:avLst/>
+          </a:prstGeom>
+          <a:noFill/>
+          <a:ln/>
+        </p:spPr>
+        <p:txBody>
+          <a:bodyPr wrap="square" lIns="0" tIns="0" rIns="0" bIns="0" rtlCol="0" anchor="t"/>
+          <a:lstStyle/>
+          <a:p>
+            <a:pPr marL="342900" indent="-342900">
+              <a:lnSpc>
+                <a:spcPct val="114000"/>
+              </a:lnSpc>
+              <a:spcAft>
+                <a:spcPts val="400"/>
+              </a:spcAft>
+              <a:buSzPct val="100000"/>
+              <a:buChar char="•"/>
+            </a:pPr>
+            <a:r>
+              <a:rPr lang="en-US" sz="950" dirty="0">
+                <a:solidFill>
+                  <a:srgbClr val="A1A8B5"/>
+                </a:solidFill>
+                <a:latin typeface="Arial" pitchFamily="34" charset="0"/>
+                <a:ea typeface="Arial" pitchFamily="34" charset="-122"/>
+                <a:cs typeface="Arial" pitchFamily="34" charset="-120"/>
+              </a:rPr>
+              <a:t>Single-leg long only: max loss is the premium paid, set by the instrument.</a:t>
+            </a:r>
+            <a:endParaRPr lang="en-US" sz="950" dirty="0"/>
+          </a:p>
+          <a:p>
+            <a:pPr marL="342900" indent="-342900">
+              <a:lnSpc>
+                <a:spcPct val="114000"/>
+              </a:lnSpc>
+              <a:spcAft>
+                <a:spcPts val="400"/>
+              </a:spcAft>
+              <a:buSzPct val="100000"/>
+              <a:buChar char="•"/>
+            </a:pPr>
+            <a:r>
+              <a:rPr lang="en-US" sz="950" dirty="0">
+                <a:solidFill>
+                  <a:srgbClr val="A1A8B5"/>
+                </a:solidFill>
+                <a:latin typeface="Arial" pitchFamily="34" charset="0"/>
+                <a:ea typeface="Arial" pitchFamily="34" charset="-122"/>
+                <a:cs typeface="Arial" pitchFamily="34" charset="-120"/>
+              </a:rPr>
+              <a:t>One open lot per (symbol, direction); one direction per underlying.</a:t>
+            </a:r>
+            <a:endParaRPr lang="en-US" sz="950" dirty="0"/>
+          </a:p>
+          <a:p>
+            <a:pPr marL="342900" indent="-342900">
+              <a:lnSpc>
+                <a:spcPct val="114000"/>
+              </a:lnSpc>
+              <a:spcAft>
+                <a:spcPts val="400"/>
+              </a:spcAft>
+              <a:buSzPct val="100000"/>
+              <a:buChar char="•"/>
+            </a:pPr>
+            <a:r>
+              <a:rPr lang="en-US" sz="950" dirty="0">
+                <a:solidFill>
+                  <a:srgbClr val="A1A8B5"/>
+                </a:solidFill>
+                <a:latin typeface="Arial" pitchFamily="34" charset="0"/>
+                <a:ea typeface="Arial" pitchFamily="34" charset="-122"/>
+                <a:cs typeface="Arial" pitchFamily="34" charset="-120"/>
+              </a:rPr>
+              <a:t>30-minute entry-anchored dedup, so a persistent score cannot stack the same name.</a:t>
+            </a:r>
+            <a:endParaRPr lang="en-US" sz="950" dirty="0"/>
+          </a:p>
+          <a:p>
+            <a:pPr marL="342900" indent="-342900">
+              <a:lnSpc>
+                <a:spcPct val="114000"/>
+              </a:lnSpc>
+              <a:spcAft>
+                <a:spcPts val="400"/>
+              </a:spcAft>
+              <a:buSzPct val="100000"/>
+              <a:buChar char="•"/>
+            </a:pPr>
+            <a:r>
+              <a:rPr lang="en-US" sz="950" dirty="0">
+                <a:solidFill>
+                  <a:srgbClr val="A1A8B5"/>
+                </a:solidFill>
+                <a:latin typeface="Arial" pitchFamily="34" charset="0"/>
+                <a:ea typeface="Arial" pitchFamily="34" charset="-122"/>
+                <a:cs typeface="Arial" pitchFamily="34" charset="-120"/>
+              </a:rPr>
+              <a:t>Sizing trimmed to the account's real options buying power - expensive contracts size down, never reject.</a:t>
+            </a:r>
+            <a:endParaRPr lang="en-US" sz="950" dirty="0"/>
+          </a:p>
+          <a:p>
+            <a:pPr marL="342900" indent="-342900">
+              <a:lnSpc>
+                <a:spcPct val="114000"/>
+              </a:lnSpc>
+              <a:spcAft>
+                <a:spcPts val="400"/>
+              </a:spcAft>
+              <a:buSzPct val="100000"/>
+              <a:buChar char="•"/>
+            </a:pPr>
+            <a:r>
+              <a:rPr lang="en-US" sz="950" dirty="0">
+                <a:solidFill>
+                  <a:srgbClr val="A1A8B5"/>
+                </a:solidFill>
+                <a:latin typeface="Arial" pitchFamily="34" charset="0"/>
+                <a:ea typeface="Arial" pitchFamily="34" charset="-122"/>
+                <a:cs typeface="Arial" pitchFamily="34" charset="-120"/>
+              </a:rPr>
+              <a:t>No entry after 15:00 ET; hard flatten at 15:50, so a 0DTE never reaches expiry.</a:t>
+            </a:r>
+            <a:endParaRPr lang="en-US" sz="950" dirty="0"/>
+          </a:p>
+          <a:p>
+            <a:pPr marL="342900" indent="-342900">
+              <a:lnSpc>
+                <a:spcPct val="114000"/>
+              </a:lnSpc>
+              <a:spcAft>
+                <a:spcPts val="400"/>
+              </a:spcAft>
+              <a:buSzPct val="100000"/>
+              <a:buChar char="•"/>
+            </a:pPr>
+            <a:r>
+              <a:rPr lang="en-US" sz="950" dirty="0">
+                <a:solidFill>
+                  <a:srgbClr val="A1A8B5"/>
+                </a:solidFill>
+                <a:latin typeface="Arial" pitchFamily="34" charset="0"/>
+                <a:ea typeface="Arial" pitchFamily="34" charset="-122"/>
+                <a:cs typeface="Arial" pitchFamily="34" charset="-120"/>
+              </a:rPr>
+              <a:t>Orphan sweep at startup and EOD for positions the agent did not open.</a:t>
+            </a:r>
+            <a:endParaRPr lang="en-US" sz="950" dirty="0"/>
+          </a:p>
+          <a:p>
+            <a:pPr marL="342900" indent="-342900">
+              <a:lnSpc>
+                <a:spcPct val="114000"/>
+              </a:lnSpc>
+              <a:spcAft>
+                <a:spcPts val="400"/>
+              </a:spcAft>
+              <a:buSzPct val="100000"/>
+              <a:buChar char="•"/>
+            </a:pPr>
+            <a:r>
+              <a:rPr lang="en-US" sz="950" dirty="0">
+                <a:solidFill>
+                  <a:srgbClr val="A1A8B5"/>
+                </a:solidFill>
+                <a:latin typeface="Arial" pitchFamily="34" charset="0"/>
+                <a:ea typeface="Arial" pitchFamily="34" charset="-122"/>
+                <a:cs typeface="Arial" pitchFamily="34" charset="-120"/>
+              </a:rPr>
+              <a:t>Exits: +40% sells half and trails the runner; -20% half, -40% the rest; 30-min stop if under water.</a:t>
+            </a:r>
+            <a:endParaRPr lang="en-US" sz="950" dirty="0"/>
+          </a:p>
+          <a:p>
+            <a:pPr marL="342900" indent="-342900">
+              <a:lnSpc>
+                <a:spcPct val="114000"/>
+              </a:lnSpc>
+              <a:spcAft>
+                <a:spcPts val="400"/>
+              </a:spcAft>
+              <a:buSzPct val="100000"/>
+              <a:buChar char="•"/>
+            </a:pPr>
+            <a:r>
+              <a:rPr lang="en-US" sz="950" dirty="0">
+                <a:solidFill>
+                  <a:srgbClr val="A1A8B5"/>
+                </a:solidFill>
+                <a:latin typeface="Arial" pitchFamily="34" charset="0"/>
+                <a:ea typeface="Arial" pitchFamily="34" charset="-122"/>
+                <a:cs typeface="Arial" pitchFamily="34" charset="-120"/>
+              </a:rPr>
+              <a:t>175 network-free tests cover all of it.</a:t>
+            </a:r>
+            <a:endParaRPr lang="en-US" sz="950" dirty="0"/>
+          </a:p>
+        </p:txBody>
+      </p:sp>
+      <p:sp>
+        <p:nvSpPr>
+          <p:cNvPr id="13" name="Shape 11"/>
+          <p:cNvSpPr/>
+          <p:nvPr/>
+        </p:nvSpPr>
+        <p:spPr>
+          <a:xfrm>
+            <a:off x="8101584" y="2395728"/>
+            <a:ext cx="3538728" cy="3703320"/>
+          </a:xfrm>
+          <a:prstGeom prst="roundRect">
+            <a:avLst>
+              <a:gd name="adj" fmla="val 2067"/>
+            </a:avLst>
+          </a:prstGeom>
+          <a:solidFill>
+            <a:srgbClr val="141922"/>
+          </a:solidFill>
+          <a:ln w="12700">
+            <a:solidFill>
+              <a:srgbClr val="232A38"/>
+            </a:solidFill>
+            <a:prstDash val="solid"/>
+          </a:ln>
+        </p:spPr>
+      </p:sp>
+      <p:sp>
+        <p:nvSpPr>
+          <p:cNvPr id="14" name="Text 12"/>
+          <p:cNvSpPr txBox="1"/>
+          <p:nvPr/>
+        </p:nvSpPr>
+        <p:spPr>
+          <a:xfrm>
+            <a:off x="8357616" y="2578608"/>
+            <a:ext cx="3026664" cy="274320"/>
+          </a:xfrm>
+          <a:prstGeom prst="rect">
+            <a:avLst/>
+          </a:prstGeom>
+          <a:noFill/>
+          <a:ln/>
+        </p:spPr>
+        <p:txBody>
+          <a:bodyPr wrap="square" lIns="0" tIns="0" rIns="0" bIns="0" rtlCol="0" anchor="ctr"/>
+          <a:lstStyle/>
+          <a:p>
+            <a:pPr indent="0" marL="0">
+              <a:buNone/>
+            </a:pPr>
+            <a:r>
+              <a:rPr lang="en-US" sz="1500" b="1" dirty="0">
+                <a:solidFill>
+                  <a:srgbClr val="F0B429"/>
+                </a:solidFill>
+                <a:latin typeface="Arial" pitchFamily="34" charset="0"/>
+                <a:ea typeface="Arial" pitchFamily="34" charset="-122"/>
+                <a:cs typeface="Arial" pitchFamily="34" charset="-120"/>
+              </a:rPr>
+              <a:t>3 · Alpaca infrastructure</a:t>
+            </a:r>
+            <a:endParaRPr lang="en-US" sz="1500" dirty="0"/>
+          </a:p>
+        </p:txBody>
+      </p:sp>
+      <p:sp>
+        <p:nvSpPr>
+          <p:cNvPr id="15" name="Text 13"/>
+          <p:cNvSpPr txBox="1"/>
+          <p:nvPr/>
+        </p:nvSpPr>
+        <p:spPr>
+          <a:xfrm>
+            <a:off x="8357616" y="2962656"/>
+            <a:ext cx="3026664" cy="2953512"/>
+          </a:xfrm>
+          <a:prstGeom prst="rect">
+            <a:avLst/>
+          </a:prstGeom>
+          <a:noFill/>
+          <a:ln/>
+        </p:spPr>
+        <p:txBody>
+          <a:bodyPr wrap="square" lIns="0" tIns="0" rIns="0" bIns="0" rtlCol="0" anchor="t"/>
+          <a:lstStyle/>
+          <a:p>
+            <a:pPr marL="342900" indent="-342900">
+              <a:lnSpc>
+                <a:spcPct val="114000"/>
+              </a:lnSpc>
+              <a:spcAft>
+                <a:spcPts val="400"/>
+              </a:spcAft>
+              <a:buSzPct val="100000"/>
+              <a:buChar char="•"/>
+            </a:pPr>
+            <a:r>
+              <a:rPr lang="en-US" sz="950" dirty="0">
+                <a:solidFill>
+                  <a:srgbClr val="A1A8B5"/>
+                </a:solidFill>
+                <a:latin typeface="Arial" pitchFamily="34" charset="0"/>
+                <a:ea typeface="Arial" pitchFamily="34" charset="-122"/>
+                <a:cs typeface="Arial" pitchFamily="34" charset="-120"/>
+              </a:rPr>
+              <a:t>Every order through the Alpaca CLI, not the SDK: `alpaca order submit`, then poll to a terminal state.</a:t>
+            </a:r>
+            <a:endParaRPr lang="en-US" sz="950" dirty="0"/>
+          </a:p>
+          <a:p>
+            <a:pPr marL="342900" indent="-342900">
+              <a:lnSpc>
+                <a:spcPct val="114000"/>
+              </a:lnSpc>
+              <a:spcAft>
+                <a:spcPts val="400"/>
+              </a:spcAft>
+              <a:buSzPct val="100000"/>
+              <a:buChar char="•"/>
+            </a:pPr>
+            <a:r>
+              <a:rPr lang="en-US" sz="950" dirty="0">
+                <a:solidFill>
+                  <a:srgbClr val="A1A8B5"/>
+                </a:solidFill>
+                <a:latin typeface="Arial" pitchFamily="34" charset="0"/>
+                <a:ea typeface="Arial" pitchFamily="34" charset="-122"/>
+                <a:cs typeface="Arial" pitchFamily="34" charset="-120"/>
+              </a:rPr>
+              <a:t>So the agent books the real broker fill, not a quote - cash P&amp;L is buy-fill against sell-fill.</a:t>
+            </a:r>
+            <a:endParaRPr lang="en-US" sz="950" dirty="0"/>
+          </a:p>
+          <a:p>
+            <a:pPr marL="342900" indent="-342900">
+              <a:lnSpc>
+                <a:spcPct val="114000"/>
+              </a:lnSpc>
+              <a:spcAft>
+                <a:spcPts val="400"/>
+              </a:spcAft>
+              <a:buSzPct val="100000"/>
+              <a:buChar char="•"/>
+            </a:pPr>
+            <a:r>
+              <a:rPr lang="en-US" sz="950" dirty="0">
+                <a:solidFill>
+                  <a:srgbClr val="A1A8B5"/>
+                </a:solidFill>
+                <a:latin typeface="Arial" pitchFamily="34" charset="0"/>
+                <a:ea typeface="Arial" pitchFamily="34" charset="-122"/>
+                <a:cs typeface="Arial" pitchFamily="34" charset="-120"/>
+              </a:rPr>
+              <a:t>Refuses to place anything unless `alpaca doctor` resolves paper-api.alpaca.markets.</a:t>
+            </a:r>
+            <a:endParaRPr lang="en-US" sz="950" dirty="0"/>
+          </a:p>
+          <a:p>
+            <a:pPr marL="342900" indent="-342900">
+              <a:lnSpc>
+                <a:spcPct val="114000"/>
+              </a:lnSpc>
+              <a:spcAft>
+                <a:spcPts val="400"/>
+              </a:spcAft>
+              <a:buSzPct val="100000"/>
+              <a:buChar char="•"/>
+            </a:pPr>
+            <a:r>
+              <a:rPr lang="en-US" sz="950" dirty="0">
+                <a:solidFill>
+                  <a:srgbClr val="A1A8B5"/>
+                </a:solidFill>
+                <a:latin typeface="Arial" pitchFamily="34" charset="0"/>
+                <a:ea typeface="Arial" pitchFamily="34" charset="-122"/>
+                <a:cs typeface="Arial" pitchFamily="34" charset="-120"/>
+              </a:rPr>
+              <a:t>An ambiguous submit is reconciled by --client-order-id before it will ever resubmit.</a:t>
+            </a:r>
+            <a:endParaRPr lang="en-US" sz="950" dirty="0"/>
+          </a:p>
+          <a:p>
+            <a:pPr marL="342900" indent="-342900">
+              <a:lnSpc>
+                <a:spcPct val="114000"/>
+              </a:lnSpc>
+              <a:spcAft>
+                <a:spcPts val="400"/>
+              </a:spcAft>
+              <a:buSzPct val="100000"/>
+              <a:buChar char="•"/>
+            </a:pPr>
+            <a:r>
+              <a:rPr lang="en-US" sz="950" dirty="0">
+                <a:solidFill>
+                  <a:srgbClr val="A1A8B5"/>
+                </a:solidFill>
+                <a:latin typeface="Arial" pitchFamily="34" charset="0"/>
+                <a:ea typeface="Arial" pitchFamily="34" charset="-122"/>
+                <a:cs typeface="Arial" pitchFamily="34" charset="-120"/>
+              </a:rPr>
+              <a:t>Market data - bars, contract discovery, ATM quotes - via the Alpaca Market Data API.</a:t>
+            </a:r>
+            <a:endParaRPr lang="en-US" sz="950" dirty="0"/>
+          </a:p>
+          <a:p>
+            <a:pPr marL="342900" indent="-342900">
+              <a:lnSpc>
+                <a:spcPct val="114000"/>
+              </a:lnSpc>
+              <a:spcAft>
+                <a:spcPts val="400"/>
+              </a:spcAft>
+              <a:buSzPct val="100000"/>
+              <a:buChar char="•"/>
+            </a:pPr>
+            <a:r>
+              <a:rPr lang="en-US" sz="950" dirty="0">
+                <a:solidFill>
+                  <a:srgbClr val="A1A8B5"/>
+                </a:solidFill>
+                <a:latin typeface="Arial" pitchFamily="34" charset="0"/>
+                <a:ea typeface="Arial" pitchFamily="34" charset="-122"/>
+                <a:cs typeface="Arial" pitchFamily="34" charset="-120"/>
+              </a:rPr>
+              <a:t>Runs unattended in an isolated Docker container, one session per weekday.</a:t>
+            </a:r>
+            <a:endParaRPr lang="en-US" sz="950" dirty="0"/>
+          </a:p>
+          <a:p>
+            <a:pPr marL="342900" indent="-342900">
+              <a:lnSpc>
+                <a:spcPct val="114000"/>
+              </a:lnSpc>
+              <a:spcAft>
+                <a:spcPts val="400"/>
+              </a:spcAft>
+              <a:buSzPct val="100000"/>
+              <a:buChar char="•"/>
+            </a:pPr>
+            <a:r>
+              <a:rPr lang="en-US" sz="950" dirty="0">
+                <a:solidFill>
+                  <a:srgbClr val="A1A8B5"/>
+                </a:solidFill>
+                <a:latin typeface="Arial" pitchFamily="34" charset="0"/>
+                <a:ea typeface="Arial" pitchFamily="34" charset="-122"/>
+                <a:cs typeface="Arial" pitchFamily="34" charset="-120"/>
+              </a:rPr>
+              <a:t>Every scan appends one JSONL record with the full reasoning to logs/.</a:t>
+            </a:r>
+            <a:endParaRPr lang="en-US" sz="950" dirty="0"/>
+          </a:p>
+        </p:txBody>
+      </p:sp>
+    </p:spTree>
+  </p:cSld>
+  <p:clrMapOvr>
+    <a:masterClrMapping/>
+  </p:clrMapOvr>
+</p:sld>
+</file>
+
 <file path=ppt/theme/theme1.xml><?xml version="1.0" encoding="utf-8"?>
 <a:theme xmlns:a="http://schemas.openxmlformats.org/drawingml/2006/main" name="Office Theme">
   <a:themeElements>

--- a/assets/deck.pptx
+++ b/assets/deck.pptx
@@ -1045,7 +1045,7 @@
           <a:p>
             <a:r>
               <a:rPr lang="en-US" dirty="0"/>
-              <a:t>175 network-free tests cover the scorer, these gates, the sizing maths and the execution path.</a:t>
+              <a:t>174 network-free tests cover the scorer, these gates, the sizing maths and the execution path.</a:t>
             </a:r>
             <a:endParaRPr lang="en-US" dirty="0"/>
           </a:p>
@@ -9627,7 +9627,7 @@
                 <a:ea typeface="Arial" pitchFamily="34" charset="-122"/>
                 <a:cs typeface="Arial" pitchFamily="34" charset="-120"/>
               </a:rPr>
-              <a:t>175 network-free tests cover all of it.</a:t>
+              <a:t>174 network-free tests cover all of it.</a:t>
             </a:r>
             <a:endParaRPr lang="en-US" sz="950" dirty="0"/>
           </a:p>

--- a/assets/deck.pptx
+++ b/assets/deck.pptx
@@ -1905,8 +1905,8 @@
         </p:nvSpPr>
         <p:spPr>
           <a:xfrm>
-            <a:off x="7315200" y="6263640"/>
-            <a:ext cx="4325112" cy="274320"/>
+            <a:off x="5852160" y="6263640"/>
+            <a:ext cx="5788152" cy="274320"/>
           </a:xfrm>
           <a:prstGeom prst="rect">
             <a:avLst/>
@@ -1930,7 +1930,7 @@
                 <a:ea typeface="Courier New" pitchFamily="34" charset="-122"/>
                 <a:cs typeface="Courier New" pitchFamily="34" charset="-120"/>
               </a:rPr>
-              <a:t>github.com/KIBA0993/Alpaca-Hackathon</a:t>
+              <a:t>every-trade-provable.streamlit.app  ·  github.com/KIBA0993/Alpaca-Hackathon</a:t>
             </a:r>
             <a:endParaRPr lang="en-US" sz="900" dirty="0"/>
           </a:p>
@@ -2580,8 +2580,8 @@
         </p:nvSpPr>
         <p:spPr>
           <a:xfrm>
-            <a:off x="7315200" y="6263640"/>
-            <a:ext cx="4325112" cy="274320"/>
+            <a:off x="5852160" y="6263640"/>
+            <a:ext cx="5788152" cy="274320"/>
           </a:xfrm>
           <a:prstGeom prst="rect">
             <a:avLst/>
@@ -2605,7 +2605,7 @@
                 <a:ea typeface="Courier New" pitchFamily="34" charset="-122"/>
                 <a:cs typeface="Courier New" pitchFamily="34" charset="-120"/>
               </a:rPr>
-              <a:t>github.com/KIBA0993/Alpaca-Hackathon</a:t>
+              <a:t>every-trade-provable.streamlit.app  ·  github.com/KIBA0993/Alpaca-Hackathon</a:t>
             </a:r>
             <a:endParaRPr lang="en-US" sz="900" dirty="0"/>
           </a:p>
@@ -3429,8 +3429,8 @@
         </p:nvSpPr>
         <p:spPr>
           <a:xfrm>
-            <a:off x="7315200" y="6263640"/>
-            <a:ext cx="4325112" cy="274320"/>
+            <a:off x="5852160" y="6263640"/>
+            <a:ext cx="5788152" cy="274320"/>
           </a:xfrm>
           <a:prstGeom prst="rect">
             <a:avLst/>
@@ -3454,7 +3454,7 @@
                 <a:ea typeface="Courier New" pitchFamily="34" charset="-122"/>
                 <a:cs typeface="Courier New" pitchFamily="34" charset="-120"/>
               </a:rPr>
-              <a:t>github.com/KIBA0993/Alpaca-Hackathon</a:t>
+              <a:t>every-trade-provable.streamlit.app  ·  github.com/KIBA0993/Alpaca-Hackathon</a:t>
             </a:r>
             <a:endParaRPr lang="en-US" sz="900" dirty="0"/>
           </a:p>
@@ -4996,8 +4996,8 @@
         </p:nvSpPr>
         <p:spPr>
           <a:xfrm>
-            <a:off x="7315200" y="6263640"/>
-            <a:ext cx="4325112" cy="274320"/>
+            <a:off x="5852160" y="6263640"/>
+            <a:ext cx="5788152" cy="274320"/>
           </a:xfrm>
           <a:prstGeom prst="rect">
             <a:avLst/>
@@ -5021,7 +5021,7 @@
                 <a:ea typeface="Courier New" pitchFamily="34" charset="-122"/>
                 <a:cs typeface="Courier New" pitchFamily="34" charset="-120"/>
               </a:rPr>
-              <a:t>github.com/KIBA0993/Alpaca-Hackathon</a:t>
+              <a:t>every-trade-provable.streamlit.app  ·  github.com/KIBA0993/Alpaca-Hackathon</a:t>
             </a:r>
             <a:endParaRPr lang="en-US" sz="900" dirty="0"/>
           </a:p>
@@ -5912,8 +5912,8 @@
         </p:nvSpPr>
         <p:spPr>
           <a:xfrm>
-            <a:off x="7315200" y="6263640"/>
-            <a:ext cx="4325112" cy="274320"/>
+            <a:off x="5852160" y="6263640"/>
+            <a:ext cx="5788152" cy="274320"/>
           </a:xfrm>
           <a:prstGeom prst="rect">
             <a:avLst/>
@@ -5937,7 +5937,7 @@
                 <a:ea typeface="Courier New" pitchFamily="34" charset="-122"/>
                 <a:cs typeface="Courier New" pitchFamily="34" charset="-120"/>
               </a:rPr>
-              <a:t>github.com/KIBA0993/Alpaca-Hackathon</a:t>
+              <a:t>every-trade-provable.streamlit.app  ·  github.com/KIBA0993/Alpaca-Hackathon</a:t>
             </a:r>
             <a:endParaRPr lang="en-US" sz="900" dirty="0"/>
           </a:p>
@@ -7023,8 +7023,8 @@
         </p:nvSpPr>
         <p:spPr>
           <a:xfrm>
-            <a:off x="7315200" y="6263640"/>
-            <a:ext cx="4325112" cy="274320"/>
+            <a:off x="5852160" y="6263640"/>
+            <a:ext cx="5788152" cy="274320"/>
           </a:xfrm>
           <a:prstGeom prst="rect">
             <a:avLst/>
@@ -7048,7 +7048,7 @@
                 <a:ea typeface="Courier New" pitchFamily="34" charset="-122"/>
                 <a:cs typeface="Courier New" pitchFamily="34" charset="-120"/>
               </a:rPr>
-              <a:t>github.com/KIBA0993/Alpaca-Hackathon</a:t>
+              <a:t>every-trade-provable.streamlit.app  ·  github.com/KIBA0993/Alpaca-Hackathon</a:t>
             </a:r>
             <a:endParaRPr lang="en-US" sz="900" dirty="0"/>
           </a:p>
@@ -7643,8 +7643,8 @@
         </p:nvSpPr>
         <p:spPr>
           <a:xfrm>
-            <a:off x="7315200" y="6263640"/>
-            <a:ext cx="4325112" cy="274320"/>
+            <a:off x="5852160" y="6263640"/>
+            <a:ext cx="5788152" cy="274320"/>
           </a:xfrm>
           <a:prstGeom prst="rect">
             <a:avLst/>
@@ -7668,7 +7668,7 @@
                 <a:ea typeface="Courier New" pitchFamily="34" charset="-122"/>
                 <a:cs typeface="Courier New" pitchFamily="34" charset="-120"/>
               </a:rPr>
-              <a:t>github.com/KIBA0993/Alpaca-Hackathon</a:t>
+              <a:t>every-trade-provable.streamlit.app  ·  github.com/KIBA0993/Alpaca-Hackathon</a:t>
             </a:r>
             <a:endParaRPr lang="en-US" sz="900" dirty="0"/>
           </a:p>
@@ -8392,8 +8392,8 @@
         </p:nvSpPr>
         <p:spPr>
           <a:xfrm>
-            <a:off x="7315200" y="6263640"/>
-            <a:ext cx="4325112" cy="274320"/>
+            <a:off x="5852160" y="6263640"/>
+            <a:ext cx="5788152" cy="274320"/>
           </a:xfrm>
           <a:prstGeom prst="rect">
             <a:avLst/>
@@ -8417,7 +8417,7 @@
                 <a:ea typeface="Courier New" pitchFamily="34" charset="-122"/>
                 <a:cs typeface="Courier New" pitchFamily="34" charset="-120"/>
               </a:rPr>
-              <a:t>github.com/KIBA0993/Alpaca-Hackathon</a:t>
+              <a:t>every-trade-provable.streamlit.app  ·  github.com/KIBA0993/Alpaca-Hackathon</a:t>
             </a:r>
             <a:endParaRPr lang="en-US" sz="900" dirty="0"/>
           </a:p>
@@ -8971,8 +8971,8 @@
         </p:nvSpPr>
         <p:spPr>
           <a:xfrm>
-            <a:off x="7315200" y="6263640"/>
-            <a:ext cx="4325112" cy="274320"/>
+            <a:off x="5852160" y="6263640"/>
+            <a:ext cx="5788152" cy="274320"/>
           </a:xfrm>
           <a:prstGeom prst="rect">
             <a:avLst/>
@@ -8996,7 +8996,7 @@
                 <a:ea typeface="Courier New" pitchFamily="34" charset="-122"/>
                 <a:cs typeface="Courier New" pitchFamily="34" charset="-120"/>
               </a:rPr>
-              <a:t>github.com/KIBA0993/Alpaca-Hackathon</a:t>
+              <a:t>every-trade-provable.streamlit.app  ·  github.com/KIBA0993/Alpaca-Hackathon</a:t>
             </a:r>
             <a:endParaRPr lang="en-US" sz="900" dirty="0"/>
           </a:p>

--- a/assets/deck.pptx
+++ b/assets/deck.pptx
@@ -13,10 +13,9 @@
     <p:sldId id="261" r:id="rId7"/>
     <p:sldId id="262" r:id="rId8"/>
     <p:sldId id="263" r:id="rId9"/>
-    <p:sldId id="264" r:id="rId10"/>
   </p:sldIdLst>
   <p:notesMasterIdLst>
-    <p:notesMasterId r:id="rId11"/>
+    <p:notesMasterId r:id="rId10"/>
   </p:notesMasterIdLst>
   <p:sldSz cx="12192000" cy="6858000"/>
   <p:notesSz cx="6858000" cy="12192000"/>
@@ -1221,7 +1220,7 @@
           <a:p>
             <a:r>
               <a:rPr lang="en-US" dirty="0"/>
-              <a:t>The CLI is not a box-tick. It is why the P&amp;L two slides back is broker truth rather than a mid-price model.</a:t>
+              <a:t>The CLI is why the profit and loss two slides back is the real fill price from the broker, rather than a number the agent worked out itself.</a:t>
             </a:r>
             <a:endParaRPr lang="en-US" dirty="0"/>
           </a:p>
@@ -1397,7 +1396,7 @@
           <a:p>
             <a:r>
               <a:rPr lang="en-US" dirty="0"/>
-              <a:t>Close on the four claims. Each one is checkable in the repo.</a:t>
+              <a:t>This slide is the one-page write-up. The same content ships as docs/ONE_PAGER.md and docs/ONE_PAGER.pdf in the repo.</a:t>
             </a:r>
             <a:endParaRPr lang="en-US" dirty="0"/>
           </a:p>
@@ -1421,94 +1420,6 @@
             <a:fld id="{F7021451-1387-4CA6-816F-3879F97B5CBC}" type="slidenum">
               <a:rPr lang="en-US"/>
               <a:t>8</a:t>
-            </a:fld>
-            <a:endParaRPr lang="en-US"/>
-          </a:p>
-        </p:txBody>
-      </p:sp>
-    </p:spTree>
-    <p:extLst>
-      <p:ext uri="{BB962C8B-B14F-4D97-AF65-F5344CB8AC3E}">
-        <p14:creationId xmlns:p14="http://schemas.microsoft.com/office/powerpoint/2010/main" val="1024086991"/>
-      </p:ext>
-    </p:extLst>
-  </p:cSld>
-  <p:clrMapOvr>
-    <a:masterClrMapping/>
-  </p:clrMapOvr>
-</p:notes>
-</file>
-
-<file path=ppt/notesSlides/notesSlide9.xml><?xml version="1.0" encoding="utf-8"?>
-<p:notes xmlns:a="http://schemas.openxmlformats.org/drawingml/2006/main" xmlns:r="http://schemas.openxmlformats.org/officeDocument/2006/relationships" xmlns:p="http://schemas.openxmlformats.org/presentationml/2006/main">
-  <p:cSld>
-    <p:spTree>
-      <p:nvGrpSpPr>
-        <p:cNvPr id="1" name=""/>
-        <p:cNvGrpSpPr/>
-        <p:nvPr/>
-      </p:nvGrpSpPr>
-      <p:grpSpPr>
-        <a:xfrm>
-          <a:off x="0" y="0"/>
-          <a:ext cx="0" cy="0"/>
-          <a:chOff x="0" y="0"/>
-          <a:chExt cx="0" cy="0"/>
-        </a:xfrm>
-      </p:grpSpPr>
-      <p:sp>
-        <p:nvSpPr>
-          <p:cNvPr id="2" name="Slide Image Placeholder 1"/>
-          <p:cNvSpPr>
-            <a:spLocks noGrp="1" noRot="1" noChangeAspect="1"/>
-          </p:cNvSpPr>
-          <p:nvPr>
-            <p:ph type="sldImg"/>
-          </p:nvPr>
-        </p:nvSpPr>
-        <p:spPr/>
-      </p:sp>
-      <p:sp>
-        <p:nvSpPr>
-          <p:cNvPr id="3" name="Notes Placeholder 2"/>
-          <p:cNvSpPr>
-            <a:spLocks noGrp="1"/>
-          </p:cNvSpPr>
-          <p:nvPr>
-            <p:ph type="body" idx="1"/>
-          </p:nvPr>
-        </p:nvSpPr>
-        <p:spPr/>
-        <p:txBody>
-          <a:bodyPr/>
-          <a:lstStyle/>
-          <a:p>
-            <a:r>
-              <a:rPr lang="en-US" dirty="0"/>
-              <a:t>This slide is the hackathon's required one-page write-up. The same content ships as docs/ONE_PAGER.md and docs/ONE_PAGER.pdf in the repo.</a:t>
-            </a:r>
-            <a:endParaRPr lang="en-US" dirty="0"/>
-          </a:p>
-        </p:txBody>
-      </p:sp>
-      <p:sp>
-        <p:nvSpPr>
-          <p:cNvPr id="4" name="Slide Number Placeholder 3"/>
-          <p:cNvSpPr>
-            <a:spLocks noGrp="1"/>
-          </p:cNvSpPr>
-          <p:nvPr>
-            <p:ph type="sldNum" sz="quarter" idx="10"/>
-          </p:nvPr>
-        </p:nvSpPr>
-        <p:spPr/>
-        <p:txBody>
-          <a:bodyPr/>
-          <a:lstStyle/>
-          <a:p>
-            <a:fld id="{F7021451-1387-4CA6-816F-3879F97B5CBC}" type="slidenum">
-              <a:rPr lang="en-US"/>
-              <a:t>9</a:t>
             </a:fld>
             <a:endParaRPr lang="en-US"/>
           </a:p>
@@ -7087,7 +6998,7 @@
                 <a:ea typeface="Arial" pitchFamily="34" charset="-122"/>
                 <a:cs typeface="Arial" pitchFamily="34" charset="-120"/>
               </a:rPr>
-              <a:t>Built on Alpaca's CLI, not just the SDK</a:t>
+              <a:t>Every order goes through the Alpaca CLI</a:t>
             </a:r>
             <a:endParaRPr lang="en-US" sz="3400" dirty="0"/>
           </a:p>
@@ -7153,7 +7064,7 @@
                 <a:ea typeface="Courier New" pitchFamily="34" charset="-122"/>
                 <a:cs typeface="Courier New" pitchFamily="34" charset="-120"/>
               </a:rPr>
-              <a:t>ORDERS VIA THE ALPACA CLI</a:t>
+              <a:t>ORDERS PLACED THROUGH THE CLI</a:t>
             </a:r>
             <a:endParaRPr lang="en-US" sz="1000" dirty="0"/>
           </a:p>
@@ -7195,7 +7106,7 @@
                 <a:ea typeface="Arial" pitchFamily="34" charset="-122"/>
                 <a:cs typeface="Arial" pitchFamily="34" charset="-120"/>
               </a:rPr>
-              <a:t>alpaca order submit, then poll to a terminal state. The agent books the real broker fill, not a quote - so cash P&amp;L is buy-fill against sell-fill.</a:t>
+              <a:t>The agent runs `alpaca order submit` and waits for the order to fill. It records the price it actually got, so the profit and loss is real money in and out - not an estimate from a quote.</a:t>
             </a:r>
             <a:endParaRPr lang="en-US" sz="1200" dirty="0"/>
           </a:p>
@@ -7261,7 +7172,7 @@
                 <a:ea typeface="Courier New" pitchFamily="34" charset="-122"/>
                 <a:cs typeface="Courier New" pitchFamily="34" charset="-120"/>
               </a:rPr>
-              <a:t>PAPER ENDPOINT, PROVEN</a:t>
+              <a:t>PAPER ACCOUNT, CHECKED EVERY TIME</a:t>
             </a:r>
             <a:endParaRPr lang="en-US" sz="1000" dirty="0"/>
           </a:p>
@@ -7303,7 +7214,7 @@
                 <a:ea typeface="Arial" pitchFamily="34" charset="-122"/>
                 <a:cs typeface="Arial" pitchFamily="34" charset="-120"/>
               </a:rPr>
-              <a:t>Refuses to place anything unless `alpaca doctor` resolves paper-api.alpaca.markets. The env var alone isn't proof - a profile's live_trade can route live.</a:t>
+              <a:t>Before it places anything, the agent confirms `alpaca doctor` is pointing at the paper endpoint. If it is not, the agent does not trade.</a:t>
             </a:r>
             <a:endParaRPr lang="en-US" sz="1200" dirty="0"/>
           </a:p>
@@ -7369,7 +7280,7 @@
                 <a:ea typeface="Courier New" pitchFamily="34" charset="-122"/>
                 <a:cs typeface="Courier New" pitchFamily="34" charset="-120"/>
               </a:rPr>
-              <a:t>IDEMPOTENT SUBMITS</a:t>
+              <a:t>NEVER A DUPLICATE ORDER</a:t>
             </a:r>
             <a:endParaRPr lang="en-US" sz="1000" dirty="0"/>
           </a:p>
@@ -7411,7 +7322,7 @@
                 <a:ea typeface="Arial" pitchFamily="34" charset="-122"/>
                 <a:cs typeface="Arial" pitchFamily="34" charset="-120"/>
               </a:rPr>
-              <a:t>On an ambiguous failure it reconciles by --client-order-id via `alpaca order get-by-client-id` before ever resubmitting. No duplicate, no orphan.</a:t>
+              <a:t>If a submit times out, the agent looks the order up by its own ID before trying again. The result is one order, or none - never two.</a:t>
             </a:r>
             <a:endParaRPr lang="en-US" sz="1200" dirty="0"/>
           </a:p>
@@ -7477,7 +7388,7 @@
                 <a:ea typeface="Courier New" pitchFamily="34" charset="-122"/>
                 <a:cs typeface="Courier New" pitchFamily="34" charset="-120"/>
               </a:rPr>
-              <a:t>UNATTENDED AND AUDITABLE</a:t>
+              <a:t>RUNS ON ITS OWN, AND LOGS IT</a:t>
             </a:r>
             <a:endParaRPr lang="en-US" sz="1000" dirty="0"/>
           </a:p>
@@ -7519,48 +7430,9 @@
                 <a:ea typeface="Arial" pitchFamily="34" charset="-122"/>
                 <a:cs typeface="Arial" pitchFamily="34" charset="-120"/>
               </a:rPr>
-              <a:t>Market data (5m bars, contract discovery, ATM quotes) via the Alpaca SDK. Isolated Docker container, one session per weekday, JSONL journal per scan.</a:t>
+              <a:t>Prices and contracts come from Alpaca's market data API. It runs in its own container, once each weekday, and writes a log line for every decision.</a:t>
             </a:r>
             <a:endParaRPr lang="en-US" sz="1200" dirty="0"/>
-          </a:p>
-        </p:txBody>
-      </p:sp>
-      <p:sp>
-        <p:nvSpPr>
-          <p:cNvPr id="17" name="Text 15"/>
-          <p:cNvSpPr txBox="1"/>
-          <p:nvPr/>
-        </p:nvSpPr>
-        <p:spPr>
-          <a:xfrm>
-            <a:off x="548640" y="5806440"/>
-            <a:ext cx="11091672" cy="365760"/>
-          </a:xfrm>
-          <a:prstGeom prst="rect">
-            <a:avLst/>
-          </a:prstGeom>
-          <a:noFill/>
-          <a:ln/>
-        </p:spPr>
-        <p:txBody>
-          <a:bodyPr wrap="square" lIns="0" tIns="0" rIns="0" bIns="0" rtlCol="0" anchor="ctr"/>
-          <a:lstStyle/>
-          <a:p>
-            <a:pPr indent="0" marL="0">
-              <a:buNone/>
-            </a:pPr>
-            <a:r>
-              <a:rPr lang="en-US" sz="1100" dirty="0">
-                <a:solidFill>
-                  <a:srgbClr val="F0B429"/>
-                </a:solidFill>
-                <a:latin typeface="Courier New" pitchFamily="34" charset="0"/>
-                <a:ea typeface="Courier New" pitchFamily="34" charset="-122"/>
-                <a:cs typeface="Courier New" pitchFamily="34" charset="-120"/>
-              </a:rPr>
-              <a:t>Requirement: projects must use Alpaca's MCP server or its CLI tools.   —   every order in the book above went through the CLI.</a:t>
-            </a:r>
-            <a:endParaRPr lang="en-US" sz="1100" dirty="0"/>
           </a:p>
         </p:txBody>
       </p:sp>
@@ -8378,586 +8250,7 @@
                 <a:ea typeface="Courier New" pitchFamily="34" charset="-122"/>
                 <a:cs typeface="Courier New" pitchFamily="34" charset="-120"/>
               </a:rPr>
-              <a:t>Every trade provable. Every loss capped.</a:t>
-            </a:r>
-            <a:endParaRPr lang="en-US" sz="1100" dirty="0"/>
-          </a:p>
-        </p:txBody>
-      </p:sp>
-      <p:sp>
-        <p:nvSpPr>
-          <p:cNvPr id="3" name="Text 1"/>
-          <p:cNvSpPr txBox="1"/>
-          <p:nvPr/>
-        </p:nvSpPr>
-        <p:spPr>
-          <a:xfrm>
-            <a:off x="5852160" y="6263640"/>
-            <a:ext cx="5788152" cy="274320"/>
-          </a:xfrm>
-          <a:prstGeom prst="rect">
-            <a:avLst/>
-          </a:prstGeom>
-          <a:noFill/>
-          <a:ln/>
-        </p:spPr>
-        <p:txBody>
-          <a:bodyPr wrap="square" rtlCol="0" anchor="ctr"/>
-          <a:lstStyle/>
-          <a:p>
-            <a:pPr algn="r" indent="0" marL="0">
-              <a:buNone/>
-            </a:pPr>
-            <a:r>
-              <a:rPr lang="en-US" sz="900" dirty="0">
-                <a:solidFill>
-                  <a:srgbClr val="6B7686"/>
-                </a:solidFill>
-                <a:latin typeface="Courier New" pitchFamily="34" charset="0"/>
-                <a:ea typeface="Courier New" pitchFamily="34" charset="-122"/>
-                <a:cs typeface="Courier New" pitchFamily="34" charset="-120"/>
-              </a:rPr>
-              <a:t>every-trade-provable.streamlit.app  ·  github.com/KIBA0993/Alpaca-Hackathon</a:t>
-            </a:r>
-            <a:endParaRPr lang="en-US" sz="900" dirty="0"/>
-          </a:p>
-        </p:txBody>
-      </p:sp>
-      <p:sp>
-        <p:nvSpPr>
-          <p:cNvPr id="4" name="Text 2"/>
-          <p:cNvSpPr txBox="1"/>
-          <p:nvPr/>
-        </p:nvSpPr>
-        <p:spPr>
-          <a:xfrm>
-            <a:off x="548640" y="1371600"/>
-            <a:ext cx="11064240" cy="1737360"/>
-          </a:xfrm>
-          <a:prstGeom prst="rect">
-            <a:avLst/>
-          </a:prstGeom>
-          <a:noFill/>
-          <a:ln/>
-        </p:spPr>
-        <p:txBody>
-          <a:bodyPr wrap="square" lIns="0" tIns="0" rIns="0" bIns="0" rtlCol="0" anchor="ctr"/>
-          <a:lstStyle/>
-          <a:p>
-            <a:pPr indent="0" marL="0">
-              <a:lnSpc>
-                <a:spcPct val="105000"/>
-              </a:lnSpc>
-              <a:buNone/>
-            </a:pPr>
-            <a:r>
-              <a:rPr lang="en-US" sz="4600" b="1" dirty="0">
-                <a:solidFill>
-                  <a:srgbClr val="FFFFFF"/>
-                </a:solidFill>
-                <a:latin typeface="Arial" pitchFamily="34" charset="0"/>
-                <a:ea typeface="Arial" pitchFamily="34" charset="-122"/>
-                <a:cs typeface="Arial" pitchFamily="34" charset="-120"/>
-              </a:rPr>
-              <a:t>A fresh $100,000 account,</a:t>
-            </a:r>
-            <a:endParaRPr lang="en-US" sz="4600" dirty="0"/>
-          </a:p>
-          <a:p>
-            <a:pPr indent="0" marL="0">
-              <a:lnSpc>
-                <a:spcPct val="105000"/>
-              </a:lnSpc>
-              <a:buNone/>
-            </a:pPr>
-            <a:r>
-              <a:rPr lang="en-US" sz="4600" b="1" dirty="0">
-                <a:solidFill>
-                  <a:srgbClr val="F0B429"/>
-                </a:solidFill>
-                <a:latin typeface="Arial" pitchFamily="34" charset="0"/>
-                <a:ea typeface="Arial" pitchFamily="34" charset="-122"/>
-                <a:cs typeface="Arial" pitchFamily="34" charset="-120"/>
-              </a:rPr>
-              <a:t>3 sessions, +79.1%.</a:t>
-            </a:r>
-            <a:endParaRPr lang="en-US" sz="4600" dirty="0"/>
-          </a:p>
-        </p:txBody>
-      </p:sp>
-      <p:sp>
-        <p:nvSpPr>
-          <p:cNvPr id="5" name="Text 3"/>
-          <p:cNvSpPr txBox="1"/>
-          <p:nvPr/>
-        </p:nvSpPr>
-        <p:spPr>
-          <a:xfrm>
-            <a:off x="548640" y="3429000"/>
-            <a:ext cx="320040" cy="365760"/>
-          </a:xfrm>
-          <a:prstGeom prst="rect">
-            <a:avLst/>
-          </a:prstGeom>
-          <a:noFill/>
-          <a:ln/>
-        </p:spPr>
-        <p:txBody>
-          <a:bodyPr wrap="square" lIns="0" tIns="0" rIns="0" bIns="0" rtlCol="0" anchor="ctr"/>
-          <a:lstStyle/>
-          <a:p>
-            <a:pPr indent="0" marL="0">
-              <a:buNone/>
-            </a:pPr>
-            <a:r>
-              <a:rPr lang="en-US" sz="1500" dirty="0">
-                <a:solidFill>
-                  <a:srgbClr val="F0B429"/>
-                </a:solidFill>
-                <a:latin typeface="Arial" pitchFamily="34" charset="0"/>
-                <a:ea typeface="Arial" pitchFamily="34" charset="-122"/>
-                <a:cs typeface="Arial" pitchFamily="34" charset="-120"/>
-              </a:rPr>
-              <a:t>—</a:t>
-            </a:r>
-            <a:endParaRPr lang="en-US" sz="1500" dirty="0"/>
-          </a:p>
-        </p:txBody>
-      </p:sp>
-      <p:sp>
-        <p:nvSpPr>
-          <p:cNvPr id="6" name="Text 4"/>
-          <p:cNvSpPr txBox="1"/>
-          <p:nvPr/>
-        </p:nvSpPr>
-        <p:spPr>
-          <a:xfrm>
-            <a:off x="914400" y="3429000"/>
-            <a:ext cx="10698480" cy="365760"/>
-          </a:xfrm>
-          <a:prstGeom prst="rect">
-            <a:avLst/>
-          </a:prstGeom>
-          <a:noFill/>
-          <a:ln/>
-        </p:spPr>
-        <p:txBody>
-          <a:bodyPr wrap="square" lIns="0" tIns="0" rIns="0" bIns="0" rtlCol="0" anchor="ctr"/>
-          <a:lstStyle/>
-          <a:p>
-            <a:pPr indent="0" marL="0">
-              <a:buNone/>
-            </a:pPr>
-            <a:r>
-              <a:rPr lang="en-US" sz="1500" b="1" dirty="0">
-                <a:solidFill>
-                  <a:srgbClr val="FFFFFF"/>
-                </a:solidFill>
-                <a:latin typeface="Arial" pitchFamily="34" charset="0"/>
-                <a:ea typeface="Arial" pitchFamily="34" charset="-122"/>
-                <a:cs typeface="Arial" pitchFamily="34" charset="-120"/>
-              </a:rPr>
-              <a:t>Max loss capped by the instrument</a:t>
-            </a:r>
-            <a:pPr indent="0" marL="0">
-              <a:buNone/>
-            </a:pPr>
-            <a:r>
-              <a:rPr lang="en-US" sz="1500" dirty="0">
-                <a:solidFill>
-                  <a:srgbClr val="A1A8B5"/>
-                </a:solidFill>
-                <a:latin typeface="Arial" pitchFamily="34" charset="0"/>
-                <a:ea typeface="Arial" pitchFamily="34" charset="-122"/>
-                <a:cs typeface="Arial" pitchFamily="34" charset="-120"/>
-              </a:rPr>
-              <a:t>   not by code that has to remember</a:t>
-            </a:r>
-            <a:endParaRPr lang="en-US" sz="1500" dirty="0"/>
-          </a:p>
-        </p:txBody>
-      </p:sp>
-      <p:sp>
-        <p:nvSpPr>
-          <p:cNvPr id="7" name="Text 5"/>
-          <p:cNvSpPr txBox="1"/>
-          <p:nvPr/>
-        </p:nvSpPr>
-        <p:spPr>
-          <a:xfrm>
-            <a:off x="548640" y="4032504"/>
-            <a:ext cx="320040" cy="365760"/>
-          </a:xfrm>
-          <a:prstGeom prst="rect">
-            <a:avLst/>
-          </a:prstGeom>
-          <a:noFill/>
-          <a:ln/>
-        </p:spPr>
-        <p:txBody>
-          <a:bodyPr wrap="square" lIns="0" tIns="0" rIns="0" bIns="0" rtlCol="0" anchor="ctr"/>
-          <a:lstStyle/>
-          <a:p>
-            <a:pPr indent="0" marL="0">
-              <a:buNone/>
-            </a:pPr>
-            <a:r>
-              <a:rPr lang="en-US" sz="1500" dirty="0">
-                <a:solidFill>
-                  <a:srgbClr val="F0B429"/>
-                </a:solidFill>
-                <a:latin typeface="Arial" pitchFamily="34" charset="0"/>
-                <a:ea typeface="Arial" pitchFamily="34" charset="-122"/>
-                <a:cs typeface="Arial" pitchFamily="34" charset="-120"/>
-              </a:rPr>
-              <a:t>—</a:t>
-            </a:r>
-            <a:endParaRPr lang="en-US" sz="1500" dirty="0"/>
-          </a:p>
-        </p:txBody>
-      </p:sp>
-      <p:sp>
-        <p:nvSpPr>
-          <p:cNvPr id="8" name="Text 6"/>
-          <p:cNvSpPr txBox="1"/>
-          <p:nvPr/>
-        </p:nvSpPr>
-        <p:spPr>
-          <a:xfrm>
-            <a:off x="914400" y="4032504"/>
-            <a:ext cx="10698480" cy="365760"/>
-          </a:xfrm>
-          <a:prstGeom prst="rect">
-            <a:avLst/>
-          </a:prstGeom>
-          <a:noFill/>
-          <a:ln/>
-        </p:spPr>
-        <p:txBody>
-          <a:bodyPr wrap="square" lIns="0" tIns="0" rIns="0" bIns="0" rtlCol="0" anchor="ctr"/>
-          <a:lstStyle/>
-          <a:p>
-            <a:pPr indent="0" marL="0">
-              <a:buNone/>
-            </a:pPr>
-            <a:r>
-              <a:rPr lang="en-US" sz="1500" b="1" dirty="0">
-                <a:solidFill>
-                  <a:srgbClr val="FFFFFF"/>
-                </a:solidFill>
-                <a:latin typeface="Arial" pitchFamily="34" charset="0"/>
-                <a:ea typeface="Arial" pitchFamily="34" charset="-122"/>
-                <a:cs typeface="Arial" pitchFamily="34" charset="-120"/>
-              </a:rPr>
-              <a:t>An AI that can only remove risk</a:t>
-            </a:r>
-            <a:pPr indent="0" marL="0">
-              <a:buNone/>
-            </a:pPr>
-            <a:r>
-              <a:rPr lang="en-US" sz="1500" dirty="0">
-                <a:solidFill>
-                  <a:srgbClr val="A1A8B5"/>
-                </a:solidFill>
-                <a:latin typeface="Arial" pitchFamily="34" charset="0"/>
-                <a:ea typeface="Arial" pitchFamily="34" charset="-122"/>
-                <a:cs typeface="Arial" pitchFamily="34" charset="-120"/>
-              </a:rPr>
-              <a:t>   structurally unable to add a trade</a:t>
-            </a:r>
-            <a:endParaRPr lang="en-US" sz="1500" dirty="0"/>
-          </a:p>
-        </p:txBody>
-      </p:sp>
-      <p:sp>
-        <p:nvSpPr>
-          <p:cNvPr id="9" name="Text 7"/>
-          <p:cNvSpPr txBox="1"/>
-          <p:nvPr/>
-        </p:nvSpPr>
-        <p:spPr>
-          <a:xfrm>
-            <a:off x="548640" y="4636008"/>
-            <a:ext cx="320040" cy="365760"/>
-          </a:xfrm>
-          <a:prstGeom prst="rect">
-            <a:avLst/>
-          </a:prstGeom>
-          <a:noFill/>
-          <a:ln/>
-        </p:spPr>
-        <p:txBody>
-          <a:bodyPr wrap="square" lIns="0" tIns="0" rIns="0" bIns="0" rtlCol="0" anchor="ctr"/>
-          <a:lstStyle/>
-          <a:p>
-            <a:pPr indent="0" marL="0">
-              <a:buNone/>
-            </a:pPr>
-            <a:r>
-              <a:rPr lang="en-US" sz="1500" dirty="0">
-                <a:solidFill>
-                  <a:srgbClr val="F0B429"/>
-                </a:solidFill>
-                <a:latin typeface="Arial" pitchFamily="34" charset="0"/>
-                <a:ea typeface="Arial" pitchFamily="34" charset="-122"/>
-                <a:cs typeface="Arial" pitchFamily="34" charset="-120"/>
-              </a:rPr>
-              <a:t>—</a:t>
-            </a:r>
-            <a:endParaRPr lang="en-US" sz="1500" dirty="0"/>
-          </a:p>
-        </p:txBody>
-      </p:sp>
-      <p:sp>
-        <p:nvSpPr>
-          <p:cNvPr id="10" name="Text 8"/>
-          <p:cNvSpPr txBox="1"/>
-          <p:nvPr/>
-        </p:nvSpPr>
-        <p:spPr>
-          <a:xfrm>
-            <a:off x="914400" y="4636008"/>
-            <a:ext cx="10698480" cy="365760"/>
-          </a:xfrm>
-          <a:prstGeom prst="rect">
-            <a:avLst/>
-          </a:prstGeom>
-          <a:noFill/>
-          <a:ln/>
-        </p:spPr>
-        <p:txBody>
-          <a:bodyPr wrap="square" lIns="0" tIns="0" rIns="0" bIns="0" rtlCol="0" anchor="ctr"/>
-          <a:lstStyle/>
-          <a:p>
-            <a:pPr indent="0" marL="0">
-              <a:buNone/>
-            </a:pPr>
-            <a:r>
-              <a:rPr lang="en-US" sz="1500" b="1" dirty="0">
-                <a:solidFill>
-                  <a:srgbClr val="FFFFFF"/>
-                </a:solidFill>
-                <a:latin typeface="Arial" pitchFamily="34" charset="0"/>
-                <a:ea typeface="Arial" pitchFamily="34" charset="-122"/>
-                <a:cs typeface="Arial" pitchFamily="34" charset="-120"/>
-              </a:rPr>
-              <a:t>Every order through the Alpaca CLI</a:t>
-            </a:r>
-            <a:pPr indent="0" marL="0">
-              <a:buNone/>
-            </a:pPr>
-            <a:r>
-              <a:rPr lang="en-US" sz="1500" dirty="0">
-                <a:solidFill>
-                  <a:srgbClr val="A1A8B5"/>
-                </a:solidFill>
-                <a:latin typeface="Arial" pitchFamily="34" charset="0"/>
-                <a:ea typeface="Arial" pitchFamily="34" charset="-122"/>
-                <a:cs typeface="Arial" pitchFamily="34" charset="-120"/>
-              </a:rPr>
-              <a:t>   P&amp;L is the real broker fill, not a quote</a:t>
-            </a:r>
-            <a:endParaRPr lang="en-US" sz="1500" dirty="0"/>
-          </a:p>
-        </p:txBody>
-      </p:sp>
-      <p:sp>
-        <p:nvSpPr>
-          <p:cNvPr id="11" name="Text 9"/>
-          <p:cNvSpPr txBox="1"/>
-          <p:nvPr/>
-        </p:nvSpPr>
-        <p:spPr>
-          <a:xfrm>
-            <a:off x="548640" y="5239512"/>
-            <a:ext cx="320040" cy="365760"/>
-          </a:xfrm>
-          <a:prstGeom prst="rect">
-            <a:avLst/>
-          </a:prstGeom>
-          <a:noFill/>
-          <a:ln/>
-        </p:spPr>
-        <p:txBody>
-          <a:bodyPr wrap="square" lIns="0" tIns="0" rIns="0" bIns="0" rtlCol="0" anchor="ctr"/>
-          <a:lstStyle/>
-          <a:p>
-            <a:pPr indent="0" marL="0">
-              <a:buNone/>
-            </a:pPr>
-            <a:r>
-              <a:rPr lang="en-US" sz="1500" dirty="0">
-                <a:solidFill>
-                  <a:srgbClr val="F0B429"/>
-                </a:solidFill>
-                <a:latin typeface="Arial" pitchFamily="34" charset="0"/>
-                <a:ea typeface="Arial" pitchFamily="34" charset="-122"/>
-                <a:cs typeface="Arial" pitchFamily="34" charset="-120"/>
-              </a:rPr>
-              <a:t>—</a:t>
-            </a:r>
-            <a:endParaRPr lang="en-US" sz="1500" dirty="0"/>
-          </a:p>
-        </p:txBody>
-      </p:sp>
-      <p:sp>
-        <p:nvSpPr>
-          <p:cNvPr id="12" name="Text 10"/>
-          <p:cNvSpPr txBox="1"/>
-          <p:nvPr/>
-        </p:nvSpPr>
-        <p:spPr>
-          <a:xfrm>
-            <a:off x="914400" y="5239512"/>
-            <a:ext cx="10698480" cy="365760"/>
-          </a:xfrm>
-          <a:prstGeom prst="rect">
-            <a:avLst/>
-          </a:prstGeom>
-          <a:noFill/>
-          <a:ln/>
-        </p:spPr>
-        <p:txBody>
-          <a:bodyPr wrap="square" lIns="0" tIns="0" rIns="0" bIns="0" rtlCol="0" anchor="ctr"/>
-          <a:lstStyle/>
-          <a:p>
-            <a:pPr indent="0" marL="0">
-              <a:buNone/>
-            </a:pPr>
-            <a:r>
-              <a:rPr lang="en-US" sz="1500" b="1" dirty="0">
-                <a:solidFill>
-                  <a:srgbClr val="FFFFFF"/>
-                </a:solidFill>
-                <a:latin typeface="Arial" pitchFamily="34" charset="0"/>
-                <a:ea typeface="Arial" pitchFamily="34" charset="-122"/>
-                <a:cs typeface="Arial" pitchFamily="34" charset="-120"/>
-              </a:rPr>
-              <a:t>Every decision journaled</a:t>
-            </a:r>
-            <a:pPr indent="0" marL="0">
-              <a:buNone/>
-            </a:pPr>
-            <a:r>
-              <a:rPr lang="en-US" sz="1500" dirty="0">
-                <a:solidFill>
-                  <a:srgbClr val="A1A8B5"/>
-                </a:solidFill>
-                <a:latin typeface="Arial" pitchFamily="34" charset="0"/>
-                <a:ea typeface="Arial" pitchFamily="34" charset="-122"/>
-                <a:cs typeface="Arial" pitchFamily="34" charset="-120"/>
-              </a:rPr>
-              <a:t>   including the ones it refused to take</a:t>
-            </a:r>
-            <a:endParaRPr lang="en-US" sz="1500" dirty="0"/>
-          </a:p>
-        </p:txBody>
-      </p:sp>
-      <p:sp>
-        <p:nvSpPr>
-          <p:cNvPr id="13" name="Text 11"/>
-          <p:cNvSpPr txBox="1"/>
-          <p:nvPr/>
-        </p:nvSpPr>
-        <p:spPr>
-          <a:xfrm>
-            <a:off x="548640" y="6263640"/>
-            <a:ext cx="7772400" cy="274320"/>
-          </a:xfrm>
-          <a:prstGeom prst="rect">
-            <a:avLst/>
-          </a:prstGeom>
-          <a:noFill/>
-          <a:ln/>
-        </p:spPr>
-        <p:txBody>
-          <a:bodyPr wrap="square" lIns="0" tIns="0" rIns="0" bIns="0" rtlCol="0" anchor="ctr"/>
-          <a:lstStyle/>
-          <a:p>
-            <a:pPr indent="0" marL="0">
-              <a:buNone/>
-            </a:pPr>
-            <a:r>
-              <a:rPr lang="en-US" sz="900" dirty="0">
-                <a:solidFill>
-                  <a:srgbClr val="6B7686"/>
-                </a:solidFill>
-                <a:latin typeface="Courier New" pitchFamily="34" charset="0"/>
-                <a:ea typeface="Courier New" pitchFamily="34" charset="-122"/>
-                <a:cs typeface="Courier New" pitchFamily="34" charset="-120"/>
-              </a:rPr>
-              <a:t>Alpaca paper account PA38HG4D9653  ·  paper trading only. Hypothetical results; not investment advice.</a:t>
-            </a:r>
-            <a:endParaRPr lang="en-US" sz="900" dirty="0"/>
-          </a:p>
-        </p:txBody>
-      </p:sp>
-    </p:spTree>
-  </p:cSld>
-  <p:clrMapOvr>
-    <a:masterClrMapping/>
-  </p:clrMapOvr>
-</p:sld>
-</file>
-
-<file path=ppt/slides/slide9.xml><?xml version="1.0" encoding="utf-8"?>
-<p:sld xmlns:a="http://schemas.openxmlformats.org/drawingml/2006/main" xmlns:r="http://schemas.openxmlformats.org/officeDocument/2006/relationships" xmlns:p="http://schemas.openxmlformats.org/presentationml/2006/main">
-  <p:cSld name="Slide 9">
-    <p:bg>
-      <p:bgPr>
-        <a:solidFill>
-          <a:srgbClr val="0B0E14"/>
-        </a:solidFill>
-      </p:bgPr>
-    </p:bg>
-    <p:spTree>
-      <p:nvGrpSpPr>
-        <p:cNvPr id="1" name=""/>
-        <p:cNvGrpSpPr/>
-        <p:nvPr/>
-      </p:nvGrpSpPr>
-      <p:grpSpPr>
-        <a:xfrm>
-          <a:off x="0" y="0"/>
-          <a:ext cx="0" cy="0"/>
-          <a:chOff x="0" y="0"/>
-          <a:chExt cx="0" cy="0"/>
-        </a:xfrm>
-      </p:grpSpPr>
-      <p:sp>
-        <p:nvSpPr>
-          <p:cNvPr id="2" name="Text 0"/>
-          <p:cNvSpPr txBox="1"/>
-          <p:nvPr/>
-        </p:nvSpPr>
-        <p:spPr>
-          <a:xfrm>
-            <a:off x="548640" y="384048"/>
-            <a:ext cx="7315200" cy="274320"/>
-          </a:xfrm>
-          <a:prstGeom prst="rect">
-            <a:avLst/>
-          </a:prstGeom>
-          <a:noFill/>
-          <a:ln/>
-        </p:spPr>
-        <p:txBody>
-          <a:bodyPr wrap="square" rtlCol="0" anchor="ctr"/>
-          <a:lstStyle/>
-          <a:p>
-            <a:pPr indent="0" marL="0">
-              <a:buNone/>
-            </a:pPr>
-            <a:r>
-              <a:rPr lang="en-US" sz="1100" spc="200" kern="0" dirty="0">
-                <a:solidFill>
-                  <a:srgbClr val="6B7686"/>
-                </a:solidFill>
-                <a:latin typeface="Courier New" pitchFamily="34" charset="0"/>
-                <a:ea typeface="Courier New" pitchFamily="34" charset="-122"/>
-                <a:cs typeface="Courier New" pitchFamily="34" charset="-120"/>
-              </a:rPr>
-              <a:t>Required one-page write-up</a:t>
+              <a:t>One-page write-up</a:t>
             </a:r>
             <a:endParaRPr lang="en-US" sz="1100" dirty="0"/>
           </a:p>
@@ -9886,6 +9179,45 @@
               <a:t>Every scan appends one JSONL record with the full reasoning to logs/.</a:t>
             </a:r>
             <a:endParaRPr lang="en-US" sz="950" dirty="0"/>
+          </a:p>
+        </p:txBody>
+      </p:sp>
+      <p:sp>
+        <p:nvSpPr>
+          <p:cNvPr id="16" name="Text 14"/>
+          <p:cNvSpPr txBox="1"/>
+          <p:nvPr/>
+        </p:nvSpPr>
+        <p:spPr>
+          <a:xfrm>
+            <a:off x="548640" y="6263640"/>
+            <a:ext cx="5212080" cy="274320"/>
+          </a:xfrm>
+          <a:prstGeom prst="rect">
+            <a:avLst/>
+          </a:prstGeom>
+          <a:noFill/>
+          <a:ln/>
+        </p:spPr>
+        <p:txBody>
+          <a:bodyPr wrap="square" lIns="0" tIns="0" rIns="0" bIns="0" rtlCol="0" anchor="ctr"/>
+          <a:lstStyle/>
+          <a:p>
+            <a:pPr indent="0" marL="0">
+              <a:buNone/>
+            </a:pPr>
+            <a:r>
+              <a:rPr lang="en-US" sz="900" dirty="0">
+                <a:solidFill>
+                  <a:srgbClr val="6B7686"/>
+                </a:solidFill>
+                <a:latin typeface="Courier New" pitchFamily="34" charset="0"/>
+                <a:ea typeface="Courier New" pitchFamily="34" charset="-122"/>
+                <a:cs typeface="Courier New" pitchFamily="34" charset="-120"/>
+              </a:rPr>
+              <a:t>Paper trading only. Hypothetical results; not investment advice.</a:t>
+            </a:r>
+            <a:endParaRPr lang="en-US" sz="900" dirty="0"/>
           </a:p>
         </p:txBody>
       </p:sp>

--- a/assets/deck.pptx
+++ b/assets/deck.pptx
@@ -1044,7 +1044,7 @@
           <a:p>
             <a:r>
               <a:rPr lang="en-US" dirty="0"/>
-              <a:t>174 network-free tests cover the scorer, these gates, the sizing maths and the execution path.</a:t>
+              <a:t>The three tests are independent of each other, so they fail for different reasons. The band is the one worth pausing on: the threshold comes from that morning's own range, not from a constant someone tuned.</a:t>
             </a:r>
             <a:endParaRPr lang="en-US" dirty="0"/>
           </a:p>
@@ -1132,7 +1132,7 @@
           <a:p>
             <a:r>
               <a:rPr lang="en-US" dirty="0"/>
-              <a:t>Most submissions say 'LLM proposes, code decides'. This goes further: the model is wired so it cannot increase exposure even if it wanted to.</a:t>
+              <a:t>174 network-free tests cover the scorer, these gates, the sizing maths and the execution path.</a:t>
             </a:r>
             <a:endParaRPr lang="en-US" dirty="0"/>
           </a:p>
@@ -4893,7 +4893,7 @@
                 <a:ea typeface="Courier New" pitchFamily="34" charset="-122"/>
                 <a:cs typeface="Courier New" pitchFamily="34" charset="-120"/>
               </a:rPr>
-              <a:t>03  ·  Risk gates</a:t>
+              <a:t>03  ·  Decision logic</a:t>
             </a:r>
             <a:endParaRPr lang="en-US" sz="1100" dirty="0"/>
           </a:p>
@@ -4971,7 +4971,7 @@
                 <a:ea typeface="Arial" pitchFamily="34" charset="-122"/>
                 <a:cs typeface="Arial" pitchFamily="34" charset="-120"/>
               </a:rPr>
-              <a:t>Risk is structural before it is procedural</a:t>
+              <a:t>Three independent tests. A trade needs all three.</a:t>
             </a:r>
             <a:endParaRPr lang="en-US" sz="3400" dirty="0"/>
           </a:p>
@@ -4985,12 +4985,179 @@
         </p:nvSpPr>
         <p:spPr>
           <a:xfrm>
-            <a:off x="548640" y="1719072"/>
-            <a:ext cx="11091672" cy="713232"/>
+            <a:off x="548640" y="1874520"/>
+            <a:ext cx="2622042" cy="1417320"/>
           </a:xfrm>
           <a:prstGeom prst="roundRect">
             <a:avLst>
-              <a:gd name="adj" fmla="val 10256"/>
+              <a:gd name="adj" fmla="val 5161"/>
+            </a:avLst>
+          </a:prstGeom>
+          <a:solidFill>
+            <a:srgbClr val="141922"/>
+          </a:solidFill>
+          <a:ln w="12700">
+            <a:solidFill>
+              <a:srgbClr val="232A38"/>
+            </a:solidFill>
+            <a:prstDash val="solid"/>
+          </a:ln>
+        </p:spPr>
+      </p:sp>
+      <p:sp>
+        <p:nvSpPr>
+          <p:cNvPr id="6" name="Text 4"/>
+          <p:cNvSpPr txBox="1"/>
+          <p:nvPr/>
+        </p:nvSpPr>
+        <p:spPr>
+          <a:xfrm>
+            <a:off x="548640" y="2039112"/>
+            <a:ext cx="2622042" cy="274320"/>
+          </a:xfrm>
+          <a:prstGeom prst="rect">
+            <a:avLst/>
+          </a:prstGeom>
+          <a:noFill/>
+          <a:ln/>
+        </p:spPr>
+        <p:txBody>
+          <a:bodyPr wrap="square" rtlCol="0" anchor="ctr"/>
+          <a:lstStyle/>
+          <a:p>
+            <a:pPr algn="ctr" indent="0" marL="0">
+              <a:buNone/>
+            </a:pPr>
+            <a:r>
+              <a:rPr lang="en-US" sz="1200" b="1" dirty="0">
+                <a:solidFill>
+                  <a:srgbClr val="FFFFFF"/>
+                </a:solidFill>
+                <a:latin typeface="Courier New" pitchFamily="34" charset="0"/>
+                <a:ea typeface="Courier New" pitchFamily="34" charset="-122"/>
+                <a:cs typeface="Courier New" pitchFamily="34" charset="-120"/>
+              </a:rPr>
+              <a:t>SCORED SIGNAL</a:t>
+            </a:r>
+            <a:endParaRPr lang="en-US" sz="1200" dirty="0"/>
+          </a:p>
+        </p:txBody>
+      </p:sp>
+      <p:sp>
+        <p:nvSpPr>
+          <p:cNvPr id="7" name="Text 5"/>
+          <p:cNvSpPr txBox="1"/>
+          <p:nvPr/>
+        </p:nvSpPr>
+        <p:spPr>
+          <a:xfrm>
+            <a:off x="640080" y="2368296"/>
+            <a:ext cx="2439162" cy="795528"/>
+          </a:xfrm>
+          <a:prstGeom prst="rect">
+            <a:avLst/>
+          </a:prstGeom>
+          <a:noFill/>
+          <a:ln/>
+        </p:spPr>
+        <p:txBody>
+          <a:bodyPr wrap="square" rtlCol="0" anchor="ctr"/>
+          <a:lstStyle/>
+          <a:p>
+            <a:pPr algn="ctr" indent="0" marL="0">
+              <a:lnSpc>
+                <a:spcPct val="120000"/>
+              </a:lnSpc>
+              <a:buNone/>
+            </a:pPr>
+            <a:r>
+              <a:rPr lang="en-US" sz="1000" dirty="0">
+                <a:solidFill>
+                  <a:srgbClr val="A1A8B5"/>
+                </a:solidFill>
+                <a:latin typeface="Arial" pitchFamily="34" charset="0"/>
+                <a:ea typeface="Arial" pitchFamily="34" charset="-122"/>
+                <a:cs typeface="Arial" pitchFamily="34" charset="-120"/>
+              </a:rPr>
+              <a:t>VWAP, OR break, RSI,</a:t>
+            </a:r>
+            <a:endParaRPr lang="en-US" sz="1000" dirty="0"/>
+          </a:p>
+          <a:p>
+            <a:pPr algn="ctr" indent="0" marL="0">
+              <a:lnSpc>
+                <a:spcPct val="120000"/>
+              </a:lnSpc>
+              <a:buNone/>
+            </a:pPr>
+            <a:r>
+              <a:rPr lang="en-US" sz="1000" dirty="0">
+                <a:solidFill>
+                  <a:srgbClr val="A1A8B5"/>
+                </a:solidFill>
+                <a:latin typeface="Arial" pitchFamily="34" charset="0"/>
+                <a:ea typeface="Arial" pitchFamily="34" charset="-122"/>
+                <a:cs typeface="Arial" pitchFamily="34" charset="-120"/>
+              </a:rPr>
+              <a:t>EMA, relative volume</a:t>
+            </a:r>
+            <a:endParaRPr lang="en-US" sz="1000" dirty="0"/>
+          </a:p>
+        </p:txBody>
+      </p:sp>
+      <p:sp>
+        <p:nvSpPr>
+          <p:cNvPr id="8" name="Text 6"/>
+          <p:cNvSpPr txBox="1"/>
+          <p:nvPr/>
+        </p:nvSpPr>
+        <p:spPr>
+          <a:xfrm>
+            <a:off x="3170682" y="2400300"/>
+            <a:ext cx="201168" cy="365760"/>
+          </a:xfrm>
+          <a:prstGeom prst="rect">
+            <a:avLst/>
+          </a:prstGeom>
+          <a:noFill/>
+          <a:ln/>
+        </p:spPr>
+        <p:txBody>
+          <a:bodyPr wrap="square" rtlCol="0" anchor="ctr"/>
+          <a:lstStyle/>
+          <a:p>
+            <a:pPr algn="ctr" indent="0" marL="0">
+              <a:buNone/>
+            </a:pPr>
+            <a:r>
+              <a:rPr lang="en-US" sz="1600" dirty="0">
+                <a:solidFill>
+                  <a:srgbClr val="6B7686"/>
+                </a:solidFill>
+                <a:latin typeface="Arial" pitchFamily="34" charset="0"/>
+                <a:ea typeface="Arial" pitchFamily="34" charset="-122"/>
+                <a:cs typeface="Arial" pitchFamily="34" charset="-120"/>
+              </a:rPr>
+              <a:t>›</a:t>
+            </a:r>
+            <a:endParaRPr lang="en-US" sz="1600" dirty="0"/>
+          </a:p>
+        </p:txBody>
+      </p:sp>
+      <p:sp>
+        <p:nvSpPr>
+          <p:cNvPr id="9" name="Shape 7"/>
+          <p:cNvSpPr/>
+          <p:nvPr/>
+        </p:nvSpPr>
+        <p:spPr>
+          <a:xfrm>
+            <a:off x="3371850" y="1874520"/>
+            <a:ext cx="2622042" cy="1417320"/>
+          </a:xfrm>
+          <a:prstGeom prst="roundRect">
+            <a:avLst>
+              <a:gd name="adj" fmla="val 5161"/>
             </a:avLst>
           </a:prstGeom>
           <a:solidFill>
@@ -5006,44 +5173,72 @@
       </p:sp>
       <p:sp>
         <p:nvSpPr>
-          <p:cNvPr id="6" name="Text 4"/>
-          <p:cNvSpPr txBox="1"/>
-          <p:nvPr/>
-        </p:nvSpPr>
-        <p:spPr>
-          <a:xfrm>
-            <a:off x="822960" y="1719072"/>
-            <a:ext cx="10515600" cy="713232"/>
-          </a:xfrm>
-          <a:prstGeom prst="rect">
-            <a:avLst/>
-          </a:prstGeom>
-          <a:noFill/>
-          <a:ln/>
-        </p:spPr>
-        <p:txBody>
-          <a:bodyPr wrap="square" lIns="0" tIns="0" rIns="0" bIns="0" rtlCol="0" anchor="ctr"/>
-          <a:lstStyle/>
-          <a:p>
-            <a:pPr indent="0" marL="0">
-              <a:buNone/>
-            </a:pPr>
-            <a:r>
-              <a:rPr lang="en-US" sz="1400" b="1" dirty="0">
-                <a:solidFill>
-                  <a:srgbClr val="FFFFFF"/>
-                </a:solidFill>
-                <a:latin typeface="Arial" pitchFamily="34" charset="0"/>
-                <a:ea typeface="Arial" pitchFamily="34" charset="-122"/>
-                <a:cs typeface="Arial" pitchFamily="34" charset="-120"/>
-              </a:rPr>
-              <a:t>Single-leg long options only.  </a:t>
-            </a:r>
-            <a:pPr indent="0" marL="0">
-              <a:buNone/>
-            </a:pPr>
-            <a:r>
-              <a:rPr lang="en-US" sz="1400" dirty="0">
+          <p:cNvPr id="10" name="Text 8"/>
+          <p:cNvSpPr txBox="1"/>
+          <p:nvPr/>
+        </p:nvSpPr>
+        <p:spPr>
+          <a:xfrm>
+            <a:off x="3371850" y="2039112"/>
+            <a:ext cx="2622042" cy="274320"/>
+          </a:xfrm>
+          <a:prstGeom prst="rect">
+            <a:avLst/>
+          </a:prstGeom>
+          <a:noFill/>
+          <a:ln/>
+        </p:spPr>
+        <p:txBody>
+          <a:bodyPr wrap="square" rtlCol="0" anchor="ctr"/>
+          <a:lstStyle/>
+          <a:p>
+            <a:pPr algn="ctr" indent="0" marL="0">
+              <a:buNone/>
+            </a:pPr>
+            <a:r>
+              <a:rPr lang="en-US" sz="1200" b="1" dirty="0">
+                <a:solidFill>
+                  <a:srgbClr val="F0B429"/>
+                </a:solidFill>
+                <a:latin typeface="Courier New" pitchFamily="34" charset="0"/>
+                <a:ea typeface="Courier New" pitchFamily="34" charset="-122"/>
+                <a:cs typeface="Courier New" pitchFamily="34" charset="-120"/>
+              </a:rPr>
+              <a:t>NOISE BAND</a:t>
+            </a:r>
+            <a:endParaRPr lang="en-US" sz="1200" dirty="0"/>
+          </a:p>
+        </p:txBody>
+      </p:sp>
+      <p:sp>
+        <p:nvSpPr>
+          <p:cNvPr id="11" name="Text 9"/>
+          <p:cNvSpPr txBox="1"/>
+          <p:nvPr/>
+        </p:nvSpPr>
+        <p:spPr>
+          <a:xfrm>
+            <a:off x="3463290" y="2368296"/>
+            <a:ext cx="2439162" cy="795528"/>
+          </a:xfrm>
+          <a:prstGeom prst="rect">
+            <a:avLst/>
+          </a:prstGeom>
+          <a:noFill/>
+          <a:ln/>
+        </p:spPr>
+        <p:txBody>
+          <a:bodyPr wrap="square" rtlCol="0" anchor="ctr"/>
+          <a:lstStyle/>
+          <a:p>
+            <a:pPr algn="ctr" indent="0" marL="0">
+              <a:lnSpc>
+                <a:spcPct val="120000"/>
+              </a:lnSpc>
+              <a:buNone/>
+            </a:pPr>
+            <a:r>
+              <a:rPr lang="en-US" sz="1000" dirty="0">
                 <a:solidFill>
                   <a:srgbClr val="A1A8B5"/>
                 </a:solidFill>
@@ -5051,26 +5246,85 @@
                 <a:ea typeface="Arial" pitchFamily="34" charset="-122"/>
                 <a:cs typeface="Arial" pitchFamily="34" charset="-120"/>
               </a:rPr>
-              <a:t>Maximum loss is the premium paid - enforced by the instrument, not by code that has to remember.</a:t>
-            </a:r>
-            <a:endParaRPr lang="en-US" sz="1400" dirty="0"/>
-          </a:p>
-        </p:txBody>
-      </p:sp>
-      <p:sp>
-        <p:nvSpPr>
-          <p:cNvPr id="7" name="Shape 5"/>
+              <a:t>is the break bigger than</a:t>
+            </a:r>
+            <a:endParaRPr lang="en-US" sz="1000" dirty="0"/>
+          </a:p>
+          <a:p>
+            <a:pPr algn="ctr" indent="0" marL="0">
+              <a:lnSpc>
+                <a:spcPct val="120000"/>
+              </a:lnSpc>
+              <a:buNone/>
+            </a:pPr>
+            <a:r>
+              <a:rPr lang="en-US" sz="1000" dirty="0">
+                <a:solidFill>
+                  <a:srgbClr val="A1A8B5"/>
+                </a:solidFill>
+                <a:latin typeface="Arial" pitchFamily="34" charset="0"/>
+                <a:ea typeface="Arial" pitchFamily="34" charset="-122"/>
+                <a:cs typeface="Arial" pitchFamily="34" charset="-120"/>
+              </a:rPr>
+              <a:t>the symbol's own noise?</a:t>
+            </a:r>
+            <a:endParaRPr lang="en-US" sz="1000" dirty="0"/>
+          </a:p>
+        </p:txBody>
+      </p:sp>
+      <p:sp>
+        <p:nvSpPr>
+          <p:cNvPr id="12" name="Text 10"/>
+          <p:cNvSpPr txBox="1"/>
+          <p:nvPr/>
+        </p:nvSpPr>
+        <p:spPr>
+          <a:xfrm>
+            <a:off x="5993892" y="2400300"/>
+            <a:ext cx="201168" cy="365760"/>
+          </a:xfrm>
+          <a:prstGeom prst="rect">
+            <a:avLst/>
+          </a:prstGeom>
+          <a:noFill/>
+          <a:ln/>
+        </p:spPr>
+        <p:txBody>
+          <a:bodyPr wrap="square" rtlCol="0" anchor="ctr"/>
+          <a:lstStyle/>
+          <a:p>
+            <a:pPr algn="ctr" indent="0" marL="0">
+              <a:buNone/>
+            </a:pPr>
+            <a:r>
+              <a:rPr lang="en-US" sz="1600" dirty="0">
+                <a:solidFill>
+                  <a:srgbClr val="6B7686"/>
+                </a:solidFill>
+                <a:latin typeface="Arial" pitchFamily="34" charset="0"/>
+                <a:ea typeface="Arial" pitchFamily="34" charset="-122"/>
+                <a:cs typeface="Arial" pitchFamily="34" charset="-120"/>
+              </a:rPr>
+              <a:t>›</a:t>
+            </a:r>
+            <a:endParaRPr lang="en-US" sz="1600" dirty="0"/>
+          </a:p>
+        </p:txBody>
+      </p:sp>
+      <p:sp>
+        <p:nvSpPr>
+          <p:cNvPr id="13" name="Shape 11"/>
           <p:cNvSpPr/>
           <p:nvPr/>
         </p:nvSpPr>
         <p:spPr>
           <a:xfrm>
-            <a:off x="548640" y="2670048"/>
-            <a:ext cx="3557016" cy="1389888"/>
+            <a:off x="6195060" y="1874520"/>
+            <a:ext cx="2622042" cy="1417320"/>
           </a:xfrm>
           <a:prstGeom prst="roundRect">
             <a:avLst>
-              <a:gd name="adj" fmla="val 5263"/>
+              <a:gd name="adj" fmla="val 5161"/>
             </a:avLst>
           </a:prstGeom>
           <a:solidFill>
@@ -5086,72 +5340,72 @@
       </p:sp>
       <p:sp>
         <p:nvSpPr>
-          <p:cNvPr id="8" name="Text 6"/>
-          <p:cNvSpPr txBox="1"/>
-          <p:nvPr/>
-        </p:nvSpPr>
-        <p:spPr>
-          <a:xfrm>
-            <a:off x="841248" y="2871216"/>
-            <a:ext cx="2971800" cy="219456"/>
-          </a:xfrm>
-          <a:prstGeom prst="rect">
-            <a:avLst/>
-          </a:prstGeom>
-          <a:noFill/>
-          <a:ln/>
-        </p:spPr>
-        <p:txBody>
-          <a:bodyPr wrap="square" lIns="0" tIns="0" rIns="0" bIns="0" rtlCol="0" anchor="ctr"/>
-          <a:lstStyle/>
-          <a:p>
-            <a:pPr indent="0" marL="0">
-              <a:buNone/>
-            </a:pPr>
-            <a:r>
-              <a:rPr lang="en-US" sz="1000" spc="140" kern="0" dirty="0">
-                <a:solidFill>
-                  <a:srgbClr val="6B7686"/>
+          <p:cNvPr id="14" name="Text 12"/>
+          <p:cNvSpPr txBox="1"/>
+          <p:nvPr/>
+        </p:nvSpPr>
+        <p:spPr>
+          <a:xfrm>
+            <a:off x="6195060" y="2039112"/>
+            <a:ext cx="2622042" cy="274320"/>
+          </a:xfrm>
+          <a:prstGeom prst="rect">
+            <a:avLst/>
+          </a:prstGeom>
+          <a:noFill/>
+          <a:ln/>
+        </p:spPr>
+        <p:txBody>
+          <a:bodyPr wrap="square" rtlCol="0" anchor="ctr"/>
+          <a:lstStyle/>
+          <a:p>
+            <a:pPr algn="ctr" indent="0" marL="0">
+              <a:buNone/>
+            </a:pPr>
+            <a:r>
+              <a:rPr lang="en-US" sz="1200" b="1" dirty="0">
+                <a:solidFill>
+                  <a:srgbClr val="FFFFFF"/>
                 </a:solidFill>
                 <a:latin typeface="Courier New" pitchFamily="34" charset="0"/>
                 <a:ea typeface="Courier New" pitchFamily="34" charset="-122"/>
                 <a:cs typeface="Courier New" pitchFamily="34" charset="-120"/>
               </a:rPr>
-              <a:t>ONE-LOT GUARD</a:t>
-            </a:r>
-            <a:endParaRPr lang="en-US" sz="1000" dirty="0"/>
-          </a:p>
-        </p:txBody>
-      </p:sp>
-      <p:sp>
-        <p:nvSpPr>
-          <p:cNvPr id="9" name="Text 7"/>
-          <p:cNvSpPr txBox="1"/>
-          <p:nvPr/>
-        </p:nvSpPr>
-        <p:spPr>
-          <a:xfrm>
-            <a:off x="841248" y="3163824"/>
-            <a:ext cx="2971800" cy="731520"/>
-          </a:xfrm>
-          <a:prstGeom prst="rect">
-            <a:avLst/>
-          </a:prstGeom>
-          <a:noFill/>
-          <a:ln/>
-        </p:spPr>
-        <p:txBody>
-          <a:bodyPr wrap="square" lIns="0" tIns="0" rIns="0" bIns="0" rtlCol="0" anchor="t"/>
-          <a:lstStyle/>
-          <a:p>
-            <a:pPr indent="0" marL="0">
+              <a:t>LEADER REGIME</a:t>
+            </a:r>
+            <a:endParaRPr lang="en-US" sz="1200" dirty="0"/>
+          </a:p>
+        </p:txBody>
+      </p:sp>
+      <p:sp>
+        <p:nvSpPr>
+          <p:cNvPr id="15" name="Text 13"/>
+          <p:cNvSpPr txBox="1"/>
+          <p:nvPr/>
+        </p:nvSpPr>
+        <p:spPr>
+          <a:xfrm>
+            <a:off x="6286500" y="2368296"/>
+            <a:ext cx="2439162" cy="795528"/>
+          </a:xfrm>
+          <a:prstGeom prst="rect">
+            <a:avLst/>
+          </a:prstGeom>
+          <a:noFill/>
+          <a:ln/>
+        </p:spPr>
+        <p:txBody>
+          <a:bodyPr wrap="square" rtlCol="0" anchor="ctr"/>
+          <a:lstStyle/>
+          <a:p>
+            <a:pPr algn="ctr" indent="0" marL="0">
               <a:lnSpc>
                 <a:spcPct val="120000"/>
               </a:lnSpc>
               <a:buNone/>
             </a:pPr>
             <a:r>
-              <a:rPr lang="en-US" sz="1100" dirty="0">
+              <a:rPr lang="en-US" sz="1000" dirty="0">
                 <a:solidFill>
                   <a:srgbClr val="A1A8B5"/>
                 </a:solidFill>
@@ -5159,26 +5413,85 @@
                 <a:ea typeface="Arial" pitchFamily="34" charset="-122"/>
                 <a:cs typeface="Arial" pitchFamily="34" charset="-120"/>
               </a:rPr>
-              <a:t>Never a second open lot on a (symbol, direction) already held.</a:t>
-            </a:r>
-            <a:endParaRPr lang="en-US" sz="1100" dirty="0"/>
-          </a:p>
-        </p:txBody>
-      </p:sp>
-      <p:sp>
-        <p:nvSpPr>
-          <p:cNvPr id="10" name="Shape 8"/>
+              <a:t>5 of 8 mega-caps above</a:t>
+            </a:r>
+            <a:endParaRPr lang="en-US" sz="1000" dirty="0"/>
+          </a:p>
+          <a:p>
+            <a:pPr algn="ctr" indent="0" marL="0">
+              <a:lnSpc>
+                <a:spcPct val="120000"/>
+              </a:lnSpc>
+              <a:buNone/>
+            </a:pPr>
+            <a:r>
+              <a:rPr lang="en-US" sz="1000" dirty="0">
+                <a:solidFill>
+                  <a:srgbClr val="A1A8B5"/>
+                </a:solidFill>
+                <a:latin typeface="Arial" pitchFamily="34" charset="0"/>
+                <a:ea typeface="Arial" pitchFamily="34" charset="-122"/>
+                <a:cs typeface="Arial" pitchFamily="34" charset="-120"/>
+              </a:rPr>
+              <a:t>their 20-day average</a:t>
+            </a:r>
+            <a:endParaRPr lang="en-US" sz="1000" dirty="0"/>
+          </a:p>
+        </p:txBody>
+      </p:sp>
+      <p:sp>
+        <p:nvSpPr>
+          <p:cNvPr id="16" name="Text 14"/>
+          <p:cNvSpPr txBox="1"/>
+          <p:nvPr/>
+        </p:nvSpPr>
+        <p:spPr>
+          <a:xfrm>
+            <a:off x="8817102" y="2400300"/>
+            <a:ext cx="201168" cy="365760"/>
+          </a:xfrm>
+          <a:prstGeom prst="rect">
+            <a:avLst/>
+          </a:prstGeom>
+          <a:noFill/>
+          <a:ln/>
+        </p:spPr>
+        <p:txBody>
+          <a:bodyPr wrap="square" rtlCol="0" anchor="ctr"/>
+          <a:lstStyle/>
+          <a:p>
+            <a:pPr algn="ctr" indent="0" marL="0">
+              <a:buNone/>
+            </a:pPr>
+            <a:r>
+              <a:rPr lang="en-US" sz="1600" dirty="0">
+                <a:solidFill>
+                  <a:srgbClr val="6B7686"/>
+                </a:solidFill>
+                <a:latin typeface="Arial" pitchFamily="34" charset="0"/>
+                <a:ea typeface="Arial" pitchFamily="34" charset="-122"/>
+                <a:cs typeface="Arial" pitchFamily="34" charset="-120"/>
+              </a:rPr>
+              <a:t>›</a:t>
+            </a:r>
+            <a:endParaRPr lang="en-US" sz="1600" dirty="0"/>
+          </a:p>
+        </p:txBody>
+      </p:sp>
+      <p:sp>
+        <p:nvSpPr>
+          <p:cNvPr id="17" name="Shape 15"/>
           <p:cNvSpPr/>
           <p:nvPr/>
         </p:nvSpPr>
         <p:spPr>
           <a:xfrm>
-            <a:off x="4315968" y="2670048"/>
-            <a:ext cx="3557016" cy="1389888"/>
+            <a:off x="9018270" y="1874520"/>
+            <a:ext cx="2622042" cy="1417320"/>
           </a:xfrm>
           <a:prstGeom prst="roundRect">
             <a:avLst>
-              <a:gd name="adj" fmla="val 5263"/>
+              <a:gd name="adj" fmla="val 5161"/>
             </a:avLst>
           </a:prstGeom>
           <a:solidFill>
@@ -5194,72 +5507,72 @@
       </p:sp>
       <p:sp>
         <p:nvSpPr>
-          <p:cNvPr id="11" name="Text 9"/>
-          <p:cNvSpPr txBox="1"/>
-          <p:nvPr/>
-        </p:nvSpPr>
-        <p:spPr>
-          <a:xfrm>
-            <a:off x="4608576" y="2871216"/>
-            <a:ext cx="2971800" cy="219456"/>
-          </a:xfrm>
-          <a:prstGeom prst="rect">
-            <a:avLst/>
-          </a:prstGeom>
-          <a:noFill/>
-          <a:ln/>
-        </p:spPr>
-        <p:txBody>
-          <a:bodyPr wrap="square" lIns="0" tIns="0" rIns="0" bIns="0" rtlCol="0" anchor="ctr"/>
-          <a:lstStyle/>
-          <a:p>
-            <a:pPr indent="0" marL="0">
-              <a:buNone/>
-            </a:pPr>
-            <a:r>
-              <a:rPr lang="en-US" sz="1000" spc="140" kern="0" dirty="0">
-                <a:solidFill>
-                  <a:srgbClr val="6B7686"/>
+          <p:cNvPr id="18" name="Text 16"/>
+          <p:cNvSpPr txBox="1"/>
+          <p:nvPr/>
+        </p:nvSpPr>
+        <p:spPr>
+          <a:xfrm>
+            <a:off x="9018270" y="2039112"/>
+            <a:ext cx="2622042" cy="274320"/>
+          </a:xfrm>
+          <a:prstGeom prst="rect">
+            <a:avLst/>
+          </a:prstGeom>
+          <a:noFill/>
+          <a:ln/>
+        </p:spPr>
+        <p:txBody>
+          <a:bodyPr wrap="square" rtlCol="0" anchor="ctr"/>
+          <a:lstStyle/>
+          <a:p>
+            <a:pPr algn="ctr" indent="0" marL="0">
+              <a:buNone/>
+            </a:pPr>
+            <a:r>
+              <a:rPr lang="en-US" sz="1200" b="1" dirty="0">
+                <a:solidFill>
+                  <a:srgbClr val="FFFFFF"/>
                 </a:solidFill>
                 <a:latin typeface="Courier New" pitchFamily="34" charset="0"/>
                 <a:ea typeface="Courier New" pitchFamily="34" charset="-122"/>
                 <a:cs typeface="Courier New" pitchFamily="34" charset="-120"/>
               </a:rPr>
-              <a:t>ONE DIRECTION / UNDERLYING</a:t>
-            </a:r>
-            <a:endParaRPr lang="en-US" sz="1000" dirty="0"/>
-          </a:p>
-        </p:txBody>
-      </p:sp>
-      <p:sp>
-        <p:nvSpPr>
-          <p:cNvPr id="12" name="Text 10"/>
-          <p:cNvSpPr txBox="1"/>
-          <p:nvPr/>
-        </p:nvSpPr>
-        <p:spPr>
-          <a:xfrm>
-            <a:off x="4608576" y="3163824"/>
-            <a:ext cx="2971800" cy="731520"/>
-          </a:xfrm>
-          <a:prstGeom prst="rect">
-            <a:avLst/>
-          </a:prstGeom>
-          <a:noFill/>
-          <a:ln/>
-        </p:spPr>
-        <p:txBody>
-          <a:bodyPr wrap="square" lIns="0" tIns="0" rIns="0" bIns="0" rtlCol="0" anchor="t"/>
-          <a:lstStyle/>
-          <a:p>
-            <a:pPr indent="0" marL="0">
+              <a:t>ORDER</a:t>
+            </a:r>
+            <a:endParaRPr lang="en-US" sz="1200" dirty="0"/>
+          </a:p>
+        </p:txBody>
+      </p:sp>
+      <p:sp>
+        <p:nvSpPr>
+          <p:cNvPr id="19" name="Text 17"/>
+          <p:cNvSpPr txBox="1"/>
+          <p:nvPr/>
+        </p:nvSpPr>
+        <p:spPr>
+          <a:xfrm>
+            <a:off x="9109710" y="2368296"/>
+            <a:ext cx="2439162" cy="795528"/>
+          </a:xfrm>
+          <a:prstGeom prst="rect">
+            <a:avLst/>
+          </a:prstGeom>
+          <a:noFill/>
+          <a:ln/>
+        </p:spPr>
+        <p:txBody>
+          <a:bodyPr wrap="square" rtlCol="0" anchor="ctr"/>
+          <a:lstStyle/>
+          <a:p>
+            <a:pPr algn="ctr" indent="0" marL="0">
               <a:lnSpc>
                 <a:spcPct val="120000"/>
               </a:lnSpc>
               <a:buNone/>
             </a:pPr>
             <a:r>
-              <a:rPr lang="en-US" sz="1100" dirty="0">
+              <a:rPr lang="en-US" sz="1000" dirty="0">
                 <a:solidFill>
                   <a:srgbClr val="A1A8B5"/>
                 </a:solidFill>
@@ -5267,26 +5580,46 @@
                 <a:ea typeface="Arial" pitchFamily="34" charset="-122"/>
                 <a:cs typeface="Arial" pitchFamily="34" charset="-120"/>
               </a:rPr>
-              <a:t>No simultaneous call and put on the same symbol.</a:t>
-            </a:r>
-            <a:endParaRPr lang="en-US" sz="1100" dirty="0"/>
-          </a:p>
-        </p:txBody>
-      </p:sp>
-      <p:sp>
-        <p:nvSpPr>
-          <p:cNvPr id="13" name="Shape 11"/>
+              <a:t>ATM long via the</a:t>
+            </a:r>
+            <a:endParaRPr lang="en-US" sz="1000" dirty="0"/>
+          </a:p>
+          <a:p>
+            <a:pPr algn="ctr" indent="0" marL="0">
+              <a:lnSpc>
+                <a:spcPct val="120000"/>
+              </a:lnSpc>
+              <a:buNone/>
+            </a:pPr>
+            <a:r>
+              <a:rPr lang="en-US" sz="1000" dirty="0">
+                <a:solidFill>
+                  <a:srgbClr val="A1A8B5"/>
+                </a:solidFill>
+                <a:latin typeface="Arial" pitchFamily="34" charset="0"/>
+                <a:ea typeface="Arial" pitchFamily="34" charset="-122"/>
+                <a:cs typeface="Arial" pitchFamily="34" charset="-120"/>
+              </a:rPr>
+              <a:t>Alpaca CLI</a:t>
+            </a:r>
+            <a:endParaRPr lang="en-US" sz="1000" dirty="0"/>
+          </a:p>
+        </p:txBody>
+      </p:sp>
+      <p:sp>
+        <p:nvSpPr>
+          <p:cNvPr id="20" name="Shape 18"/>
           <p:cNvSpPr/>
           <p:nvPr/>
         </p:nvSpPr>
         <p:spPr>
           <a:xfrm>
-            <a:off x="8083296" y="2670048"/>
-            <a:ext cx="3557016" cy="1389888"/>
+            <a:off x="548640" y="3611880"/>
+            <a:ext cx="5440680" cy="1691640"/>
           </a:xfrm>
           <a:prstGeom prst="roundRect">
             <a:avLst>
-              <a:gd name="adj" fmla="val 5263"/>
+              <a:gd name="adj" fmla="val 4324"/>
             </a:avLst>
           </a:prstGeom>
           <a:solidFill>
@@ -5302,14 +5635,14 @@
       </p:sp>
       <p:sp>
         <p:nvSpPr>
-          <p:cNvPr id="14" name="Text 12"/>
-          <p:cNvSpPr txBox="1"/>
-          <p:nvPr/>
-        </p:nvSpPr>
-        <p:spPr>
-          <a:xfrm>
-            <a:off x="8375904" y="2871216"/>
-            <a:ext cx="2971800" cy="219456"/>
+          <p:cNvPr id="21" name="Text 19"/>
+          <p:cNvSpPr txBox="1"/>
+          <p:nvPr/>
+        </p:nvSpPr>
+        <p:spPr>
+          <a:xfrm>
+            <a:off x="841248" y="3813048"/>
+            <a:ext cx="4855464" cy="219456"/>
           </a:xfrm>
           <a:prstGeom prst="rect">
             <a:avLst/>
@@ -5333,7 +5666,7 @@
                 <a:ea typeface="Courier New" pitchFamily="34" charset="-122"/>
                 <a:cs typeface="Courier New" pitchFamily="34" charset="-120"/>
               </a:rPr>
-              <a:t>ENTRY DEDUP · 30 MIN</a:t>
+              <a:t>THE HALF-OPENING-RANGE BAND</a:t>
             </a:r>
             <a:endParaRPr lang="en-US" sz="1000" dirty="0"/>
           </a:p>
@@ -5341,14 +5674,53 @@
       </p:sp>
       <p:sp>
         <p:nvSpPr>
-          <p:cNvPr id="15" name="Text 13"/>
-          <p:cNvSpPr txBox="1"/>
-          <p:nvPr/>
-        </p:nvSpPr>
-        <p:spPr>
-          <a:xfrm>
-            <a:off x="8375904" y="3163824"/>
-            <a:ext cx="2971800" cy="731520"/>
+          <p:cNvPr id="22" name="Text 20"/>
+          <p:cNvSpPr txBox="1"/>
+          <p:nvPr/>
+        </p:nvSpPr>
+        <p:spPr>
+          <a:xfrm>
+            <a:off x="841248" y="4105656"/>
+            <a:ext cx="4855464" cy="411480"/>
+          </a:xfrm>
+          <a:prstGeom prst="rect">
+            <a:avLst/>
+          </a:prstGeom>
+          <a:noFill/>
+          <a:ln/>
+        </p:spPr>
+        <p:txBody>
+          <a:bodyPr wrap="square" lIns="0" tIns="0" rIns="0" bIns="0" rtlCol="0" anchor="ctr"/>
+          <a:lstStyle/>
+          <a:p>
+            <a:pPr indent="0" marL="0">
+              <a:buNone/>
+            </a:pPr>
+            <a:r>
+              <a:rPr lang="en-US" sz="2200" b="1" dirty="0">
+                <a:solidFill>
+                  <a:srgbClr val="F0B429"/>
+                </a:solidFill>
+                <a:latin typeface="Arial" pitchFamily="34" charset="0"/>
+                <a:ea typeface="Arial" pitchFamily="34" charset="-122"/>
+                <a:cs typeface="Arial" pitchFamily="34" charset="-120"/>
+              </a:rPr>
+              <a:t>noise, not signal</a:t>
+            </a:r>
+            <a:endParaRPr lang="en-US" sz="2200" dirty="0"/>
+          </a:p>
+        </p:txBody>
+      </p:sp>
+      <p:sp>
+        <p:nvSpPr>
+          <p:cNvPr id="23" name="Text 21"/>
+          <p:cNvSpPr txBox="1"/>
+          <p:nvPr/>
+        </p:nvSpPr>
+        <p:spPr>
+          <a:xfrm>
+            <a:off x="841248" y="4572000"/>
+            <a:ext cx="4855464" cy="566928"/>
           </a:xfrm>
           <a:prstGeom prst="rect">
             <a:avLst/>
@@ -5375,7 +5747,7 @@
                 <a:ea typeface="Arial" pitchFamily="34" charset="-122"/>
                 <a:cs typeface="Arial" pitchFamily="34" charset="-120"/>
               </a:rPr>
-              <a:t>Entry-anchored, so a persistent score cannot stack the same name.</a:t>
+              <a:t>A break only counts if it clears half of that symbol's own opening range. The bar is set by the morning's actual behaviour rather than a fixed number, so a quiet SPY and a wild IWM are not judged the same way.</a:t>
             </a:r>
             <a:endParaRPr lang="en-US" sz="1100" dirty="0"/>
           </a:p>
@@ -5383,18 +5755,18 @@
       </p:sp>
       <p:sp>
         <p:nvSpPr>
-          <p:cNvPr id="16" name="Shape 14"/>
+          <p:cNvPr id="24" name="Shape 22"/>
           <p:cNvSpPr/>
           <p:nvPr/>
         </p:nvSpPr>
         <p:spPr>
           <a:xfrm>
-            <a:off x="548640" y="4242816"/>
-            <a:ext cx="3557016" cy="1389888"/>
+            <a:off x="6199632" y="3611880"/>
+            <a:ext cx="5440680" cy="1691640"/>
           </a:xfrm>
           <a:prstGeom prst="roundRect">
             <a:avLst>
-              <a:gd name="adj" fmla="val 5263"/>
+              <a:gd name="adj" fmla="val 4324"/>
             </a:avLst>
           </a:prstGeom>
           <a:solidFill>
@@ -5410,14 +5782,14 @@
       </p:sp>
       <p:sp>
         <p:nvSpPr>
-          <p:cNvPr id="17" name="Text 15"/>
-          <p:cNvSpPr txBox="1"/>
-          <p:nvPr/>
-        </p:nvSpPr>
-        <p:spPr>
-          <a:xfrm>
-            <a:off x="841248" y="4443984"/>
-            <a:ext cx="2971800" cy="219456"/>
+          <p:cNvPr id="25" name="Text 23"/>
+          <p:cNvSpPr txBox="1"/>
+          <p:nvPr/>
+        </p:nvSpPr>
+        <p:spPr>
+          <a:xfrm>
+            <a:off x="6492240" y="3813048"/>
+            <a:ext cx="4855464" cy="219456"/>
           </a:xfrm>
           <a:prstGeom prst="rect">
             <a:avLst/>
@@ -5441,7 +5813,7 @@
                 <a:ea typeface="Courier New" pitchFamily="34" charset="-122"/>
                 <a:cs typeface="Courier New" pitchFamily="34" charset="-120"/>
               </a:rPr>
-              <a:t>ADAPTIVE SIZING</a:t>
+              <a:t>LEADER BREADTH</a:t>
             </a:r>
             <a:endParaRPr lang="en-US" sz="1000" dirty="0"/>
           </a:p>
@@ -5449,14 +5821,53 @@
       </p:sp>
       <p:sp>
         <p:nvSpPr>
-          <p:cNvPr id="18" name="Text 16"/>
-          <p:cNvSpPr txBox="1"/>
-          <p:nvPr/>
-        </p:nvSpPr>
-        <p:spPr>
-          <a:xfrm>
-            <a:off x="841248" y="4736592"/>
-            <a:ext cx="2971800" cy="731520"/>
+          <p:cNvPr id="26" name="Text 24"/>
+          <p:cNvSpPr txBox="1"/>
+          <p:nvPr/>
+        </p:nvSpPr>
+        <p:spPr>
+          <a:xfrm>
+            <a:off x="6492240" y="4105656"/>
+            <a:ext cx="4855464" cy="411480"/>
+          </a:xfrm>
+          <a:prstGeom prst="rect">
+            <a:avLst/>
+          </a:prstGeom>
+          <a:noFill/>
+          <a:ln/>
+        </p:spPr>
+        <p:txBody>
+          <a:bodyPr wrap="square" lIns="0" tIns="0" rIns="0" bIns="0" rtlCol="0" anchor="ctr"/>
+          <a:lstStyle/>
+          <a:p>
+            <a:pPr indent="0" marL="0">
+              <a:buNone/>
+            </a:pPr>
+            <a:r>
+              <a:rPr lang="en-US" sz="2000" b="1" dirty="0">
+                <a:solidFill>
+                  <a:srgbClr val="FFFFFF"/>
+                </a:solidFill>
+                <a:latin typeface="Arial" pitchFamily="34" charset="0"/>
+                <a:ea typeface="Arial" pitchFamily="34" charset="-122"/>
+                <a:cs typeface="Arial" pitchFamily="34" charset="-120"/>
+              </a:rPr>
+              <a:t>removes, never adds</a:t>
+            </a:r>
+            <a:endParaRPr lang="en-US" sz="2000" dirty="0"/>
+          </a:p>
+        </p:txBody>
+      </p:sp>
+      <p:sp>
+        <p:nvSpPr>
+          <p:cNvPr id="27" name="Text 25"/>
+          <p:cNvSpPr txBox="1"/>
+          <p:nvPr/>
+        </p:nvSpPr>
+        <p:spPr>
+          <a:xfrm>
+            <a:off x="6492240" y="4572000"/>
+            <a:ext cx="4855464" cy="566928"/>
           </a:xfrm>
           <a:prstGeom prst="rect">
             <a:avLst/>
@@ -5483,7 +5894,7 @@
                 <a:ea typeface="Arial" pitchFamily="34" charset="-122"/>
                 <a:cs typeface="Arial" pitchFamily="34" charset="-120"/>
               </a:rPr>
-              <a:t>Trimmed to the account's real options buying power - an expensive contract sizes down, never rejects.</a:t>
+              <a:t>5 of 8 mega-caps above their 20-day average as of the last completed session. The regime can only rule out the opposed direction - it never creates a trade the score did not already propose.</a:t>
             </a:r>
             <a:endParaRPr lang="en-US" sz="1100" dirty="0"/>
           </a:p>
@@ -5491,41 +5902,14 @@
       </p:sp>
       <p:sp>
         <p:nvSpPr>
-          <p:cNvPr id="19" name="Shape 17"/>
-          <p:cNvSpPr/>
-          <p:nvPr/>
-        </p:nvSpPr>
-        <p:spPr>
-          <a:xfrm>
-            <a:off x="4315968" y="4242816"/>
-            <a:ext cx="3557016" cy="1389888"/>
-          </a:xfrm>
-          <a:prstGeom prst="roundRect">
-            <a:avLst>
-              <a:gd name="adj" fmla="val 5263"/>
-            </a:avLst>
-          </a:prstGeom>
-          <a:solidFill>
-            <a:srgbClr val="141922"/>
-          </a:solidFill>
-          <a:ln w="12700">
-            <a:solidFill>
-              <a:srgbClr val="232A38"/>
-            </a:solidFill>
-            <a:prstDash val="solid"/>
-          </a:ln>
-        </p:spPr>
-      </p:sp>
-      <p:sp>
-        <p:nvSpPr>
-          <p:cNvPr id="20" name="Text 18"/>
-          <p:cNvSpPr txBox="1"/>
-          <p:nvPr/>
-        </p:nvSpPr>
-        <p:spPr>
-          <a:xfrm>
-            <a:off x="4608576" y="4443984"/>
-            <a:ext cx="2971800" cy="219456"/>
+          <p:cNvPr id="28" name="Text 26"/>
+          <p:cNvSpPr txBox="1"/>
+          <p:nvPr/>
+        </p:nvSpPr>
+        <p:spPr>
+          <a:xfrm>
+            <a:off x="548640" y="5486400"/>
+            <a:ext cx="11091672" cy="365760"/>
           </a:xfrm>
           <a:prstGeom prst="rect">
             <a:avLst/>
@@ -5541,49 +5925,7 @@
               <a:buNone/>
             </a:pPr>
             <a:r>
-              <a:rPr lang="en-US" sz="1000" spc="140" kern="0" dirty="0">
-                <a:solidFill>
-                  <a:srgbClr val="6B7686"/>
-                </a:solidFill>
-                <a:latin typeface="Courier New" pitchFamily="34" charset="0"/>
-                <a:ea typeface="Courier New" pitchFamily="34" charset="-122"/>
-                <a:cs typeface="Courier New" pitchFamily="34" charset="-120"/>
-              </a:rPr>
-              <a:t>SESSION WINDOW</a:t>
-            </a:r>
-            <a:endParaRPr lang="en-US" sz="1000" dirty="0"/>
-          </a:p>
-        </p:txBody>
-      </p:sp>
-      <p:sp>
-        <p:nvSpPr>
-          <p:cNvPr id="21" name="Text 19"/>
-          <p:cNvSpPr txBox="1"/>
-          <p:nvPr/>
-        </p:nvSpPr>
-        <p:spPr>
-          <a:xfrm>
-            <a:off x="4608576" y="4736592"/>
-            <a:ext cx="2971800" cy="731520"/>
-          </a:xfrm>
-          <a:prstGeom prst="rect">
-            <a:avLst/>
-          </a:prstGeom>
-          <a:noFill/>
-          <a:ln/>
-        </p:spPr>
-        <p:txBody>
-          <a:bodyPr wrap="square" lIns="0" tIns="0" rIns="0" bIns="0" rtlCol="0" anchor="t"/>
-          <a:lstStyle/>
-          <a:p>
-            <a:pPr indent="0" marL="0">
-              <a:lnSpc>
-                <a:spcPct val="120000"/>
-              </a:lnSpc>
-              <a:buNone/>
-            </a:pPr>
-            <a:r>
-              <a:rPr lang="en-US" sz="1100" dirty="0">
+              <a:rPr lang="en-US" sz="1200" dirty="0">
                 <a:solidFill>
                   <a:srgbClr val="A1A8B5"/>
                 </a:solidFill>
@@ -5591,156 +5933,9 @@
                 <a:ea typeface="Arial" pitchFamily="34" charset="-122"/>
                 <a:cs typeface="Arial" pitchFamily="34" charset="-120"/>
               </a:rPr>
-              <a:t>No entry after 15:00 ET. Hard flatten at 15:50 - a 0DTE never reaches expiry.</a:t>
-            </a:r>
-            <a:endParaRPr lang="en-US" sz="1100" dirty="0"/>
-          </a:p>
-        </p:txBody>
-      </p:sp>
-      <p:sp>
-        <p:nvSpPr>
-          <p:cNvPr id="22" name="Shape 20"/>
-          <p:cNvSpPr/>
-          <p:nvPr/>
-        </p:nvSpPr>
-        <p:spPr>
-          <a:xfrm>
-            <a:off x="8083296" y="4242816"/>
-            <a:ext cx="3557016" cy="1389888"/>
-          </a:xfrm>
-          <a:prstGeom prst="roundRect">
-            <a:avLst>
-              <a:gd name="adj" fmla="val 5263"/>
-            </a:avLst>
-          </a:prstGeom>
-          <a:solidFill>
-            <a:srgbClr val="141922"/>
-          </a:solidFill>
-          <a:ln w="12700">
-            <a:solidFill>
-              <a:srgbClr val="232A38"/>
-            </a:solidFill>
-            <a:prstDash val="solid"/>
-          </a:ln>
-        </p:spPr>
-      </p:sp>
-      <p:sp>
-        <p:nvSpPr>
-          <p:cNvPr id="23" name="Text 21"/>
-          <p:cNvSpPr txBox="1"/>
-          <p:nvPr/>
-        </p:nvSpPr>
-        <p:spPr>
-          <a:xfrm>
-            <a:off x="8375904" y="4443984"/>
-            <a:ext cx="2971800" cy="219456"/>
-          </a:xfrm>
-          <a:prstGeom prst="rect">
-            <a:avLst/>
-          </a:prstGeom>
-          <a:noFill/>
-          <a:ln/>
-        </p:spPr>
-        <p:txBody>
-          <a:bodyPr wrap="square" lIns="0" tIns="0" rIns="0" bIns="0" rtlCol="0" anchor="ctr"/>
-          <a:lstStyle/>
-          <a:p>
-            <a:pPr indent="0" marL="0">
-              <a:buNone/>
-            </a:pPr>
-            <a:r>
-              <a:rPr lang="en-US" sz="1000" spc="140" kern="0" dirty="0">
-                <a:solidFill>
-                  <a:srgbClr val="6B7686"/>
-                </a:solidFill>
-                <a:latin typeface="Courier New" pitchFamily="34" charset="0"/>
-                <a:ea typeface="Courier New" pitchFamily="34" charset="-122"/>
-                <a:cs typeface="Courier New" pitchFamily="34" charset="-120"/>
-              </a:rPr>
-              <a:t>ORPHAN SWEEP</a:t>
-            </a:r>
-            <a:endParaRPr lang="en-US" sz="1000" dirty="0"/>
-          </a:p>
-        </p:txBody>
-      </p:sp>
-      <p:sp>
-        <p:nvSpPr>
-          <p:cNvPr id="24" name="Text 22"/>
-          <p:cNvSpPr txBox="1"/>
-          <p:nvPr/>
-        </p:nvSpPr>
-        <p:spPr>
-          <a:xfrm>
-            <a:off x="8375904" y="4736592"/>
-            <a:ext cx="2971800" cy="731520"/>
-          </a:xfrm>
-          <a:prstGeom prst="rect">
-            <a:avLst/>
-          </a:prstGeom>
-          <a:noFill/>
-          <a:ln/>
-        </p:spPr>
-        <p:txBody>
-          <a:bodyPr wrap="square" lIns="0" tIns="0" rIns="0" bIns="0" rtlCol="0" anchor="t"/>
-          <a:lstStyle/>
-          <a:p>
-            <a:pPr indent="0" marL="0">
-              <a:lnSpc>
-                <a:spcPct val="120000"/>
-              </a:lnSpc>
-              <a:buNone/>
-            </a:pPr>
-            <a:r>
-              <a:rPr lang="en-US" sz="1100" dirty="0">
-                <a:solidFill>
-                  <a:srgbClr val="A1A8B5"/>
-                </a:solidFill>
-                <a:latin typeface="Arial" pitchFamily="34" charset="0"/>
-                <a:ea typeface="Arial" pitchFamily="34" charset="-122"/>
-                <a:cs typeface="Arial" pitchFamily="34" charset="-120"/>
-              </a:rPr>
-              <a:t>Any option position the agent did not open is flattened at startup and at EOD.</a:t>
-            </a:r>
-            <a:endParaRPr lang="en-US" sz="1100" dirty="0"/>
-          </a:p>
-        </p:txBody>
-      </p:sp>
-      <p:sp>
-        <p:nvSpPr>
-          <p:cNvPr id="25" name="Text 23"/>
-          <p:cNvSpPr txBox="1"/>
-          <p:nvPr/>
-        </p:nvSpPr>
-        <p:spPr>
-          <a:xfrm>
-            <a:off x="548640" y="5870448"/>
-            <a:ext cx="11091672" cy="365760"/>
-          </a:xfrm>
-          <a:prstGeom prst="rect">
-            <a:avLst/>
-          </a:prstGeom>
-          <a:noFill/>
-          <a:ln/>
-        </p:spPr>
-        <p:txBody>
-          <a:bodyPr wrap="square" lIns="0" tIns="0" rIns="0" bIns="0" rtlCol="0" anchor="ctr"/>
-          <a:lstStyle/>
-          <a:p>
-            <a:pPr indent="0" marL="0">
-              <a:buNone/>
-            </a:pPr>
-            <a:r>
-              <a:rPr lang="en-US" sz="1100" dirty="0">
-                <a:solidFill>
-                  <a:srgbClr val="A1A8B5"/>
-                </a:solidFill>
-                <a:latin typeface="Arial" pitchFamily="34" charset="0"/>
-                <a:ea typeface="Arial" pitchFamily="34" charset="-122"/>
-                <a:cs typeface="Arial" pitchFamily="34" charset="-120"/>
-              </a:rPr>
-              <a:t>Exits ladder in both directions:  +40% scales out half and trails the runner by 40% of its peak gain  ·  -20% sells half, -40% the rest  ·  a 30-minute stop closes anything still under water  ·  15:50 flatten.</a:t>
-            </a:r>
-            <a:endParaRPr lang="en-US" sz="1100" dirty="0"/>
+              <a:t>A trade needs the score at or above 0.70, price outside the band, and the direction agreeing with the regime. Any one of the three says no and nothing is placed.</a:t>
+            </a:r>
+            <a:endParaRPr lang="en-US" sz="1200" dirty="0"/>
           </a:p>
         </p:txBody>
       </p:sp>
@@ -5809,7 +6004,7 @@
                 <a:ea typeface="Courier New" pitchFamily="34" charset="-122"/>
                 <a:cs typeface="Courier New" pitchFamily="34" charset="-120"/>
               </a:rPr>
-              <a:t>04  ·  AI logic</a:t>
+              <a:t>04  ·  Risk gates</a:t>
             </a:r>
             <a:endParaRPr lang="en-US" sz="1100" dirty="0"/>
           </a:p>
@@ -5887,7 +6082,7 @@
                 <a:ea typeface="Arial" pitchFamily="34" charset="-122"/>
                 <a:cs typeface="Arial" pitchFamily="34" charset="-120"/>
               </a:rPr>
-              <a:t>An AI that is structurally incapable of adding risk</a:t>
+              <a:t>Risk is structural before it is procedural</a:t>
             </a:r>
             <a:endParaRPr lang="en-US" sz="3400" dirty="0"/>
           </a:p>
@@ -5901,12 +6096,92 @@
         </p:nvSpPr>
         <p:spPr>
           <a:xfrm>
-            <a:off x="548640" y="1874520"/>
-            <a:ext cx="2622042" cy="1417320"/>
+            <a:off x="548640" y="1719072"/>
+            <a:ext cx="11091672" cy="713232"/>
           </a:xfrm>
           <a:prstGeom prst="roundRect">
             <a:avLst>
-              <a:gd name="adj" fmla="val 5161"/>
+              <a:gd name="adj" fmla="val 10256"/>
+            </a:avLst>
+          </a:prstGeom>
+          <a:solidFill>
+            <a:srgbClr val="141922"/>
+          </a:solidFill>
+          <a:ln w="12700">
+            <a:solidFill>
+              <a:srgbClr val="F0B429"/>
+            </a:solidFill>
+            <a:prstDash val="solid"/>
+          </a:ln>
+        </p:spPr>
+      </p:sp>
+      <p:sp>
+        <p:nvSpPr>
+          <p:cNvPr id="6" name="Text 4"/>
+          <p:cNvSpPr txBox="1"/>
+          <p:nvPr/>
+        </p:nvSpPr>
+        <p:spPr>
+          <a:xfrm>
+            <a:off x="822960" y="1719072"/>
+            <a:ext cx="10515600" cy="713232"/>
+          </a:xfrm>
+          <a:prstGeom prst="rect">
+            <a:avLst/>
+          </a:prstGeom>
+          <a:noFill/>
+          <a:ln/>
+        </p:spPr>
+        <p:txBody>
+          <a:bodyPr wrap="square" lIns="0" tIns="0" rIns="0" bIns="0" rtlCol="0" anchor="ctr"/>
+          <a:lstStyle/>
+          <a:p>
+            <a:pPr indent="0" marL="0">
+              <a:buNone/>
+            </a:pPr>
+            <a:r>
+              <a:rPr lang="en-US" sz="1400" b="1" dirty="0">
+                <a:solidFill>
+                  <a:srgbClr val="FFFFFF"/>
+                </a:solidFill>
+                <a:latin typeface="Arial" pitchFamily="34" charset="0"/>
+                <a:ea typeface="Arial" pitchFamily="34" charset="-122"/>
+                <a:cs typeface="Arial" pitchFamily="34" charset="-120"/>
+              </a:rPr>
+              <a:t>Single-leg long options only.  </a:t>
+            </a:r>
+            <a:pPr indent="0" marL="0">
+              <a:buNone/>
+            </a:pPr>
+            <a:r>
+              <a:rPr lang="en-US" sz="1400" dirty="0">
+                <a:solidFill>
+                  <a:srgbClr val="A1A8B5"/>
+                </a:solidFill>
+                <a:latin typeface="Arial" pitchFamily="34" charset="0"/>
+                <a:ea typeface="Arial" pitchFamily="34" charset="-122"/>
+                <a:cs typeface="Arial" pitchFamily="34" charset="-120"/>
+              </a:rPr>
+              <a:t>Maximum loss is the premium paid - enforced by the instrument, not by code that has to remember.</a:t>
+            </a:r>
+            <a:endParaRPr lang="en-US" sz="1400" dirty="0"/>
+          </a:p>
+        </p:txBody>
+      </p:sp>
+      <p:sp>
+        <p:nvSpPr>
+          <p:cNvPr id="7" name="Shape 5"/>
+          <p:cNvSpPr/>
+          <p:nvPr/>
+        </p:nvSpPr>
+        <p:spPr>
+          <a:xfrm>
+            <a:off x="548640" y="2670048"/>
+            <a:ext cx="3557016" cy="1389888"/>
+          </a:xfrm>
+          <a:prstGeom prst="roundRect">
+            <a:avLst>
+              <a:gd name="adj" fmla="val 5263"/>
             </a:avLst>
           </a:prstGeom>
           <a:solidFill>
@@ -5922,72 +6197,72 @@
       </p:sp>
       <p:sp>
         <p:nvSpPr>
-          <p:cNvPr id="6" name="Text 4"/>
-          <p:cNvSpPr txBox="1"/>
-          <p:nvPr/>
-        </p:nvSpPr>
-        <p:spPr>
-          <a:xfrm>
-            <a:off x="548640" y="2039112"/>
-            <a:ext cx="2622042" cy="274320"/>
-          </a:xfrm>
-          <a:prstGeom prst="rect">
-            <a:avLst/>
-          </a:prstGeom>
-          <a:noFill/>
-          <a:ln/>
-        </p:spPr>
-        <p:txBody>
-          <a:bodyPr wrap="square" rtlCol="0" anchor="ctr"/>
-          <a:lstStyle/>
-          <a:p>
-            <a:pPr algn="ctr" indent="0" marL="0">
-              <a:buNone/>
-            </a:pPr>
-            <a:r>
-              <a:rPr lang="en-US" sz="1200" b="1" dirty="0">
-                <a:solidFill>
-                  <a:srgbClr val="FFFFFF"/>
+          <p:cNvPr id="8" name="Text 6"/>
+          <p:cNvSpPr txBox="1"/>
+          <p:nvPr/>
+        </p:nvSpPr>
+        <p:spPr>
+          <a:xfrm>
+            <a:off x="841248" y="2871216"/>
+            <a:ext cx="2971800" cy="219456"/>
+          </a:xfrm>
+          <a:prstGeom prst="rect">
+            <a:avLst/>
+          </a:prstGeom>
+          <a:noFill/>
+          <a:ln/>
+        </p:spPr>
+        <p:txBody>
+          <a:bodyPr wrap="square" lIns="0" tIns="0" rIns="0" bIns="0" rtlCol="0" anchor="ctr"/>
+          <a:lstStyle/>
+          <a:p>
+            <a:pPr indent="0" marL="0">
+              <a:buNone/>
+            </a:pPr>
+            <a:r>
+              <a:rPr lang="en-US" sz="1000" spc="140" kern="0" dirty="0">
+                <a:solidFill>
+                  <a:srgbClr val="6B7686"/>
                 </a:solidFill>
                 <a:latin typeface="Courier New" pitchFamily="34" charset="0"/>
                 <a:ea typeface="Courier New" pitchFamily="34" charset="-122"/>
                 <a:cs typeface="Courier New" pitchFamily="34" charset="-120"/>
               </a:rPr>
-              <a:t>SCORED SIGNAL</a:t>
-            </a:r>
-            <a:endParaRPr lang="en-US" sz="1200" dirty="0"/>
-          </a:p>
-        </p:txBody>
-      </p:sp>
-      <p:sp>
-        <p:nvSpPr>
-          <p:cNvPr id="7" name="Text 5"/>
-          <p:cNvSpPr txBox="1"/>
-          <p:nvPr/>
-        </p:nvSpPr>
-        <p:spPr>
-          <a:xfrm>
-            <a:off x="640080" y="2368296"/>
-            <a:ext cx="2439162" cy="795528"/>
-          </a:xfrm>
-          <a:prstGeom prst="rect">
-            <a:avLst/>
-          </a:prstGeom>
-          <a:noFill/>
-          <a:ln/>
-        </p:spPr>
-        <p:txBody>
-          <a:bodyPr wrap="square" rtlCol="0" anchor="ctr"/>
-          <a:lstStyle/>
-          <a:p>
-            <a:pPr algn="ctr" indent="0" marL="0">
+              <a:t>ONE-LOT GUARD</a:t>
+            </a:r>
+            <a:endParaRPr lang="en-US" sz="1000" dirty="0"/>
+          </a:p>
+        </p:txBody>
+      </p:sp>
+      <p:sp>
+        <p:nvSpPr>
+          <p:cNvPr id="9" name="Text 7"/>
+          <p:cNvSpPr txBox="1"/>
+          <p:nvPr/>
+        </p:nvSpPr>
+        <p:spPr>
+          <a:xfrm>
+            <a:off x="841248" y="3163824"/>
+            <a:ext cx="2971800" cy="731520"/>
+          </a:xfrm>
+          <a:prstGeom prst="rect">
+            <a:avLst/>
+          </a:prstGeom>
+          <a:noFill/>
+          <a:ln/>
+        </p:spPr>
+        <p:txBody>
+          <a:bodyPr wrap="square" lIns="0" tIns="0" rIns="0" bIns="0" rtlCol="0" anchor="t"/>
+          <a:lstStyle/>
+          <a:p>
+            <a:pPr indent="0" marL="0">
               <a:lnSpc>
                 <a:spcPct val="120000"/>
               </a:lnSpc>
               <a:buNone/>
             </a:pPr>
             <a:r>
-              <a:rPr lang="en-US" sz="1000" dirty="0">
+              <a:rPr lang="en-US" sz="1100" dirty="0">
                 <a:solidFill>
                   <a:srgbClr val="A1A8B5"/>
                 </a:solidFill>
@@ -5995,85 +6270,26 @@
                 <a:ea typeface="Arial" pitchFamily="34" charset="-122"/>
                 <a:cs typeface="Arial" pitchFamily="34" charset="-120"/>
               </a:rPr>
-              <a:t>VWAP, OR break, RSI,</a:t>
-            </a:r>
-            <a:endParaRPr lang="en-US" sz="1000" dirty="0"/>
-          </a:p>
-          <a:p>
-            <a:pPr algn="ctr" indent="0" marL="0">
-              <a:lnSpc>
-                <a:spcPct val="120000"/>
-              </a:lnSpc>
-              <a:buNone/>
-            </a:pPr>
-            <a:r>
-              <a:rPr lang="en-US" sz="1000" dirty="0">
-                <a:solidFill>
-                  <a:srgbClr val="A1A8B5"/>
-                </a:solidFill>
-                <a:latin typeface="Arial" pitchFamily="34" charset="0"/>
-                <a:ea typeface="Arial" pitchFamily="34" charset="-122"/>
-                <a:cs typeface="Arial" pitchFamily="34" charset="-120"/>
-              </a:rPr>
-              <a:t>EMA, relative volume</a:t>
-            </a:r>
-            <a:endParaRPr lang="en-US" sz="1000" dirty="0"/>
-          </a:p>
-        </p:txBody>
-      </p:sp>
-      <p:sp>
-        <p:nvSpPr>
-          <p:cNvPr id="8" name="Text 6"/>
-          <p:cNvSpPr txBox="1"/>
-          <p:nvPr/>
-        </p:nvSpPr>
-        <p:spPr>
-          <a:xfrm>
-            <a:off x="3170682" y="2400300"/>
-            <a:ext cx="201168" cy="365760"/>
-          </a:xfrm>
-          <a:prstGeom prst="rect">
-            <a:avLst/>
-          </a:prstGeom>
-          <a:noFill/>
-          <a:ln/>
-        </p:spPr>
-        <p:txBody>
-          <a:bodyPr wrap="square" rtlCol="0" anchor="ctr"/>
-          <a:lstStyle/>
-          <a:p>
-            <a:pPr algn="ctr" indent="0" marL="0">
-              <a:buNone/>
-            </a:pPr>
-            <a:r>
-              <a:rPr lang="en-US" sz="1600" dirty="0">
-                <a:solidFill>
-                  <a:srgbClr val="6B7686"/>
-                </a:solidFill>
-                <a:latin typeface="Arial" pitchFamily="34" charset="0"/>
-                <a:ea typeface="Arial" pitchFamily="34" charset="-122"/>
-                <a:cs typeface="Arial" pitchFamily="34" charset="-120"/>
-              </a:rPr>
-              <a:t>›</a:t>
-            </a:r>
-            <a:endParaRPr lang="en-US" sz="1600" dirty="0"/>
-          </a:p>
-        </p:txBody>
-      </p:sp>
-      <p:sp>
-        <p:nvSpPr>
-          <p:cNvPr id="9" name="Shape 7"/>
+              <a:t>Never a second open lot on a (symbol, direction) already held.</a:t>
+            </a:r>
+            <a:endParaRPr lang="en-US" sz="1100" dirty="0"/>
+          </a:p>
+        </p:txBody>
+      </p:sp>
+      <p:sp>
+        <p:nvSpPr>
+          <p:cNvPr id="10" name="Shape 8"/>
           <p:cNvSpPr/>
           <p:nvPr/>
         </p:nvSpPr>
         <p:spPr>
           <a:xfrm>
-            <a:off x="3371850" y="1874520"/>
-            <a:ext cx="2622042" cy="1417320"/>
+            <a:off x="4315968" y="2670048"/>
+            <a:ext cx="3557016" cy="1389888"/>
           </a:xfrm>
           <a:prstGeom prst="roundRect">
             <a:avLst>
-              <a:gd name="adj" fmla="val 5161"/>
+              <a:gd name="adj" fmla="val 5263"/>
             </a:avLst>
           </a:prstGeom>
           <a:solidFill>
@@ -6089,72 +6305,72 @@
       </p:sp>
       <p:sp>
         <p:nvSpPr>
-          <p:cNvPr id="10" name="Text 8"/>
-          <p:cNvSpPr txBox="1"/>
-          <p:nvPr/>
-        </p:nvSpPr>
-        <p:spPr>
-          <a:xfrm>
-            <a:off x="3371850" y="2039112"/>
-            <a:ext cx="2622042" cy="274320"/>
-          </a:xfrm>
-          <a:prstGeom prst="rect">
-            <a:avLst/>
-          </a:prstGeom>
-          <a:noFill/>
-          <a:ln/>
-        </p:spPr>
-        <p:txBody>
-          <a:bodyPr wrap="square" rtlCol="0" anchor="ctr"/>
-          <a:lstStyle/>
-          <a:p>
-            <a:pPr algn="ctr" indent="0" marL="0">
-              <a:buNone/>
-            </a:pPr>
-            <a:r>
-              <a:rPr lang="en-US" sz="1200" b="1" dirty="0">
-                <a:solidFill>
-                  <a:srgbClr val="FFFFFF"/>
+          <p:cNvPr id="11" name="Text 9"/>
+          <p:cNvSpPr txBox="1"/>
+          <p:nvPr/>
+        </p:nvSpPr>
+        <p:spPr>
+          <a:xfrm>
+            <a:off x="4608576" y="2871216"/>
+            <a:ext cx="2971800" cy="219456"/>
+          </a:xfrm>
+          <a:prstGeom prst="rect">
+            <a:avLst/>
+          </a:prstGeom>
+          <a:noFill/>
+          <a:ln/>
+        </p:spPr>
+        <p:txBody>
+          <a:bodyPr wrap="square" lIns="0" tIns="0" rIns="0" bIns="0" rtlCol="0" anchor="ctr"/>
+          <a:lstStyle/>
+          <a:p>
+            <a:pPr indent="0" marL="0">
+              <a:buNone/>
+            </a:pPr>
+            <a:r>
+              <a:rPr lang="en-US" sz="1000" spc="140" kern="0" dirty="0">
+                <a:solidFill>
+                  <a:srgbClr val="6B7686"/>
                 </a:solidFill>
                 <a:latin typeface="Courier New" pitchFamily="34" charset="0"/>
                 <a:ea typeface="Courier New" pitchFamily="34" charset="-122"/>
                 <a:cs typeface="Courier New" pitchFamily="34" charset="-120"/>
               </a:rPr>
-              <a:t>RULES GATE</a:t>
-            </a:r>
-            <a:endParaRPr lang="en-US" sz="1200" dirty="0"/>
-          </a:p>
-        </p:txBody>
-      </p:sp>
-      <p:sp>
-        <p:nvSpPr>
-          <p:cNvPr id="11" name="Text 9"/>
-          <p:cNvSpPr txBox="1"/>
-          <p:nvPr/>
-        </p:nvSpPr>
-        <p:spPr>
-          <a:xfrm>
-            <a:off x="3463290" y="2368296"/>
-            <a:ext cx="2439162" cy="795528"/>
-          </a:xfrm>
-          <a:prstGeom prst="rect">
-            <a:avLst/>
-          </a:prstGeom>
-          <a:noFill/>
-          <a:ln/>
-        </p:spPr>
-        <p:txBody>
-          <a:bodyPr wrap="square" rtlCol="0" anchor="ctr"/>
-          <a:lstStyle/>
-          <a:p>
-            <a:pPr algn="ctr" indent="0" marL="0">
+              <a:t>ONE DIRECTION / UNDERLYING</a:t>
+            </a:r>
+            <a:endParaRPr lang="en-US" sz="1000" dirty="0"/>
+          </a:p>
+        </p:txBody>
+      </p:sp>
+      <p:sp>
+        <p:nvSpPr>
+          <p:cNvPr id="12" name="Text 10"/>
+          <p:cNvSpPr txBox="1"/>
+          <p:nvPr/>
+        </p:nvSpPr>
+        <p:spPr>
+          <a:xfrm>
+            <a:off x="4608576" y="3163824"/>
+            <a:ext cx="2971800" cy="731520"/>
+          </a:xfrm>
+          <a:prstGeom prst="rect">
+            <a:avLst/>
+          </a:prstGeom>
+          <a:noFill/>
+          <a:ln/>
+        </p:spPr>
+        <p:txBody>
+          <a:bodyPr wrap="square" lIns="0" tIns="0" rIns="0" bIns="0" rtlCol="0" anchor="t"/>
+          <a:lstStyle/>
+          <a:p>
+            <a:pPr indent="0" marL="0">
               <a:lnSpc>
                 <a:spcPct val="120000"/>
               </a:lnSpc>
               <a:buNone/>
             </a:pPr>
             <a:r>
-              <a:rPr lang="en-US" sz="1000" dirty="0">
+              <a:rPr lang="en-US" sz="1100" dirty="0">
                 <a:solidFill>
                   <a:srgbClr val="A1A8B5"/>
                 </a:solidFill>
@@ -6162,68 +6378,9 @@
                 <a:ea typeface="Arial" pitchFamily="34" charset="-122"/>
                 <a:cs typeface="Arial" pitchFamily="34" charset="-120"/>
               </a:rPr>
-              <a:t>score ≥ 0.70, outside the</a:t>
-            </a:r>
-            <a:endParaRPr lang="en-US" sz="1000" dirty="0"/>
-          </a:p>
-          <a:p>
-            <a:pPr algn="ctr" indent="0" marL="0">
-              <a:lnSpc>
-                <a:spcPct val="120000"/>
-              </a:lnSpc>
-              <a:buNone/>
-            </a:pPr>
-            <a:r>
-              <a:rPr lang="en-US" sz="1000" dirty="0">
-                <a:solidFill>
-                  <a:srgbClr val="A1A8B5"/>
-                </a:solidFill>
-                <a:latin typeface="Arial" pitchFamily="34" charset="0"/>
-                <a:ea typeface="Arial" pitchFamily="34" charset="-122"/>
-                <a:cs typeface="Arial" pitchFamily="34" charset="-120"/>
-              </a:rPr>
-              <a:t>half-OR band, regime agrees</a:t>
-            </a:r>
-            <a:endParaRPr lang="en-US" sz="1000" dirty="0"/>
-          </a:p>
-        </p:txBody>
-      </p:sp>
-      <p:sp>
-        <p:nvSpPr>
-          <p:cNvPr id="12" name="Text 10"/>
-          <p:cNvSpPr txBox="1"/>
-          <p:nvPr/>
-        </p:nvSpPr>
-        <p:spPr>
-          <a:xfrm>
-            <a:off x="5993892" y="2400300"/>
-            <a:ext cx="201168" cy="365760"/>
-          </a:xfrm>
-          <a:prstGeom prst="rect">
-            <a:avLst/>
-          </a:prstGeom>
-          <a:noFill/>
-          <a:ln/>
-        </p:spPr>
-        <p:txBody>
-          <a:bodyPr wrap="square" rtlCol="0" anchor="ctr"/>
-          <a:lstStyle/>
-          <a:p>
-            <a:pPr algn="ctr" indent="0" marL="0">
-              <a:buNone/>
-            </a:pPr>
-            <a:r>
-              <a:rPr lang="en-US" sz="1600" dirty="0">
-                <a:solidFill>
-                  <a:srgbClr val="6B7686"/>
-                </a:solidFill>
-                <a:latin typeface="Arial" pitchFamily="34" charset="0"/>
-                <a:ea typeface="Arial" pitchFamily="34" charset="-122"/>
-                <a:cs typeface="Arial" pitchFamily="34" charset="-120"/>
-              </a:rPr>
-              <a:t>›</a:t>
-            </a:r>
-            <a:endParaRPr lang="en-US" sz="1600" dirty="0"/>
+              <a:t>No simultaneous call and put on the same symbol.</a:t>
+            </a:r>
+            <a:endParaRPr lang="en-US" sz="1100" dirty="0"/>
           </a:p>
         </p:txBody>
       </p:sp>
@@ -6235,179 +6392,12 @@
         </p:nvSpPr>
         <p:spPr>
           <a:xfrm>
-            <a:off x="6195060" y="1874520"/>
-            <a:ext cx="2622042" cy="1417320"/>
+            <a:off x="8083296" y="2670048"/>
+            <a:ext cx="3557016" cy="1389888"/>
           </a:xfrm>
           <a:prstGeom prst="roundRect">
             <a:avLst>
-              <a:gd name="adj" fmla="val 5161"/>
-            </a:avLst>
-          </a:prstGeom>
-          <a:solidFill>
-            <a:srgbClr val="141922"/>
-          </a:solidFill>
-          <a:ln w="12700">
-            <a:solidFill>
-              <a:srgbClr val="F0B429"/>
-            </a:solidFill>
-            <a:prstDash val="solid"/>
-          </a:ln>
-        </p:spPr>
-      </p:sp>
-      <p:sp>
-        <p:nvSpPr>
-          <p:cNvPr id="14" name="Text 12"/>
-          <p:cNvSpPr txBox="1"/>
-          <p:nvPr/>
-        </p:nvSpPr>
-        <p:spPr>
-          <a:xfrm>
-            <a:off x="6195060" y="2039112"/>
-            <a:ext cx="2622042" cy="274320"/>
-          </a:xfrm>
-          <a:prstGeom prst="rect">
-            <a:avLst/>
-          </a:prstGeom>
-          <a:noFill/>
-          <a:ln/>
-        </p:spPr>
-        <p:txBody>
-          <a:bodyPr wrap="square" rtlCol="0" anchor="ctr"/>
-          <a:lstStyle/>
-          <a:p>
-            <a:pPr algn="ctr" indent="0" marL="0">
-              <a:buNone/>
-            </a:pPr>
-            <a:r>
-              <a:rPr lang="en-US" sz="1200" b="1" dirty="0">
-                <a:solidFill>
-                  <a:srgbClr val="F0B429"/>
-                </a:solidFill>
-                <a:latin typeface="Courier New" pitchFamily="34" charset="0"/>
-                <a:ea typeface="Courier New" pitchFamily="34" charset="-122"/>
-                <a:cs typeface="Courier New" pitchFamily="34" charset="-120"/>
-              </a:rPr>
-              <a:t>CLAUDE VETO</a:t>
-            </a:r>
-            <a:endParaRPr lang="en-US" sz="1200" dirty="0"/>
-          </a:p>
-        </p:txBody>
-      </p:sp>
-      <p:sp>
-        <p:nvSpPr>
-          <p:cNvPr id="15" name="Text 13"/>
-          <p:cNvSpPr txBox="1"/>
-          <p:nvPr/>
-        </p:nvSpPr>
-        <p:spPr>
-          <a:xfrm>
-            <a:off x="6286500" y="2368296"/>
-            <a:ext cx="2439162" cy="795528"/>
-          </a:xfrm>
-          <a:prstGeom prst="rect">
-            <a:avLst/>
-          </a:prstGeom>
-          <a:noFill/>
-          <a:ln/>
-        </p:spPr>
-        <p:txBody>
-          <a:bodyPr wrap="square" rtlCol="0" anchor="ctr"/>
-          <a:lstStyle/>
-          <a:p>
-            <a:pPr algn="ctr" indent="0" marL="0">
-              <a:lnSpc>
-                <a:spcPct val="120000"/>
-              </a:lnSpc>
-              <a:buNone/>
-            </a:pPr>
-            <a:r>
-              <a:rPr lang="en-US" sz="1000" dirty="0">
-                <a:solidFill>
-                  <a:srgbClr val="A1A8B5"/>
-                </a:solidFill>
-                <a:latin typeface="Arial" pitchFamily="34" charset="0"/>
-                <a:ea typeface="Arial" pitchFamily="34" charset="-122"/>
-                <a:cs typeface="Arial" pitchFamily="34" charset="-120"/>
-              </a:rPr>
-              <a:t>bull / bear debate,</a:t>
-            </a:r>
-            <a:endParaRPr lang="en-US" sz="1000" dirty="0"/>
-          </a:p>
-          <a:p>
-            <a:pPr algn="ctr" indent="0" marL="0">
-              <a:lnSpc>
-                <a:spcPct val="120000"/>
-              </a:lnSpc>
-              <a:buNone/>
-            </a:pPr>
-            <a:r>
-              <a:rPr lang="en-US" sz="1000" dirty="0">
-                <a:solidFill>
-                  <a:srgbClr val="A1A8B5"/>
-                </a:solidFill>
-                <a:latin typeface="Arial" pitchFamily="34" charset="0"/>
-                <a:ea typeface="Arial" pitchFamily="34" charset="-122"/>
-                <a:cs typeface="Arial" pitchFamily="34" charset="-120"/>
-              </a:rPr>
-              <a:t>regime read - no-go only</a:t>
-            </a:r>
-            <a:endParaRPr lang="en-US" sz="1000" dirty="0"/>
-          </a:p>
-        </p:txBody>
-      </p:sp>
-      <p:sp>
-        <p:nvSpPr>
-          <p:cNvPr id="16" name="Text 14"/>
-          <p:cNvSpPr txBox="1"/>
-          <p:nvPr/>
-        </p:nvSpPr>
-        <p:spPr>
-          <a:xfrm>
-            <a:off x="8817102" y="2400300"/>
-            <a:ext cx="201168" cy="365760"/>
-          </a:xfrm>
-          <a:prstGeom prst="rect">
-            <a:avLst/>
-          </a:prstGeom>
-          <a:noFill/>
-          <a:ln/>
-        </p:spPr>
-        <p:txBody>
-          <a:bodyPr wrap="square" rtlCol="0" anchor="ctr"/>
-          <a:lstStyle/>
-          <a:p>
-            <a:pPr algn="ctr" indent="0" marL="0">
-              <a:buNone/>
-            </a:pPr>
-            <a:r>
-              <a:rPr lang="en-US" sz="1600" dirty="0">
-                <a:solidFill>
-                  <a:srgbClr val="6B7686"/>
-                </a:solidFill>
-                <a:latin typeface="Arial" pitchFamily="34" charset="0"/>
-                <a:ea typeface="Arial" pitchFamily="34" charset="-122"/>
-                <a:cs typeface="Arial" pitchFamily="34" charset="-120"/>
-              </a:rPr>
-              <a:t>›</a:t>
-            </a:r>
-            <a:endParaRPr lang="en-US" sz="1600" dirty="0"/>
-          </a:p>
-        </p:txBody>
-      </p:sp>
-      <p:sp>
-        <p:nvSpPr>
-          <p:cNvPr id="17" name="Shape 15"/>
-          <p:cNvSpPr/>
-          <p:nvPr/>
-        </p:nvSpPr>
-        <p:spPr>
-          <a:xfrm>
-            <a:off x="9018270" y="1874520"/>
-            <a:ext cx="2622042" cy="1417320"/>
-          </a:xfrm>
-          <a:prstGeom prst="roundRect">
-            <a:avLst>
-              <a:gd name="adj" fmla="val 5161"/>
+              <a:gd name="adj" fmla="val 5263"/>
             </a:avLst>
           </a:prstGeom>
           <a:solidFill>
@@ -6423,72 +6413,72 @@
       </p:sp>
       <p:sp>
         <p:nvSpPr>
-          <p:cNvPr id="18" name="Text 16"/>
-          <p:cNvSpPr txBox="1"/>
-          <p:nvPr/>
-        </p:nvSpPr>
-        <p:spPr>
-          <a:xfrm>
-            <a:off x="9018270" y="2039112"/>
-            <a:ext cx="2622042" cy="274320"/>
-          </a:xfrm>
-          <a:prstGeom prst="rect">
-            <a:avLst/>
-          </a:prstGeom>
-          <a:noFill/>
-          <a:ln/>
-        </p:spPr>
-        <p:txBody>
-          <a:bodyPr wrap="square" rtlCol="0" anchor="ctr"/>
-          <a:lstStyle/>
-          <a:p>
-            <a:pPr algn="ctr" indent="0" marL="0">
-              <a:buNone/>
-            </a:pPr>
-            <a:r>
-              <a:rPr lang="en-US" sz="1200" b="1" dirty="0">
-                <a:solidFill>
-                  <a:srgbClr val="FFFFFF"/>
+          <p:cNvPr id="14" name="Text 12"/>
+          <p:cNvSpPr txBox="1"/>
+          <p:nvPr/>
+        </p:nvSpPr>
+        <p:spPr>
+          <a:xfrm>
+            <a:off x="8375904" y="2871216"/>
+            <a:ext cx="2971800" cy="219456"/>
+          </a:xfrm>
+          <a:prstGeom prst="rect">
+            <a:avLst/>
+          </a:prstGeom>
+          <a:noFill/>
+          <a:ln/>
+        </p:spPr>
+        <p:txBody>
+          <a:bodyPr wrap="square" lIns="0" tIns="0" rIns="0" bIns="0" rtlCol="0" anchor="ctr"/>
+          <a:lstStyle/>
+          <a:p>
+            <a:pPr indent="0" marL="0">
+              <a:buNone/>
+            </a:pPr>
+            <a:r>
+              <a:rPr lang="en-US" sz="1000" spc="140" kern="0" dirty="0">
+                <a:solidFill>
+                  <a:srgbClr val="6B7686"/>
                 </a:solidFill>
                 <a:latin typeface="Courier New" pitchFamily="34" charset="0"/>
                 <a:ea typeface="Courier New" pitchFamily="34" charset="-122"/>
                 <a:cs typeface="Courier New" pitchFamily="34" charset="-120"/>
               </a:rPr>
-              <a:t>ORDER</a:t>
-            </a:r>
-            <a:endParaRPr lang="en-US" sz="1200" dirty="0"/>
-          </a:p>
-        </p:txBody>
-      </p:sp>
-      <p:sp>
-        <p:nvSpPr>
-          <p:cNvPr id="19" name="Text 17"/>
-          <p:cNvSpPr txBox="1"/>
-          <p:nvPr/>
-        </p:nvSpPr>
-        <p:spPr>
-          <a:xfrm>
-            <a:off x="9109710" y="2368296"/>
-            <a:ext cx="2439162" cy="795528"/>
-          </a:xfrm>
-          <a:prstGeom prst="rect">
-            <a:avLst/>
-          </a:prstGeom>
-          <a:noFill/>
-          <a:ln/>
-        </p:spPr>
-        <p:txBody>
-          <a:bodyPr wrap="square" rtlCol="0" anchor="ctr"/>
-          <a:lstStyle/>
-          <a:p>
-            <a:pPr algn="ctr" indent="0" marL="0">
+              <a:t>ENTRY DEDUP · 30 MIN</a:t>
+            </a:r>
+            <a:endParaRPr lang="en-US" sz="1000" dirty="0"/>
+          </a:p>
+        </p:txBody>
+      </p:sp>
+      <p:sp>
+        <p:nvSpPr>
+          <p:cNvPr id="15" name="Text 13"/>
+          <p:cNvSpPr txBox="1"/>
+          <p:nvPr/>
+        </p:nvSpPr>
+        <p:spPr>
+          <a:xfrm>
+            <a:off x="8375904" y="3163824"/>
+            <a:ext cx="2971800" cy="731520"/>
+          </a:xfrm>
+          <a:prstGeom prst="rect">
+            <a:avLst/>
+          </a:prstGeom>
+          <a:noFill/>
+          <a:ln/>
+        </p:spPr>
+        <p:txBody>
+          <a:bodyPr wrap="square" lIns="0" tIns="0" rIns="0" bIns="0" rtlCol="0" anchor="t"/>
+          <a:lstStyle/>
+          <a:p>
+            <a:pPr indent="0" marL="0">
               <a:lnSpc>
                 <a:spcPct val="120000"/>
               </a:lnSpc>
               <a:buNone/>
             </a:pPr>
             <a:r>
-              <a:rPr lang="en-US" sz="1000" dirty="0">
+              <a:rPr lang="en-US" sz="1100" dirty="0">
                 <a:solidFill>
                   <a:srgbClr val="A1A8B5"/>
                 </a:solidFill>
@@ -6496,46 +6486,26 @@
                 <a:ea typeface="Arial" pitchFamily="34" charset="-122"/>
                 <a:cs typeface="Arial" pitchFamily="34" charset="-120"/>
               </a:rPr>
-              <a:t>ATM long via the</a:t>
-            </a:r>
-            <a:endParaRPr lang="en-US" sz="1000" dirty="0"/>
-          </a:p>
-          <a:p>
-            <a:pPr algn="ctr" indent="0" marL="0">
-              <a:lnSpc>
-                <a:spcPct val="120000"/>
-              </a:lnSpc>
-              <a:buNone/>
-            </a:pPr>
-            <a:r>
-              <a:rPr lang="en-US" sz="1000" dirty="0">
-                <a:solidFill>
-                  <a:srgbClr val="A1A8B5"/>
-                </a:solidFill>
-                <a:latin typeface="Arial" pitchFamily="34" charset="0"/>
-                <a:ea typeface="Arial" pitchFamily="34" charset="-122"/>
-                <a:cs typeface="Arial" pitchFamily="34" charset="-120"/>
-              </a:rPr>
-              <a:t>Alpaca CLI</a:t>
-            </a:r>
-            <a:endParaRPr lang="en-US" sz="1000" dirty="0"/>
-          </a:p>
-        </p:txBody>
-      </p:sp>
-      <p:sp>
-        <p:nvSpPr>
-          <p:cNvPr id="20" name="Shape 18"/>
+              <a:t>Entry-anchored, so a persistent score cannot stack the same name.</a:t>
+            </a:r>
+            <a:endParaRPr lang="en-US" sz="1100" dirty="0"/>
+          </a:p>
+        </p:txBody>
+      </p:sp>
+      <p:sp>
+        <p:nvSpPr>
+          <p:cNvPr id="16" name="Shape 14"/>
           <p:cNvSpPr/>
           <p:nvPr/>
         </p:nvSpPr>
         <p:spPr>
           <a:xfrm>
-            <a:off x="548640" y="3611880"/>
-            <a:ext cx="5440680" cy="1691640"/>
+            <a:off x="548640" y="4242816"/>
+            <a:ext cx="3557016" cy="1389888"/>
           </a:xfrm>
           <a:prstGeom prst="roundRect">
             <a:avLst>
-              <a:gd name="adj" fmla="val 4324"/>
+              <a:gd name="adj" fmla="val 5263"/>
             </a:avLst>
           </a:prstGeom>
           <a:solidFill>
@@ -6551,14 +6521,14 @@
       </p:sp>
       <p:sp>
         <p:nvSpPr>
-          <p:cNvPr id="21" name="Text 19"/>
-          <p:cNvSpPr txBox="1"/>
-          <p:nvPr/>
-        </p:nvSpPr>
-        <p:spPr>
-          <a:xfrm>
-            <a:off x="841248" y="3813048"/>
-            <a:ext cx="4855464" cy="219456"/>
+          <p:cNvPr id="17" name="Text 15"/>
+          <p:cNvSpPr txBox="1"/>
+          <p:nvPr/>
+        </p:nvSpPr>
+        <p:spPr>
+          <a:xfrm>
+            <a:off x="841248" y="4443984"/>
+            <a:ext cx="2971800" cy="219456"/>
           </a:xfrm>
           <a:prstGeom prst="rect">
             <a:avLst/>
@@ -6582,7 +6552,7 @@
                 <a:ea typeface="Courier New" pitchFamily="34" charset="-122"/>
                 <a:cs typeface="Courier New" pitchFamily="34" charset="-120"/>
               </a:rPr>
-              <a:t>THE ONE-WAY RULE</a:t>
+              <a:t>ADAPTIVE SIZING</a:t>
             </a:r>
             <a:endParaRPr lang="en-US" sz="1000" dirty="0"/>
           </a:p>
@@ -6590,53 +6560,14 @@
       </p:sp>
       <p:sp>
         <p:nvSpPr>
-          <p:cNvPr id="22" name="Text 20"/>
-          <p:cNvSpPr txBox="1"/>
-          <p:nvPr/>
-        </p:nvSpPr>
-        <p:spPr>
-          <a:xfrm>
-            <a:off x="841248" y="4105656"/>
-            <a:ext cx="4855464" cy="411480"/>
-          </a:xfrm>
-          <a:prstGeom prst="rect">
-            <a:avLst/>
-          </a:prstGeom>
-          <a:noFill/>
-          <a:ln/>
-        </p:spPr>
-        <p:txBody>
-          <a:bodyPr wrap="square" lIns="0" tIns="0" rIns="0" bIns="0" rtlCol="0" anchor="ctr"/>
-          <a:lstStyle/>
-          <a:p>
-            <a:pPr indent="0" marL="0">
-              <a:buNone/>
-            </a:pPr>
-            <a:r>
-              <a:rPr lang="en-US" sz="2200" b="1" dirty="0">
-                <a:solidFill>
-                  <a:srgbClr val="F0B429"/>
-                </a:solidFill>
-                <a:latin typeface="Arial" pitchFamily="34" charset="0"/>
-                <a:ea typeface="Arial" pitchFamily="34" charset="-122"/>
-                <a:cs typeface="Arial" pitchFamily="34" charset="-120"/>
-              </a:rPr>
-              <a:t>go → no-go only</a:t>
-            </a:r>
-            <a:endParaRPr lang="en-US" sz="2200" dirty="0"/>
-          </a:p>
-        </p:txBody>
-      </p:sp>
-      <p:sp>
-        <p:nvSpPr>
-          <p:cNvPr id="23" name="Text 21"/>
-          <p:cNvSpPr txBox="1"/>
-          <p:nvPr/>
-        </p:nvSpPr>
-        <p:spPr>
-          <a:xfrm>
-            <a:off x="841248" y="4572000"/>
-            <a:ext cx="4855464" cy="566928"/>
+          <p:cNvPr id="18" name="Text 16"/>
+          <p:cNvSpPr txBox="1"/>
+          <p:nvPr/>
+        </p:nvSpPr>
+        <p:spPr>
+          <a:xfrm>
+            <a:off x="841248" y="4736592"/>
+            <a:ext cx="2971800" cy="731520"/>
           </a:xfrm>
           <a:prstGeom prst="rect">
             <a:avLst/>
@@ -6663,7 +6594,7 @@
                 <a:ea typeface="Arial" pitchFamily="34" charset="-122"/>
                 <a:cs typeface="Arial" pitchFamily="34" charset="-120"/>
               </a:rPr>
-              <a:t>The model can remove a trade the rules approved. It can never resurrect one they rejected, so the deterministic path is a strict subset of the AI path - and both are auditable against each other.</a:t>
+              <a:t>Trimmed to the account's real options buying power - an expensive contract sizes down, never rejects.</a:t>
             </a:r>
             <a:endParaRPr lang="en-US" sz="1100" dirty="0"/>
           </a:p>
@@ -6671,18 +6602,18 @@
       </p:sp>
       <p:sp>
         <p:nvSpPr>
-          <p:cNvPr id="24" name="Shape 22"/>
+          <p:cNvPr id="19" name="Shape 17"/>
           <p:cNvSpPr/>
           <p:nvPr/>
         </p:nvSpPr>
         <p:spPr>
           <a:xfrm>
-            <a:off x="6199632" y="3611880"/>
-            <a:ext cx="5440680" cy="1691640"/>
+            <a:off x="4315968" y="4242816"/>
+            <a:ext cx="3557016" cy="1389888"/>
           </a:xfrm>
           <a:prstGeom prst="roundRect">
             <a:avLst>
-              <a:gd name="adj" fmla="val 4324"/>
+              <a:gd name="adj" fmla="val 5263"/>
             </a:avLst>
           </a:prstGeom>
           <a:solidFill>
@@ -6698,14 +6629,14 @@
       </p:sp>
       <p:sp>
         <p:nvSpPr>
-          <p:cNvPr id="25" name="Text 23"/>
-          <p:cNvSpPr txBox="1"/>
-          <p:nvPr/>
-        </p:nvSpPr>
-        <p:spPr>
-          <a:xfrm>
-            <a:off x="6492240" y="3813048"/>
-            <a:ext cx="4855464" cy="219456"/>
+          <p:cNvPr id="20" name="Text 18"/>
+          <p:cNvSpPr txBox="1"/>
+          <p:nvPr/>
+        </p:nvSpPr>
+        <p:spPr>
+          <a:xfrm>
+            <a:off x="4608576" y="4443984"/>
+            <a:ext cx="2971800" cy="219456"/>
           </a:xfrm>
           <a:prstGeom prst="rect">
             <a:avLst/>
@@ -6729,7 +6660,7 @@
                 <a:ea typeface="Courier New" pitchFamily="34" charset="-122"/>
                 <a:cs typeface="Courier New" pitchFamily="34" charset="-120"/>
               </a:rPr>
-              <a:t>FAILS CLOSED, NEVER OPEN</a:t>
+              <a:t>SESSION WINDOW</a:t>
             </a:r>
             <a:endParaRPr lang="en-US" sz="1000" dirty="0"/>
           </a:p>
@@ -6737,53 +6668,14 @@
       </p:sp>
       <p:sp>
         <p:nvSpPr>
-          <p:cNvPr id="26" name="Text 24"/>
-          <p:cNvSpPr txBox="1"/>
-          <p:nvPr/>
-        </p:nvSpPr>
-        <p:spPr>
-          <a:xfrm>
-            <a:off x="6492240" y="4105656"/>
-            <a:ext cx="4855464" cy="411480"/>
-          </a:xfrm>
-          <a:prstGeom prst="rect">
-            <a:avLst/>
-          </a:prstGeom>
-          <a:noFill/>
-          <a:ln/>
-        </p:spPr>
-        <p:txBody>
-          <a:bodyPr wrap="square" lIns="0" tIns="0" rIns="0" bIns="0" rtlCol="0" anchor="ctr"/>
-          <a:lstStyle/>
-          <a:p>
-            <a:pPr indent="0" marL="0">
-              <a:buNone/>
-            </a:pPr>
-            <a:r>
-              <a:rPr lang="en-US" sz="2000" b="1" dirty="0">
-                <a:solidFill>
-                  <a:srgbClr val="FFFFFF"/>
-                </a:solidFill>
-                <a:latin typeface="Arial" pitchFamily="34" charset="0"/>
-                <a:ea typeface="Arial" pitchFamily="34" charset="-122"/>
-                <a:cs typeface="Arial" pitchFamily="34" charset="-120"/>
-              </a:rPr>
-              <a:t>degrade, don't guess</a:t>
-            </a:r>
-            <a:endParaRPr lang="en-US" sz="2000" dirty="0"/>
-          </a:p>
-        </p:txBody>
-      </p:sp>
-      <p:sp>
-        <p:nvSpPr>
-          <p:cNvPr id="27" name="Text 25"/>
-          <p:cNvSpPr txBox="1"/>
-          <p:nvPr/>
-        </p:nvSpPr>
-        <p:spPr>
-          <a:xfrm>
-            <a:off x="6492240" y="4572000"/>
-            <a:ext cx="4855464" cy="566928"/>
+          <p:cNvPr id="21" name="Text 19"/>
+          <p:cNvSpPr txBox="1"/>
+          <p:nvPr/>
+        </p:nvSpPr>
+        <p:spPr>
+          <a:xfrm>
+            <a:off x="4608576" y="4736592"/>
+            <a:ext cx="2971800" cy="731520"/>
           </a:xfrm>
           <a:prstGeom prst="rect">
             <a:avLst/>
@@ -6810,7 +6702,7 @@
                 <a:ea typeface="Arial" pitchFamily="34" charset="-122"/>
                 <a:cs typeface="Arial" pitchFamily="34" charset="-120"/>
               </a:rPr>
-              <a:t>A missing key or unparseable reply degrades to the deterministic gate and says so in the journal. The agent never trades on a model response it could not read.</a:t>
+              <a:t>No entry after 15:00 ET. Hard flatten at 15:50 - a 0DTE never reaches expiry.</a:t>
             </a:r>
             <a:endParaRPr lang="en-US" sz="1100" dirty="0"/>
           </a:p>
@@ -6818,14 +6710,41 @@
       </p:sp>
       <p:sp>
         <p:nvSpPr>
-          <p:cNvPr id="28" name="Text 26"/>
-          <p:cNvSpPr txBox="1"/>
-          <p:nvPr/>
-        </p:nvSpPr>
-        <p:spPr>
-          <a:xfrm>
-            <a:off x="548640" y="5486400"/>
-            <a:ext cx="11091672" cy="365760"/>
+          <p:cNvPr id="22" name="Shape 20"/>
+          <p:cNvSpPr/>
+          <p:nvPr/>
+        </p:nvSpPr>
+        <p:spPr>
+          <a:xfrm>
+            <a:off x="8083296" y="4242816"/>
+            <a:ext cx="3557016" cy="1389888"/>
+          </a:xfrm>
+          <a:prstGeom prst="roundRect">
+            <a:avLst>
+              <a:gd name="adj" fmla="val 5263"/>
+            </a:avLst>
+          </a:prstGeom>
+          <a:solidFill>
+            <a:srgbClr val="141922"/>
+          </a:solidFill>
+          <a:ln w="12700">
+            <a:solidFill>
+              <a:srgbClr val="232A38"/>
+            </a:solidFill>
+            <a:prstDash val="solid"/>
+          </a:ln>
+        </p:spPr>
+      </p:sp>
+      <p:sp>
+        <p:nvSpPr>
+          <p:cNvPr id="23" name="Text 21"/>
+          <p:cNvSpPr txBox="1"/>
+          <p:nvPr/>
+        </p:nvSpPr>
+        <p:spPr>
+          <a:xfrm>
+            <a:off x="8375904" y="4443984"/>
+            <a:ext cx="2971800" cy="219456"/>
           </a:xfrm>
           <a:prstGeom prst="rect">
             <a:avLst/>
@@ -6841,7 +6760,7 @@
               <a:buNone/>
             </a:pPr>
             <a:r>
-              <a:rPr lang="en-US" sz="1000" dirty="0">
+              <a:rPr lang="en-US" sz="1000" spc="140" kern="0" dirty="0">
                 <a:solidFill>
                   <a:srgbClr val="6B7686"/>
                 </a:solidFill>
@@ -6849,9 +6768,90 @@
                 <a:ea typeface="Courier New" pitchFamily="34" charset="-122"/>
                 <a:cs typeface="Courier New" pitchFamily="34" charset="-120"/>
               </a:rPr>
-              <a:t>The scored sessions ran the deterministic gate; the Claude veto ships tested and runnable via --decision-mode llm.</a:t>
+              <a:t>ORPHAN SWEEP</a:t>
             </a:r>
             <a:endParaRPr lang="en-US" sz="1000" dirty="0"/>
+          </a:p>
+        </p:txBody>
+      </p:sp>
+      <p:sp>
+        <p:nvSpPr>
+          <p:cNvPr id="24" name="Text 22"/>
+          <p:cNvSpPr txBox="1"/>
+          <p:nvPr/>
+        </p:nvSpPr>
+        <p:spPr>
+          <a:xfrm>
+            <a:off x="8375904" y="4736592"/>
+            <a:ext cx="2971800" cy="731520"/>
+          </a:xfrm>
+          <a:prstGeom prst="rect">
+            <a:avLst/>
+          </a:prstGeom>
+          <a:noFill/>
+          <a:ln/>
+        </p:spPr>
+        <p:txBody>
+          <a:bodyPr wrap="square" lIns="0" tIns="0" rIns="0" bIns="0" rtlCol="0" anchor="t"/>
+          <a:lstStyle/>
+          <a:p>
+            <a:pPr indent="0" marL="0">
+              <a:lnSpc>
+                <a:spcPct val="120000"/>
+              </a:lnSpc>
+              <a:buNone/>
+            </a:pPr>
+            <a:r>
+              <a:rPr lang="en-US" sz="1100" dirty="0">
+                <a:solidFill>
+                  <a:srgbClr val="A1A8B5"/>
+                </a:solidFill>
+                <a:latin typeface="Arial" pitchFamily="34" charset="0"/>
+                <a:ea typeface="Arial" pitchFamily="34" charset="-122"/>
+                <a:cs typeface="Arial" pitchFamily="34" charset="-120"/>
+              </a:rPr>
+              <a:t>Any option position the agent did not open is flattened at startup and at EOD.</a:t>
+            </a:r>
+            <a:endParaRPr lang="en-US" sz="1100" dirty="0"/>
+          </a:p>
+        </p:txBody>
+      </p:sp>
+      <p:sp>
+        <p:nvSpPr>
+          <p:cNvPr id="25" name="Text 23"/>
+          <p:cNvSpPr txBox="1"/>
+          <p:nvPr/>
+        </p:nvSpPr>
+        <p:spPr>
+          <a:xfrm>
+            <a:off x="548640" y="5870448"/>
+            <a:ext cx="11091672" cy="365760"/>
+          </a:xfrm>
+          <a:prstGeom prst="rect">
+            <a:avLst/>
+          </a:prstGeom>
+          <a:noFill/>
+          <a:ln/>
+        </p:spPr>
+        <p:txBody>
+          <a:bodyPr wrap="square" lIns="0" tIns="0" rIns="0" bIns="0" rtlCol="0" anchor="ctr"/>
+          <a:lstStyle/>
+          <a:p>
+            <a:pPr indent="0" marL="0">
+              <a:buNone/>
+            </a:pPr>
+            <a:r>
+              <a:rPr lang="en-US" sz="1100" dirty="0">
+                <a:solidFill>
+                  <a:srgbClr val="A1A8B5"/>
+                </a:solidFill>
+                <a:latin typeface="Arial" pitchFamily="34" charset="0"/>
+                <a:ea typeface="Arial" pitchFamily="34" charset="-122"/>
+                <a:cs typeface="Arial" pitchFamily="34" charset="-120"/>
+              </a:rPr>
+              <a:t>Exits ladder in both directions:  +40% scales out half and trails the runner by 40% of its peak gain  ·  -20% sells half, -40% the rest  ·  a 30-minute stop closes anything still under water  ·  15:50 flatten.</a:t>
+            </a:r>
+            <a:endParaRPr lang="en-US" sz="1100" dirty="0"/>
           </a:p>
         </p:txBody>
       </p:sp>
